--- a/sjoskolan/vecka-41/aktuell/v41_01_Trefassystemets_grunder_elev.pptx
+++ b/sjoskolan/vecka-41/aktuell/v41_01_Trefassystemets_grunder_elev.pptx
@@ -6005,7 +6005,7 @@
         <p:spPr>
           <a:xfrm xmlns:a="http://schemas.openxmlformats.org/drawingml/2006/main">
             <a:off x="762000" y="2533650"/>
-            <a:ext cx="7620000" cy="2286000"/>
+            <a:ext cx="3886200" cy="2606040"/>
           </a:xfrm>
           <a:prstGeom xmlns:a="http://schemas.openxmlformats.org/drawingml/2006/main" prst="rect">
             <a:avLst/>
@@ -6162,6 +6162,30 @@
           </a:p>
         </p:txBody>
       </p:sp>
+      <p:pic xmlns:a="http://schemas.openxmlformats.org/drawingml/2006/main" xmlns:r="http://schemas.openxmlformats.org/officeDocument/2006/relationships">
+        <p:nvPicPr>
+          <p:cNvPr id="9" name="Figur: Tre fasvisare L1, L2 och L3 med okänd vi" descr="Tre fasvisare L1, L2 och L3 med okänd vinkel mellan L1 och L2"/>
+          <p:cNvPicPr>
+            <a:picLocks noChangeAspect="1"/>
+          </p:cNvPicPr>
+          <p:nvPr/>
+        </p:nvPicPr>
+        <p:blipFill>
+          <a:blip r:embed="rId3"/>
+          <a:stretch>
+            <a:fillRect/>
+          </a:stretch>
+        </p:blipFill>
+        <p:spPr>
+          <a:xfrm>
+            <a:off x="4846320" y="2331720"/>
+            <a:ext cx="3931920" cy="2740984"/>
+          </a:xfrm>
+          <a:prstGeom prst="rect">
+            <a:avLst/>
+          </a:prstGeom>
+        </p:spPr>
+      </p:pic>
     </p:spTree>
     <p:extLst>
       <p:ext uri="{BB962C8B-B14F-4D97-AF65-F5344CB8AC3E}">
@@ -6729,7 +6753,7 @@
         <p:spPr>
           <a:xfrm xmlns:a="http://schemas.openxmlformats.org/drawingml/2006/main">
             <a:off x="762000" y="2533650"/>
-            <a:ext cx="7620000" cy="2286000"/>
+            <a:ext cx="3886200" cy="2606040"/>
           </a:xfrm>
           <a:prstGeom xmlns:a="http://schemas.openxmlformats.org/drawingml/2006/main" prst="rect">
             <a:avLst/>
@@ -6765,7 +6789,7 @@
                 <a:ea typeface="Calibri"/>
                 <a:cs typeface="Calibri"/>
               </a:rPr>
-              <a:t>Ett symmetriskt trefassystem har f = 50 Hz. Hur många ms motsvarar 120°?</a:t>
+              <a:t>Ett symmetriskt trefassystem har f = 50 Hz. Hur många ms motsvarar 120°?</a:t>
             </a:r>
           </a:p>
         </p:txBody>
@@ -6886,6 +6910,30 @@
           </a:p>
         </p:txBody>
       </p:sp>
+      <p:pic xmlns:a="http://schemas.openxmlformats.org/drawingml/2006/main" xmlns:r="http://schemas.openxmlformats.org/officeDocument/2006/relationships">
+        <p:nvPicPr>
+          <p:cNvPr id="9" name="Figur: Tre sinusspänningar vid 50 Hz med okänd " descr="Tre sinusspänningar vid 50 Hz med okänd tidsförskjutning mellan L1 och L2"/>
+          <p:cNvPicPr>
+            <a:picLocks noChangeAspect="1"/>
+          </p:cNvPicPr>
+          <p:nvPr/>
+        </p:nvPicPr>
+        <p:blipFill>
+          <a:blip r:embed="rId3"/>
+          <a:stretch>
+            <a:fillRect/>
+          </a:stretch>
+        </p:blipFill>
+        <p:spPr>
+          <a:xfrm>
+            <a:off x="4846320" y="2331720"/>
+            <a:ext cx="3931920" cy="2740984"/>
+          </a:xfrm>
+          <a:prstGeom prst="rect">
+            <a:avLst/>
+          </a:prstGeom>
+        </p:spPr>
+      </p:pic>
     </p:spTree>
     <p:extLst>
       <p:ext uri="{BB962C8B-B14F-4D97-AF65-F5344CB8AC3E}">
@@ -6991,7 +7039,7 @@
       </p:sp>
       <p:sp>
         <p:nvSpPr>
-          <p:cNvPr id="10" name="Uꜰ = Uᴸ/√3">
+          <p:cNvPr id="10" name="UF = UL/√3">
             <a:extLst xmlns:a="http://schemas.openxmlformats.org/drawingml/2006/main">
               <a:ext uri="{FF2B5EF4-FFF2-40B4-BE49-F238E27FC236}">
                 <a16:creationId xmlns:a16="http://schemas.microsoft.com/office/drawing/2014/main" id="{54641C4D-4AE5-412D-9C65-60DA13A2CE4C}"/>
@@ -7041,14 +7089,58 @@
                 <a:ea typeface="Calibri"/>
                 <a:cs typeface="Calibri"/>
               </a:rPr>
-              <a:t>Uꜰ = Uᴸ/√3</a:t>
-            </a:r>
-          </a:p>
-        </p:txBody>
-      </p:sp>
-      <p:sp>
-        <p:nvSpPr>
-          <p:cNvPr id="11" name="Uᴸ är linje- eller huvudspänning mellan två faser. Uꜰ är spänning">
+              <a:t>U</a:t>
+            </a:r>
+            <a:r>
+              <a:rPr sz="2400" b="1" baseline="-25000">
+                <a:solidFill>
+                  <a:srgbClr val="064F91"/>
+                </a:solidFill>
+                <a:latin typeface="Calibri"/>
+                <a:ea typeface="Calibri"/>
+                <a:cs typeface="Calibri"/>
+              </a:rPr>
+              <a:t>F</a:t>
+            </a:r>
+            <a:r>
+              <a:rPr sz="2400" b="1">
+                <a:solidFill>
+                  <a:srgbClr val="064F91"/>
+                </a:solidFill>
+                <a:latin typeface="Calibri"/>
+                <a:ea typeface="Calibri"/>
+                <a:cs typeface="Calibri"/>
+              </a:rPr>
+              <a:t> = U</a:t>
+            </a:r>
+            <a:r>
+              <a:rPr sz="2400" b="1" baseline="-25000">
+                <a:solidFill>
+                  <a:srgbClr val="064F91"/>
+                </a:solidFill>
+                <a:latin typeface="Calibri"/>
+                <a:ea typeface="Calibri"/>
+                <a:cs typeface="Calibri"/>
+              </a:rPr>
+              <a:t>L</a:t>
+            </a:r>
+            <a:r>
+              <a:rPr sz="2400" b="1">
+                <a:solidFill>
+                  <a:srgbClr val="064F91"/>
+                </a:solidFill>
+                <a:latin typeface="Calibri"/>
+                <a:ea typeface="Calibri"/>
+                <a:cs typeface="Calibri"/>
+              </a:rPr>
+              <a:t>/√3</a:t>
+            </a:r>
+          </a:p>
+        </p:txBody>
+      </p:sp>
+      <p:sp>
+        <p:nvSpPr>
+          <p:cNvPr id="11" name="UL är linje- eller huvudspänning mellan två faser. UF är spänning">
             <a:extLst xmlns:a="http://schemas.openxmlformats.org/drawingml/2006/main">
               <a:ext uri="{FF2B5EF4-FFF2-40B4-BE49-F238E27FC236}">
                 <a16:creationId xmlns:a16="http://schemas.microsoft.com/office/drawing/2014/main" id="{61879C50-7F9A-4500-90E3-C7FC821B0FA3}"/>
@@ -7098,14 +7190,58 @@
                 <a:ea typeface="Calibri"/>
                 <a:cs typeface="Calibri"/>
               </a:rPr>
-              <a:t>Uᴸ är linje- eller huvudspänning mellan två faser. Uꜰ är spänning mellan fas och källans neutralpunkt.</a:t>
-            </a:r>
-          </a:p>
-        </p:txBody>
-      </p:sp>
-      <p:sp>
-        <p:nvSpPr>
-          <p:cNvPr id="12" name="Förutsättningar: Symmetrisk trefaskälla med Uᴸ = 400 V. √3 ≈ 1,73">
+              <a:t>U</a:t>
+            </a:r>
+            <a:r>
+              <a:rPr sz="2100" b="0" baseline="-25000">
+                <a:solidFill>
+                  <a:srgbClr val="111111"/>
+                </a:solidFill>
+                <a:latin typeface="Calibri"/>
+                <a:ea typeface="Calibri"/>
+                <a:cs typeface="Calibri"/>
+              </a:rPr>
+              <a:t>L</a:t>
+            </a:r>
+            <a:r>
+              <a:rPr sz="2100" b="0">
+                <a:solidFill>
+                  <a:srgbClr val="111111"/>
+                </a:solidFill>
+                <a:latin typeface="Calibri"/>
+                <a:ea typeface="Calibri"/>
+                <a:cs typeface="Calibri"/>
+              </a:rPr>
+              <a:t> är linje- eller huvudspänning mellan två faser. U</a:t>
+            </a:r>
+            <a:r>
+              <a:rPr sz="2100" b="0" baseline="-25000">
+                <a:solidFill>
+                  <a:srgbClr val="111111"/>
+                </a:solidFill>
+                <a:latin typeface="Calibri"/>
+                <a:ea typeface="Calibri"/>
+                <a:cs typeface="Calibri"/>
+              </a:rPr>
+              <a:t>F</a:t>
+            </a:r>
+            <a:r>
+              <a:rPr sz="2100" b="0">
+                <a:solidFill>
+                  <a:srgbClr val="111111"/>
+                </a:solidFill>
+                <a:latin typeface="Calibri"/>
+                <a:ea typeface="Calibri"/>
+                <a:cs typeface="Calibri"/>
+              </a:rPr>
+              <a:t> är spänning mellan fas och källans neutralpunkt.</a:t>
+            </a:r>
+          </a:p>
+        </p:txBody>
+      </p:sp>
+      <p:sp>
+        <p:nvSpPr>
+          <p:cNvPr id="12" name="Förutsättningar: Symmetrisk trefaskälla med UL = 400 V. √3 ≈ 1,73">
             <a:extLst xmlns:a="http://schemas.openxmlformats.org/drawingml/2006/main">
               <a:ext uri="{FF2B5EF4-FFF2-40B4-BE49-F238E27FC236}">
                 <a16:creationId xmlns:a16="http://schemas.microsoft.com/office/drawing/2014/main" id="{68C1E9D0-B401-43EF-81DC-BC715E92D5BC}"/>
@@ -7155,7 +7291,29 @@
                 <a:ea typeface="Calibri"/>
                 <a:cs typeface="Calibri"/>
               </a:rPr>
-              <a:t>Förutsättningar: Symmetrisk trefaskälla med Uᴸ = 400 V. √3 ≈ 1,732.</a:t>
+              <a:t>Förutsättningar: Symmetrisk trefaskälla med U</a:t>
+            </a:r>
+            <a:r>
+              <a:rPr sz="2025" b="0" baseline="-25000">
+                <a:solidFill>
+                  <a:srgbClr val="111111"/>
+                </a:solidFill>
+                <a:latin typeface="Calibri"/>
+                <a:ea typeface="Calibri"/>
+                <a:cs typeface="Calibri"/>
+              </a:rPr>
+              <a:t>L</a:t>
+            </a:r>
+            <a:r>
+              <a:rPr sz="2025" b="0">
+                <a:solidFill>
+                  <a:srgbClr val="111111"/>
+                </a:solidFill>
+                <a:latin typeface="Calibri"/>
+                <a:ea typeface="Calibri"/>
+                <a:cs typeface="Calibri"/>
+              </a:rPr>
+              <a:t> = 400 V. √3 ≈ 1,732.</a:t>
             </a:r>
           </a:p>
         </p:txBody>
@@ -7438,7 +7596,7 @@
       </p:sp>
       <p:sp>
         <p:nvSpPr>
-          <p:cNvPr id="4" name="Uᴸ = 400 V i ett symmetriskt system. Beräkna Uꜰ.">
+          <p:cNvPr id="4" name="UL = 400 V i ett symmetriskt system. Beräkna UF.">
             <a:extLst xmlns:a="http://schemas.openxmlformats.org/drawingml/2006/main">
               <a:ext uri="{FF2B5EF4-FFF2-40B4-BE49-F238E27FC236}">
                 <a16:creationId xmlns:a16="http://schemas.microsoft.com/office/drawing/2014/main" id="{755195FD-F6DC-46CB-9A31-A66530EE8D14}"/>
@@ -7453,7 +7611,7 @@
         <p:spPr>
           <a:xfrm xmlns:a="http://schemas.openxmlformats.org/drawingml/2006/main">
             <a:off x="762000" y="2533650"/>
-            <a:ext cx="7620000" cy="2286000"/>
+            <a:ext cx="3886200" cy="2606040"/>
           </a:xfrm>
           <a:prstGeom xmlns:a="http://schemas.openxmlformats.org/drawingml/2006/main" prst="rect">
             <a:avLst/>
@@ -7489,7 +7647,51 @@
                 <a:ea typeface="Calibri"/>
                 <a:cs typeface="Calibri"/>
               </a:rPr>
-              <a:t>Uᴸ = 400 V i ett symmetriskt system. Beräkna Uꜰ.</a:t>
+              <a:t>U</a:t>
+            </a:r>
+            <a:r>
+              <a:rPr sz="2400" b="0" baseline="-25000">
+                <a:solidFill>
+                  <a:srgbClr val="111111"/>
+                </a:solidFill>
+                <a:latin typeface="Calibri"/>
+                <a:ea typeface="Calibri"/>
+                <a:cs typeface="Calibri"/>
+              </a:rPr>
+              <a:t>L</a:t>
+            </a:r>
+            <a:r>
+              <a:rPr sz="2400" b="0">
+                <a:solidFill>
+                  <a:srgbClr val="111111"/>
+                </a:solidFill>
+                <a:latin typeface="Calibri"/>
+                <a:ea typeface="Calibri"/>
+                <a:cs typeface="Calibri"/>
+              </a:rPr>
+              <a:t> = 400 V i ett symmetriskt system. Beräkna U</a:t>
+            </a:r>
+            <a:r>
+              <a:rPr sz="2400" b="0" baseline="-25000">
+                <a:solidFill>
+                  <a:srgbClr val="111111"/>
+                </a:solidFill>
+                <a:latin typeface="Calibri"/>
+                <a:ea typeface="Calibri"/>
+                <a:cs typeface="Calibri"/>
+              </a:rPr>
+              <a:t>F</a:t>
+            </a:r>
+            <a:r>
+              <a:rPr sz="2400" b="0">
+                <a:solidFill>
+                  <a:srgbClr val="111111"/>
+                </a:solidFill>
+                <a:latin typeface="Calibri"/>
+                <a:ea typeface="Calibri"/>
+                <a:cs typeface="Calibri"/>
+              </a:rPr>
+              <a:t>.</a:t>
             </a:r>
           </a:p>
         </p:txBody>
@@ -7610,6 +7812,30 @@
           </a:p>
         </p:txBody>
       </p:sp>
+      <p:pic xmlns:a="http://schemas.openxmlformats.org/drawingml/2006/main" xmlns:r="http://schemas.openxmlformats.org/officeDocument/2006/relationships">
+        <p:nvPicPr>
+          <p:cNvPr id="9" name="Figur: Ledarna L1, L2, L3 och N; linjespänninge" descr="Ledarna L1, L2, L3 och N; linjespänningen 400 V mellan L1 och L2, fasspänningen okänd"/>
+          <p:cNvPicPr>
+            <a:picLocks noChangeAspect="1"/>
+          </p:cNvPicPr>
+          <p:nvPr/>
+        </p:nvPicPr>
+        <p:blipFill>
+          <a:blip r:embed="rId3"/>
+          <a:stretch>
+            <a:fillRect/>
+          </a:stretch>
+        </p:blipFill>
+        <p:spPr>
+          <a:xfrm>
+            <a:off x="4846320" y="2331720"/>
+            <a:ext cx="3931920" cy="2740984"/>
+          </a:xfrm>
+          <a:prstGeom prst="rect">
+            <a:avLst/>
+          </a:prstGeom>
+        </p:spPr>
+      </p:pic>
     </p:spTree>
     <p:extLst>
       <p:ext uri="{BB962C8B-B14F-4D97-AF65-F5344CB8AC3E}">
@@ -7715,7 +7941,7 @@
       </p:sp>
       <p:sp>
         <p:nvSpPr>
-          <p:cNvPr id="10" name="Uᴸ = √3 · Uꜰ">
+          <p:cNvPr id="10" name="UL = √3 · UF">
             <a:extLst xmlns:a="http://schemas.openxmlformats.org/drawingml/2006/main">
               <a:ext uri="{FF2B5EF4-FFF2-40B4-BE49-F238E27FC236}">
                 <a16:creationId xmlns:a16="http://schemas.microsoft.com/office/drawing/2014/main" id="{40946302-67BF-4737-99C6-DD5E8D138D6E}"/>
@@ -7765,7 +7991,40 @@
                 <a:ea typeface="Calibri"/>
                 <a:cs typeface="Calibri"/>
               </a:rPr>
-              <a:t>Uᴸ = √3 · Uꜰ</a:t>
+              <a:t>U</a:t>
+            </a:r>
+            <a:r>
+              <a:rPr sz="2400" b="1" baseline="-25000">
+                <a:solidFill>
+                  <a:srgbClr val="064F91"/>
+                </a:solidFill>
+                <a:latin typeface="Calibri"/>
+                <a:ea typeface="Calibri"/>
+                <a:cs typeface="Calibri"/>
+              </a:rPr>
+              <a:t>L</a:t>
+            </a:r>
+            <a:r>
+              <a:rPr sz="2400" b="1">
+                <a:solidFill>
+                  <a:srgbClr val="064F91"/>
+                </a:solidFill>
+                <a:latin typeface="Calibri"/>
+                <a:ea typeface="Calibri"/>
+                <a:cs typeface="Calibri"/>
+              </a:rPr>
+              <a:t> = √3 · U</a:t>
+            </a:r>
+            <a:r>
+              <a:rPr sz="2400" b="1" baseline="-25000">
+                <a:solidFill>
+                  <a:srgbClr val="064F91"/>
+                </a:solidFill>
+                <a:latin typeface="Calibri"/>
+                <a:ea typeface="Calibri"/>
+                <a:cs typeface="Calibri"/>
+              </a:rPr>
+              <a:t>F</a:t>
             </a:r>
           </a:p>
         </p:txBody>
@@ -7829,7 +8088,7 @@
       </p:sp>
       <p:sp>
         <p:nvSpPr>
-          <p:cNvPr id="12" name="Förutsättningar: Symmetrisk källa. Uꜰ = 120 V är fas–neutralspänn">
+          <p:cNvPr id="12" name="Förutsättningar: Symmetrisk källa. UF = 120 V är fas–neutralspänn">
             <a:extLst xmlns:a="http://schemas.openxmlformats.org/drawingml/2006/main">
               <a:ext uri="{FF2B5EF4-FFF2-40B4-BE49-F238E27FC236}">
                 <a16:creationId xmlns:a16="http://schemas.microsoft.com/office/drawing/2014/main" id="{6F9BB74E-1A98-4256-AE55-0F7E5BEA000A}"/>
@@ -7879,7 +8138,29 @@
                 <a:ea typeface="Calibri"/>
                 <a:cs typeface="Calibri"/>
               </a:rPr>
-              <a:t>Förutsättningar: Symmetrisk källa. Uꜰ = 120 V är fas–neutralspänning.</a:t>
+              <a:t>Förutsättningar: Symmetrisk källa. U</a:t>
+            </a:r>
+            <a:r>
+              <a:rPr sz="2025" b="0" baseline="-25000">
+                <a:solidFill>
+                  <a:srgbClr val="111111"/>
+                </a:solidFill>
+                <a:latin typeface="Calibri"/>
+                <a:ea typeface="Calibri"/>
+                <a:cs typeface="Calibri"/>
+              </a:rPr>
+              <a:t>F</a:t>
+            </a:r>
+            <a:r>
+              <a:rPr sz="2025" b="0">
+                <a:solidFill>
+                  <a:srgbClr val="111111"/>
+                </a:solidFill>
+                <a:latin typeface="Calibri"/>
+                <a:ea typeface="Calibri"/>
+                <a:cs typeface="Calibri"/>
+              </a:rPr>
+              <a:t> = 120 V är fas–neutralspänning.</a:t>
             </a:r>
           </a:p>
         </p:txBody>
@@ -7936,7 +8217,29 @@
                 <a:ea typeface="Calibri"/>
                 <a:cs typeface="Calibri"/>
               </a:rPr>
-              <a:t>Arbetsgång: Multiplicera med √3. Förväxla inte linjespänningen med summan 2Uꜰ.</a:t>
+              <a:t>Arbetsgång: Multiplicera med √3. Förväxla inte linjespänningen med summan 2U</a:t>
+            </a:r>
+            <a:r>
+              <a:rPr sz="2025" b="0" baseline="-25000">
+                <a:solidFill>
+                  <a:srgbClr val="111111"/>
+                </a:solidFill>
+                <a:latin typeface="Calibri"/>
+                <a:ea typeface="Calibri"/>
+                <a:cs typeface="Calibri"/>
+              </a:rPr>
+              <a:t>F</a:t>
+            </a:r>
+            <a:r>
+              <a:rPr sz="2025" b="0">
+                <a:solidFill>
+                  <a:srgbClr val="111111"/>
+                </a:solidFill>
+                <a:latin typeface="Calibri"/>
+                <a:ea typeface="Calibri"/>
+                <a:cs typeface="Calibri"/>
+              </a:rPr>
+              <a:t>.</a:t>
             </a:r>
           </a:p>
         </p:txBody>
@@ -8162,7 +8465,7 @@
       </p:sp>
       <p:sp>
         <p:nvSpPr>
-          <p:cNvPr id="4" name="Uꜰ = 120 V. Beräkna linjespänningen i ett symmetriskt system.">
+          <p:cNvPr id="4" name="UF = 120 V. Beräkna linjespänningen i ett symmetriskt system.">
             <a:extLst xmlns:a="http://schemas.openxmlformats.org/drawingml/2006/main">
               <a:ext uri="{FF2B5EF4-FFF2-40B4-BE49-F238E27FC236}">
                 <a16:creationId xmlns:a16="http://schemas.microsoft.com/office/drawing/2014/main" id="{3B2B7150-BF5B-4FF2-927B-78BD38ED0A65}"/>
@@ -8177,7 +8480,7 @@
         <p:spPr>
           <a:xfrm xmlns:a="http://schemas.openxmlformats.org/drawingml/2006/main">
             <a:off x="762000" y="2533650"/>
-            <a:ext cx="7620000" cy="2286000"/>
+            <a:ext cx="3886200" cy="2606040"/>
           </a:xfrm>
           <a:prstGeom xmlns:a="http://schemas.openxmlformats.org/drawingml/2006/main" prst="rect">
             <a:avLst/>
@@ -8213,7 +8516,29 @@
                 <a:ea typeface="Calibri"/>
                 <a:cs typeface="Calibri"/>
               </a:rPr>
-              <a:t>Uꜰ = 120 V. Beräkna linjespänningen i ett symmetriskt system.</a:t>
+              <a:t>U</a:t>
+            </a:r>
+            <a:r>
+              <a:rPr sz="2400" b="0" baseline="-25000">
+                <a:solidFill>
+                  <a:srgbClr val="111111"/>
+                </a:solidFill>
+                <a:latin typeface="Calibri"/>
+                <a:ea typeface="Calibri"/>
+                <a:cs typeface="Calibri"/>
+              </a:rPr>
+              <a:t>F</a:t>
+            </a:r>
+            <a:r>
+              <a:rPr sz="2400" b="0">
+                <a:solidFill>
+                  <a:srgbClr val="111111"/>
+                </a:solidFill>
+                <a:latin typeface="Calibri"/>
+                <a:ea typeface="Calibri"/>
+                <a:cs typeface="Calibri"/>
+              </a:rPr>
+              <a:t> = 120 V. Beräkna linjespänningen i ett symmetriskt system.</a:t>
             </a:r>
           </a:p>
         </p:txBody>
@@ -8334,6 +8659,30 @@
           </a:p>
         </p:txBody>
       </p:sp>
+      <p:pic xmlns:a="http://schemas.openxmlformats.org/drawingml/2006/main" xmlns:r="http://schemas.openxmlformats.org/officeDocument/2006/relationships">
+        <p:nvPicPr>
+          <p:cNvPr id="9" name="Figur: Ledarna L1, L2, L3 och N; fasspänningen " descr="Ledarna L1, L2, L3 och N; fasspänningen 120 V mellan L1 och N, linjespänningen okänd"/>
+          <p:cNvPicPr>
+            <a:picLocks noChangeAspect="1"/>
+          </p:cNvPicPr>
+          <p:nvPr/>
+        </p:nvPicPr>
+        <p:blipFill>
+          <a:blip r:embed="rId3"/>
+          <a:stretch>
+            <a:fillRect/>
+          </a:stretch>
+        </p:blipFill>
+        <p:spPr>
+          <a:xfrm>
+            <a:off x="4846320" y="2331720"/>
+            <a:ext cx="3931920" cy="2740984"/>
+          </a:xfrm>
+          <a:prstGeom prst="rect">
+            <a:avLst/>
+          </a:prstGeom>
+        </p:spPr>
+      </p:pic>
     </p:spTree>
     <p:extLst>
       <p:ext uri="{BB962C8B-B14F-4D97-AF65-F5344CB8AC3E}">
@@ -8439,7 +8788,7 @@
       </p:sp>
       <p:sp>
         <p:nvSpPr>
-          <p:cNvPr id="10" name="Ugren,Y = Uᴸ/√3">
+          <p:cNvPr id="10" name="Ugren,Y = UL/√3">
             <a:extLst xmlns:a="http://schemas.openxmlformats.org/drawingml/2006/main">
               <a:ext uri="{FF2B5EF4-FFF2-40B4-BE49-F238E27FC236}">
                 <a16:creationId xmlns:a16="http://schemas.microsoft.com/office/drawing/2014/main" id="{843430DE-C25E-4028-AA32-CDD21D4A8F92}"/>
@@ -8489,7 +8838,29 @@
                 <a:ea typeface="Calibri"/>
                 <a:cs typeface="Calibri"/>
               </a:rPr>
-              <a:t>Ugren,Y = Uᴸ/√3</a:t>
+              <a:t>Ugren,Y = U</a:t>
+            </a:r>
+            <a:r>
+              <a:rPr sz="2400" b="1" baseline="-25000">
+                <a:solidFill>
+                  <a:srgbClr val="064F91"/>
+                </a:solidFill>
+                <a:latin typeface="Calibri"/>
+                <a:ea typeface="Calibri"/>
+                <a:cs typeface="Calibri"/>
+              </a:rPr>
+              <a:t>L</a:t>
+            </a:r>
+            <a:r>
+              <a:rPr sz="2400" b="1">
+                <a:solidFill>
+                  <a:srgbClr val="064F91"/>
+                </a:solidFill>
+                <a:latin typeface="Calibri"/>
+                <a:ea typeface="Calibri"/>
+                <a:cs typeface="Calibri"/>
+              </a:rPr>
+              <a:t>/√3</a:t>
             </a:r>
           </a:p>
         </p:txBody>
@@ -8553,7 +8924,7 @@
       </p:sp>
       <p:sp>
         <p:nvSpPr>
-          <p:cNvPr id="12" name="Förutsättningar: Avsedd tränare med Uᴸ = 12,0 V, lika fasimpedans">
+          <p:cNvPr id="12" name="Förutsättningar: Avsedd tränare med UL = 12,0 V, lika fasimpedans">
             <a:extLst xmlns:a="http://schemas.openxmlformats.org/drawingml/2006/main">
               <a:ext uri="{FF2B5EF4-FFF2-40B4-BE49-F238E27FC236}">
                 <a16:creationId xmlns:a16="http://schemas.microsoft.com/office/drawing/2014/main" id="{F9F75C3D-39F3-4BCE-BF90-A54056BDE9C9}"/>
@@ -8603,7 +8974,29 @@
                 <a:ea typeface="Calibri"/>
                 <a:cs typeface="Calibri"/>
               </a:rPr>
-              <a:t>Förutsättningar: Avsedd tränare med Uᴸ = 12,0 V, lika fasimpedanser och symmetrisk källa.</a:t>
+              <a:t>Förutsättningar: Avsedd tränare med U</a:t>
+            </a:r>
+            <a:r>
+              <a:rPr sz="2025" b="0" baseline="-25000">
+                <a:solidFill>
+                  <a:srgbClr val="111111"/>
+                </a:solidFill>
+                <a:latin typeface="Calibri"/>
+                <a:ea typeface="Calibri"/>
+                <a:cs typeface="Calibri"/>
+              </a:rPr>
+              <a:t>L</a:t>
+            </a:r>
+            <a:r>
+              <a:rPr sz="2025" b="0">
+                <a:solidFill>
+                  <a:srgbClr val="111111"/>
+                </a:solidFill>
+                <a:latin typeface="Calibri"/>
+                <a:ea typeface="Calibri"/>
+                <a:cs typeface="Calibri"/>
+              </a:rPr>
+              <a:t> = 12,0 V, lika fasimpedanser och symmetrisk källa.</a:t>
             </a:r>
           </a:p>
         </p:txBody>
@@ -8901,7 +9294,7 @@
         <p:spPr>
           <a:xfrm xmlns:a="http://schemas.openxmlformats.org/drawingml/2006/main">
             <a:off x="762000" y="2533650"/>
-            <a:ext cx="7620000" cy="2286000"/>
+            <a:ext cx="3886200" cy="2606040"/>
           </a:xfrm>
           <a:prstGeom xmlns:a="http://schemas.openxmlformats.org/drawingml/2006/main" prst="rect">
             <a:avLst/>
@@ -8937,7 +9330,7 @@
                 <a:ea typeface="Calibri"/>
                 <a:cs typeface="Calibri"/>
               </a:rPr>
-              <a:t>En avsedd trefastränare ger 12,0 V mellan faserna. Vilken spänning förväntas över varje gren i en symmetrisk Y-last?</a:t>
+              <a:t>En avsedd trefastränare ger 12,0 V mellan faserna. Vilken spänning förväntas över varje gren i en symmetrisk Y-last?</a:t>
             </a:r>
           </a:p>
         </p:txBody>
@@ -9058,6 +9451,30 @@
           </a:p>
         </p:txBody>
       </p:sp>
+      <p:pic xmlns:a="http://schemas.openxmlformats.org/drawingml/2006/main" xmlns:r="http://schemas.openxmlformats.org/officeDocument/2006/relationships">
+        <p:nvPicPr>
+          <p:cNvPr id="9" name="Figur: Symmetrisk Y-last på trefastränare med l" descr="Symmetrisk Y-last på trefastränare med linjespänningen 12,0 V; grenspänningen okänd"/>
+          <p:cNvPicPr>
+            <a:picLocks noChangeAspect="1"/>
+          </p:cNvPicPr>
+          <p:nvPr/>
+        </p:nvPicPr>
+        <p:blipFill>
+          <a:blip r:embed="rId3"/>
+          <a:stretch>
+            <a:fillRect/>
+          </a:stretch>
+        </p:blipFill>
+        <p:spPr>
+          <a:xfrm>
+            <a:off x="4846320" y="2331720"/>
+            <a:ext cx="3931920" cy="2740984"/>
+          </a:xfrm>
+          <a:prstGeom prst="rect">
+            <a:avLst/>
+          </a:prstGeom>
+        </p:spPr>
+      </p:pic>
     </p:spTree>
     <p:extLst>
       <p:ext uri="{BB962C8B-B14F-4D97-AF65-F5344CB8AC3E}">
@@ -9923,7 +10340,7 @@
         <p:spPr>
           <a:xfrm xmlns:a="http://schemas.openxmlformats.org/drawingml/2006/main">
             <a:off x="762000" y="1619250"/>
-            <a:ext cx="7620000" cy="1466850"/>
+            <a:ext cx="3977639" cy="1466850"/>
           </a:xfrm>
           <a:prstGeom xmlns:a="http://schemas.openxmlformats.org/drawingml/2006/main" prst="rect">
             <a:avLst/>
@@ -9951,7 +10368,7 @@
               </a:defRPr>
             </a:pPr>
             <a:r>
-              <a:rPr sz="2400" b="0">
+              <a:rPr sz="2100" b="0">
                 <a:solidFill>
                   <a:srgbClr val="111111"/>
                 </a:solidFill>
@@ -9975,7 +10392,7 @@
               </a:defRPr>
             </a:pPr>
             <a:r>
-              <a:rPr sz="2400" b="0">
+              <a:rPr sz="2100" b="0">
                 <a:solidFill>
                   <a:srgbClr val="111111"/>
                 </a:solidFill>
@@ -10005,7 +10422,7 @@
         <p:spPr>
           <a:xfrm xmlns:a="http://schemas.openxmlformats.org/drawingml/2006/main">
             <a:off x="762000" y="3200400"/>
-            <a:ext cx="7620000" cy="838200"/>
+            <a:ext cx="3977639" cy="838200"/>
           </a:xfrm>
           <a:prstGeom xmlns:a="http://schemas.openxmlformats.org/drawingml/2006/main" prst="rect">
             <a:avLst/>
@@ -10033,7 +10450,7 @@
               </a:defRPr>
             </a:pPr>
             <a:r>
-              <a:rPr sz="2925" b="1">
+              <a:rPr sz="2650" b="1">
                 <a:solidFill>
                   <a:srgbClr val="064F91"/>
                 </a:solidFill>
@@ -10041,7 +10458,7 @@
                 <a:ea typeface="Calibri"/>
                 <a:cs typeface="Calibri"/>
               </a:rPr>
-              <a:t>I⃗N = −(I⃗₁ + I⃗₂ + I⃗₃)</a:t>
+              <a:t>I⃗N = −(I⃗₁ + I⃗₂ + I⃗₃)</a:t>
             </a:r>
           </a:p>
         </p:txBody>
@@ -10063,7 +10480,7 @@
         <p:spPr>
           <a:xfrm xmlns:a="http://schemas.openxmlformats.org/drawingml/2006/main">
             <a:off x="762000" y="4429125"/>
-            <a:ext cx="7620000" cy="1352550"/>
+            <a:ext cx="3977639" cy="1352550"/>
           </a:xfrm>
           <a:prstGeom xmlns:a="http://schemas.openxmlformats.org/drawingml/2006/main" prst="rect">
             <a:avLst/>
@@ -10091,15 +10508,15 @@
               </a:defRPr>
             </a:pPr>
             <a:r>
-              <a:rPr sz="2250" b="0">
-                <a:solidFill>
-                  <a:srgbClr val="111111"/>
-                </a:solidFill>
-                <a:latin typeface="Calibri"/>
-                <a:ea typeface="Calibri"/>
-                <a:cs typeface="Calibri"/>
-              </a:rPr>
-              <a:t>10 A i varje fas ger 0 A i neutralledaren</a:t>
+              <a:rPr sz="2100" b="0">
+                <a:solidFill>
+                  <a:srgbClr val="111111"/>
+                </a:solidFill>
+                <a:latin typeface="Calibri"/>
+                <a:ea typeface="Calibri"/>
+                <a:cs typeface="Calibri"/>
+              </a:rPr>
+              <a:t>10 A i varje fas ger 0 A i neutralledaren</a:t>
             </a:r>
           </a:p>
           <a:p xmlns:a="http://schemas.openxmlformats.org/drawingml/2006/main">
@@ -10115,7 +10532,7 @@
               </a:defRPr>
             </a:pPr>
             <a:r>
-              <a:rPr sz="2250" b="0">
+              <a:rPr sz="2100" b="0">
                 <a:solidFill>
                   <a:srgbClr val="111111"/>
                 </a:solidFill>
@@ -10186,6 +10603,30 @@
           </a:p>
         </p:txBody>
       </p:sp>
+      <p:pic xmlns:a="http://schemas.openxmlformats.org/drawingml/2006/main" xmlns:r="http://schemas.openxmlformats.org/officeDocument/2006/relationships">
+        <p:nvPicPr>
+          <p:cNvPr id="9" name="Figur: Tre lika strömvisare lagda efter varandr" descr="Tre lika strömvisare lagda efter varandra bildar en sluten triangel; neutralströmmen blir noll"/>
+          <p:cNvPicPr>
+            <a:picLocks noChangeAspect="1"/>
+          </p:cNvPicPr>
+          <p:nvPr/>
+        </p:nvPicPr>
+        <p:blipFill>
+          <a:blip r:embed="rId3"/>
+          <a:stretch>
+            <a:fillRect/>
+          </a:stretch>
+        </p:blipFill>
+        <p:spPr>
+          <a:xfrm>
+            <a:off x="4892040" y="1645920"/>
+            <a:ext cx="3886200" cy="3252383"/>
+          </a:xfrm>
+          <a:prstGeom prst="rect">
+            <a:avLst/>
+          </a:prstGeom>
+        </p:spPr>
+      </p:pic>
     </p:spTree>
     <p:extLst>
       <p:ext uri="{BB962C8B-B14F-4D97-AF65-F5344CB8AC3E}">
@@ -10307,7 +10748,7 @@
         <p:spPr>
           <a:xfrm xmlns:a="http://schemas.openxmlformats.org/drawingml/2006/main">
             <a:off x="762000" y="1619250"/>
-            <a:ext cx="7620000" cy="1466850"/>
+            <a:ext cx="3977639" cy="1466850"/>
           </a:xfrm>
           <a:prstGeom xmlns:a="http://schemas.openxmlformats.org/drawingml/2006/main" prst="rect">
             <a:avLst/>
@@ -10335,7 +10776,7 @@
               </a:defRPr>
             </a:pPr>
             <a:r>
-              <a:rPr sz="2400" b="0">
+              <a:rPr sz="2350" b="0">
                 <a:solidFill>
                   <a:srgbClr val="111111"/>
                 </a:solidFill>
@@ -10359,7 +10800,7 @@
               </a:defRPr>
             </a:pPr>
             <a:r>
-              <a:rPr sz="2400" b="0">
+              <a:rPr sz="2350" b="0">
                 <a:solidFill>
                   <a:srgbClr val="111111"/>
                 </a:solidFill>
@@ -10389,7 +10830,7 @@
         <p:spPr>
           <a:xfrm xmlns:a="http://schemas.openxmlformats.org/drawingml/2006/main">
             <a:off x="762000" y="3200400"/>
-            <a:ext cx="7620000" cy="838200"/>
+            <a:ext cx="3977639" cy="838200"/>
           </a:xfrm>
           <a:prstGeom xmlns:a="http://schemas.openxmlformats.org/drawingml/2006/main" prst="rect">
             <a:avLst/>
@@ -10417,7 +10858,7 @@
               </a:defRPr>
             </a:pPr>
             <a:r>
-              <a:rPr sz="2925" b="1">
+              <a:rPr sz="2650" b="1">
                 <a:solidFill>
                   <a:srgbClr val="064F91"/>
                 </a:solidFill>
@@ -10425,7 +10866,7 @@
                 <a:ea typeface="Calibri"/>
                 <a:cs typeface="Calibri"/>
               </a:rPr>
-              <a:t>10 A + 10 A + 10 A är ingen visarsumma</a:t>
+              <a:t>10 A + 10 A + 10 A är ingen visarsumma</a:t>
             </a:r>
           </a:p>
         </p:txBody>
@@ -10447,7 +10888,7 @@
         <p:spPr>
           <a:xfrm xmlns:a="http://schemas.openxmlformats.org/drawingml/2006/main">
             <a:off x="762000" y="4429125"/>
-            <a:ext cx="7620000" cy="1352550"/>
+            <a:ext cx="3977639" cy="1352550"/>
           </a:xfrm>
           <a:prstGeom xmlns:a="http://schemas.openxmlformats.org/drawingml/2006/main" prst="rect">
             <a:avLst/>
@@ -10475,7 +10916,7 @@
               </a:defRPr>
             </a:pPr>
             <a:r>
-              <a:rPr sz="2250" b="0">
+              <a:rPr sz="1800" b="0">
                 <a:solidFill>
                   <a:srgbClr val="111111"/>
                 </a:solidFill>
@@ -10499,7 +10940,7 @@
               </a:defRPr>
             </a:pPr>
             <a:r>
-              <a:rPr sz="2250" b="0">
+              <a:rPr sz="1800" b="0">
                 <a:solidFill>
                   <a:srgbClr val="111111"/>
                 </a:solidFill>
@@ -10570,6 +11011,30 @@
           </a:p>
         </p:txBody>
       </p:sp>
+      <p:pic xmlns:a="http://schemas.openxmlformats.org/drawingml/2006/main" xmlns:r="http://schemas.openxmlformats.org/officeDocument/2006/relationships">
+        <p:nvPicPr>
+          <p:cNvPr id="9" name="Figur: Olika fasströmmar 10, 10 och 4 A sluter " descr="Olika fasströmmar 10, 10 och 4 A sluter inte triangeln; neutralströmmen sluter den"/>
+          <p:cNvPicPr>
+            <a:picLocks noChangeAspect="1"/>
+          </p:cNvPicPr>
+          <p:nvPr/>
+        </p:nvPicPr>
+        <p:blipFill>
+          <a:blip r:embed="rId3"/>
+          <a:stretch>
+            <a:fillRect/>
+          </a:stretch>
+        </p:blipFill>
+        <p:spPr>
+          <a:xfrm>
+            <a:off x="4892040" y="1645920"/>
+            <a:ext cx="3886200" cy="3252383"/>
+          </a:xfrm>
+          <a:prstGeom prst="rect">
+            <a:avLst/>
+          </a:prstGeom>
+        </p:spPr>
+      </p:pic>
     </p:spTree>
     <p:extLst>
       <p:ext uri="{BB962C8B-B14F-4D97-AF65-F5344CB8AC3E}">
@@ -10691,7 +11156,7 @@
         <p:spPr>
           <a:xfrm xmlns:a="http://schemas.openxmlformats.org/drawingml/2006/main">
             <a:off x="762000" y="1619250"/>
-            <a:ext cx="7620000" cy="1466850"/>
+            <a:ext cx="3977639" cy="1466850"/>
           </a:xfrm>
           <a:prstGeom xmlns:a="http://schemas.openxmlformats.org/drawingml/2006/main" prst="rect">
             <a:avLst/>
@@ -10719,7 +11184,7 @@
               </a:defRPr>
             </a:pPr>
             <a:r>
-              <a:rPr sz="2400" b="0">
+              <a:rPr sz="1900" b="0">
                 <a:solidFill>
                   <a:srgbClr val="111111"/>
                 </a:solidFill>
@@ -10743,7 +11208,7 @@
               </a:defRPr>
             </a:pPr>
             <a:r>
-              <a:rPr sz="2400" b="0">
+              <a:rPr sz="1900" b="0">
                 <a:solidFill>
                   <a:srgbClr val="111111"/>
                 </a:solidFill>
@@ -10773,7 +11238,7 @@
         <p:spPr>
           <a:xfrm xmlns:a="http://schemas.openxmlformats.org/drawingml/2006/main">
             <a:off x="762000" y="3200400"/>
-            <a:ext cx="7620000" cy="838200"/>
+            <a:ext cx="3977639" cy="838200"/>
           </a:xfrm>
           <a:prstGeom xmlns:a="http://schemas.openxmlformats.org/drawingml/2006/main" prst="rect">
             <a:avLst/>
@@ -10801,7 +11266,7 @@
               </a:defRPr>
             </a:pPr>
             <a:r>
-              <a:rPr sz="2925" b="1">
+              <a:rPr sz="2650" b="1">
                 <a:solidFill>
                   <a:srgbClr val="064F91"/>
                 </a:solidFill>
@@ -10831,7 +11296,7 @@
         <p:spPr>
           <a:xfrm xmlns:a="http://schemas.openxmlformats.org/drawingml/2006/main">
             <a:off x="762000" y="4429125"/>
-            <a:ext cx="7620000" cy="1352550"/>
+            <a:ext cx="3977639" cy="1352550"/>
           </a:xfrm>
           <a:prstGeom xmlns:a="http://schemas.openxmlformats.org/drawingml/2006/main" prst="rect">
             <a:avLst/>
@@ -10859,7 +11324,7 @@
               </a:defRPr>
             </a:pPr>
             <a:r>
-              <a:rPr sz="2250" b="0">
+              <a:rPr sz="1800" b="0">
                 <a:solidFill>
                   <a:srgbClr val="111111"/>
                 </a:solidFill>
@@ -10883,15 +11348,15 @@
               </a:defRPr>
             </a:pPr>
             <a:r>
-              <a:rPr sz="2250" b="0">
-                <a:solidFill>
-                  <a:srgbClr val="111111"/>
-                </a:solidFill>
-                <a:latin typeface="Calibri"/>
-                <a:ea typeface="Calibri"/>
-                <a:cs typeface="Calibri"/>
-              </a:rPr>
-              <a:t>400 V mellan faser visar inte att varje fas–jordvärde är 230 V.</a:t>
+              <a:rPr sz="1800" b="0">
+                <a:solidFill>
+                  <a:srgbClr val="111111"/>
+                </a:solidFill>
+                <a:latin typeface="Calibri"/>
+                <a:ea typeface="Calibri"/>
+                <a:cs typeface="Calibri"/>
+              </a:rPr>
+              <a:t>400 V mellan faser visar inte att varje fas–jordvärde är 230 V.</a:t>
             </a:r>
           </a:p>
         </p:txBody>
@@ -10954,6 +11419,30 @@
           </a:p>
         </p:txBody>
       </p:sp>
+      <p:pic xmlns:a="http://schemas.openxmlformats.org/drawingml/2006/main" xmlns:r="http://schemas.openxmlformats.org/officeDocument/2006/relationships">
+        <p:nvPicPr>
+          <p:cNvPr id="9" name="Figur: Mätpunkter för linjespänningarna U12, U2" descr="Mätpunkter för linjespänningarna U12, U23, U31 och fasspänningen U1N"/>
+          <p:cNvPicPr>
+            <a:picLocks noChangeAspect="1"/>
+          </p:cNvPicPr>
+          <p:nvPr/>
+        </p:nvPicPr>
+        <p:blipFill>
+          <a:blip r:embed="rId3"/>
+          <a:stretch>
+            <a:fillRect/>
+          </a:stretch>
+        </p:blipFill>
+        <p:spPr>
+          <a:xfrm>
+            <a:off x="4892040" y="1645920"/>
+            <a:ext cx="3886200" cy="3071293"/>
+          </a:xfrm>
+          <a:prstGeom prst="rect">
+            <a:avLst/>
+          </a:prstGeom>
+        </p:spPr>
+      </p:pic>
     </p:spTree>
     <p:extLst>
       <p:ext uri="{BB962C8B-B14F-4D97-AF65-F5344CB8AC3E}">
@@ -11955,7 +12444,7 @@
         <p:spPr>
           <a:xfrm xmlns:a="http://schemas.openxmlformats.org/drawingml/2006/main">
             <a:off x="762000" y="2533650"/>
-            <a:ext cx="7620000" cy="2286000"/>
+            <a:ext cx="3886200" cy="2606040"/>
           </a:xfrm>
           <a:prstGeom xmlns:a="http://schemas.openxmlformats.org/drawingml/2006/main" prst="rect">
             <a:avLst/>
@@ -11991,7 +12480,7 @@
                 <a:ea typeface="Calibri"/>
                 <a:cs typeface="Calibri"/>
               </a:rPr>
-              <a:t>Tre rena sinusströmmar på 8,0 A har 120° mellan faserna. Bestäm neutralströmmens RMS-värde.</a:t>
+              <a:t>Tre rena sinusströmmar på 8,0 A har 120° mellan faserna. Bestäm neutralströmmens RMS-värde.</a:t>
             </a:r>
           </a:p>
         </p:txBody>
@@ -12112,6 +12601,30 @@
           </a:p>
         </p:txBody>
       </p:sp>
+      <p:pic xmlns:a="http://schemas.openxmlformats.org/drawingml/2006/main" xmlns:r="http://schemas.openxmlformats.org/officeDocument/2006/relationships">
+        <p:nvPicPr>
+          <p:cNvPr id="9" name="Figur: Tre strömvisare på 8,0 A med 120 grader " descr="Tre strömvisare på 8,0 A med 120 grader mellan; neutralströmmen okänd"/>
+          <p:cNvPicPr>
+            <a:picLocks noChangeAspect="1"/>
+          </p:cNvPicPr>
+          <p:nvPr/>
+        </p:nvPicPr>
+        <p:blipFill>
+          <a:blip r:embed="rId3"/>
+          <a:stretch>
+            <a:fillRect/>
+          </a:stretch>
+        </p:blipFill>
+        <p:spPr>
+          <a:xfrm>
+            <a:off x="4846320" y="2331720"/>
+            <a:ext cx="3931920" cy="2740984"/>
+          </a:xfrm>
+          <a:prstGeom prst="rect">
+            <a:avLst/>
+          </a:prstGeom>
+        </p:spPr>
+      </p:pic>
     </p:spTree>
     <p:extLst>
       <p:ext uri="{BB962C8B-B14F-4D97-AF65-F5344CB8AC3E}">
@@ -12679,7 +13192,7 @@
         <p:spPr>
           <a:xfrm xmlns:a="http://schemas.openxmlformats.org/drawingml/2006/main">
             <a:off x="762000" y="2533650"/>
-            <a:ext cx="7620000" cy="2286000"/>
+            <a:ext cx="3886200" cy="2606040"/>
           </a:xfrm>
           <a:prstGeom xmlns:a="http://schemas.openxmlformats.org/drawingml/2006/main" prst="rect">
             <a:avLst/>
@@ -12715,7 +13228,7 @@
                 <a:ea typeface="Calibri"/>
                 <a:cs typeface="Calibri"/>
               </a:rPr>
-              <a:t>En enda fas–neutral-last tar 5,0 A. De två andra fasströmmarna är noll. Bestäm neutralströmmen.</a:t>
+              <a:t>En enda fas–neutral-last tar 5,0 A. De två andra fasströmmarna är noll. Bestäm neutralströmmen.</a:t>
             </a:r>
           </a:p>
         </p:txBody>
@@ -12836,6 +13349,30 @@
           </a:p>
         </p:txBody>
       </p:sp>
+      <p:pic xmlns:a="http://schemas.openxmlformats.org/drawingml/2006/main" xmlns:r="http://schemas.openxmlformats.org/officeDocument/2006/relationships">
+        <p:nvPicPr>
+          <p:cNvPr id="9" name="Figur: En last mellan L1 och N som tar 5,0 A; n" descr="En last mellan L1 och N som tar 5,0 A; neutralströmmen okänd"/>
+          <p:cNvPicPr>
+            <a:picLocks noChangeAspect="1"/>
+          </p:cNvPicPr>
+          <p:nvPr/>
+        </p:nvPicPr>
+        <p:blipFill>
+          <a:blip r:embed="rId3"/>
+          <a:stretch>
+            <a:fillRect/>
+          </a:stretch>
+        </p:blipFill>
+        <p:spPr>
+          <a:xfrm>
+            <a:off x="4846320" y="2331720"/>
+            <a:ext cx="3931920" cy="2740984"/>
+          </a:xfrm>
+          <a:prstGeom prst="rect">
+            <a:avLst/>
+          </a:prstGeom>
+        </p:spPr>
+      </p:pic>
     </p:spTree>
     <p:extLst>
       <p:ext uri="{BB962C8B-B14F-4D97-AF65-F5344CB8AC3E}">
@@ -13917,7 +14454,7 @@
         <p:spPr>
           <a:xfrm xmlns:a="http://schemas.openxmlformats.org/drawingml/2006/main">
             <a:off x="762000" y="2533650"/>
-            <a:ext cx="7620000" cy="2286000"/>
+            <a:ext cx="3886200" cy="2606040"/>
           </a:xfrm>
           <a:prstGeom xmlns:a="http://schemas.openxmlformats.org/drawingml/2006/main" prst="rect">
             <a:avLst/>
@@ -13953,7 +14490,7 @@
                 <a:ea typeface="Calibri"/>
                 <a:cs typeface="Calibri"/>
               </a:rPr>
-              <a:t>Två fasströmmar är 10 A med 120° emellan. Den tredje är noll. Bestäm neutralströmmens belopp.</a:t>
+              <a:t>Två fasströmmar är 10 A med 120° emellan. Den tredje är noll. Bestäm neutralströmmens belopp.</a:t>
             </a:r>
           </a:p>
         </p:txBody>
@@ -14074,6 +14611,30 @@
           </a:p>
         </p:txBody>
       </p:sp>
+      <p:pic xmlns:a="http://schemas.openxmlformats.org/drawingml/2006/main" xmlns:r="http://schemas.openxmlformats.org/officeDocument/2006/relationships">
+        <p:nvPicPr>
+          <p:cNvPr id="9" name="Figur: Två strömvisare på 10 A med 120 grader m" descr="Två strömvisare på 10 A med 120 grader mellan, tredje strömmen noll; neutralströmmen okänd"/>
+          <p:cNvPicPr>
+            <a:picLocks noChangeAspect="1"/>
+          </p:cNvPicPr>
+          <p:nvPr/>
+        </p:nvPicPr>
+        <p:blipFill>
+          <a:blip r:embed="rId3"/>
+          <a:stretch>
+            <a:fillRect/>
+          </a:stretch>
+        </p:blipFill>
+        <p:spPr>
+          <a:xfrm>
+            <a:off x="4846320" y="2331720"/>
+            <a:ext cx="3931920" cy="2740984"/>
+          </a:xfrm>
+          <a:prstGeom prst="rect">
+            <a:avLst/>
+          </a:prstGeom>
+        </p:spPr>
+      </p:pic>
     </p:spTree>
     <p:extLst>
       <p:ext uri="{BB962C8B-B14F-4D97-AF65-F5344CB8AC3E}">
@@ -14664,7 +15225,7 @@
         <p:spPr>
           <a:xfrm xmlns:a="http://schemas.openxmlformats.org/drawingml/2006/main">
             <a:off x="762000" y="2533650"/>
-            <a:ext cx="7620000" cy="2286000"/>
+            <a:ext cx="3886200" cy="2606040"/>
           </a:xfrm>
           <a:prstGeom xmlns:a="http://schemas.openxmlformats.org/drawingml/2006/main" prst="rect">
             <a:avLst/>
@@ -14700,7 +15261,7 @@
                 <a:ea typeface="Calibri"/>
                 <a:cs typeface="Calibri"/>
               </a:rPr>
-              <a:t>U₁₂ = 400 V, U₂₃ = 402 V och U₃₁ = 398 V. Beräkna medelvärdet och största avvikelsen i procent av medlet.</a:t>
+              <a:t>U₁₂ = 400 V, U₂₃ = 402 V och U₃₁ = 398 V. Beräkna medelvärdet och största avvikelsen i procent av medlet.</a:t>
             </a:r>
           </a:p>
         </p:txBody>
@@ -14821,6 +15382,30 @@
           </a:p>
         </p:txBody>
       </p:sp>
+      <p:pic xmlns:a="http://schemas.openxmlformats.org/drawingml/2006/main" xmlns:r="http://schemas.openxmlformats.org/officeDocument/2006/relationships">
+        <p:nvPicPr>
+          <p:cNvPr id="9" name="Figur: Stapeldiagram med linjespänningarna 400," descr="Stapeldiagram med linjespänningarna 400, 402 och 398 V; medelvärde och avvikelse okända"/>
+          <p:cNvPicPr>
+            <a:picLocks noChangeAspect="1"/>
+          </p:cNvPicPr>
+          <p:nvPr/>
+        </p:nvPicPr>
+        <p:blipFill>
+          <a:blip r:embed="rId3"/>
+          <a:stretch>
+            <a:fillRect/>
+          </a:stretch>
+        </p:blipFill>
+        <p:spPr>
+          <a:xfrm>
+            <a:off x="4846320" y="2331720"/>
+            <a:ext cx="3931920" cy="2740984"/>
+          </a:xfrm>
+          <a:prstGeom prst="rect">
+            <a:avLst/>
+          </a:prstGeom>
+        </p:spPr>
+      </p:pic>
     </p:spTree>
     <p:extLst>
       <p:ext uri="{BB962C8B-B14F-4D97-AF65-F5344CB8AC3E}">
@@ -15388,7 +15973,7 @@
         <p:spPr>
           <a:xfrm xmlns:a="http://schemas.openxmlformats.org/drawingml/2006/main">
             <a:off x="762000" y="2533650"/>
-            <a:ext cx="7620000" cy="2286000"/>
+            <a:ext cx="3886200" cy="2606040"/>
           </a:xfrm>
           <a:prstGeom xmlns:a="http://schemas.openxmlformats.org/drawingml/2006/main" prst="rect">
             <a:avLst/>
@@ -15545,6 +16130,30 @@
           </a:p>
         </p:txBody>
       </p:sp>
+      <p:pic xmlns:a="http://schemas.openxmlformats.org/drawingml/2006/main" xmlns:r="http://schemas.openxmlformats.org/officeDocument/2006/relationships">
+        <p:nvPicPr>
+          <p:cNvPr id="9" name="Figur: Två olika laster Ra och Rb från L1 och L" descr="Två olika laster Ra och Rb från L1 och L2 till en gemensam punkt där neutralledaren är bruten"/>
+          <p:cNvPicPr>
+            <a:picLocks noChangeAspect="1"/>
+          </p:cNvPicPr>
+          <p:nvPr/>
+        </p:nvPicPr>
+        <p:blipFill>
+          <a:blip r:embed="rId3"/>
+          <a:stretch>
+            <a:fillRect/>
+          </a:stretch>
+        </p:blipFill>
+        <p:spPr>
+          <a:xfrm>
+            <a:off x="4846320" y="2331720"/>
+            <a:ext cx="3931920" cy="2740984"/>
+          </a:xfrm>
+          <a:prstGeom prst="rect">
+            <a:avLst/>
+          </a:prstGeom>
+        </p:spPr>
+      </p:pic>
     </p:spTree>
     <p:extLst>
       <p:ext uri="{BB962C8B-B14F-4D97-AF65-F5344CB8AC3E}">
@@ -15651,7 +16260,7 @@
       </p:sp>
       <p:sp>
         <p:nvSpPr>
-          <p:cNvPr id="3" name="Vilka två anslutningar använder du för att definiera Uᴸ respektiv">
+          <p:cNvPr id="3" name="Vilka två anslutningar använder du för att definiera UL respektiv">
             <a:extLst xmlns:a="http://schemas.openxmlformats.org/drawingml/2006/main">
               <a:ext uri="{FF2B5EF4-FFF2-40B4-BE49-F238E27FC236}">
                 <a16:creationId xmlns:a16="http://schemas.microsoft.com/office/drawing/2014/main" id="{62F86BB0-E23B-45F6-A5E8-986B537DD950}"/>
@@ -15702,7 +16311,51 @@
                 <a:ea typeface="Calibri"/>
                 <a:cs typeface="Calibri"/>
               </a:rPr>
-              <a:t>Vilka två anslutningar använder du för att definiera Uᴸ respektive Uꜰ?</a:t>
+              <a:t>Vilka två anslutningar använder du för att definiera U</a:t>
+            </a:r>
+            <a:r>
+              <a:rPr sz="2550" b="1" baseline="-25000">
+                <a:solidFill>
+                  <a:srgbClr val="064F91"/>
+                </a:solidFill>
+                <a:latin typeface="Calibri"/>
+                <a:ea typeface="Calibri"/>
+                <a:cs typeface="Calibri"/>
+              </a:rPr>
+              <a:t>L</a:t>
+            </a:r>
+            <a:r>
+              <a:rPr sz="2550" b="1">
+                <a:solidFill>
+                  <a:srgbClr val="064F91"/>
+                </a:solidFill>
+                <a:latin typeface="Calibri"/>
+                <a:ea typeface="Calibri"/>
+                <a:cs typeface="Calibri"/>
+              </a:rPr>
+              <a:t> respektive U</a:t>
+            </a:r>
+            <a:r>
+              <a:rPr sz="2550" b="1" baseline="-25000">
+                <a:solidFill>
+                  <a:srgbClr val="064F91"/>
+                </a:solidFill>
+                <a:latin typeface="Calibri"/>
+                <a:ea typeface="Calibri"/>
+                <a:cs typeface="Calibri"/>
+              </a:rPr>
+              <a:t>F</a:t>
+            </a:r>
+            <a:r>
+              <a:rPr sz="2550" b="1">
+                <a:solidFill>
+                  <a:srgbClr val="064F91"/>
+                </a:solidFill>
+                <a:latin typeface="Calibri"/>
+                <a:ea typeface="Calibri"/>
+                <a:cs typeface="Calibri"/>
+              </a:rPr>
+              <a:t>?</a:t>
             </a:r>
           </a:p>
         </p:txBody>
@@ -16129,64 +16782,6 @@
       </p:sp>
       <p:sp>
         <p:nvSpPr>
-          <p:cNvPr id="6" name="Källor och lärarstöd finns även i bildanteckningarna.">
-            <a:extLst xmlns:a="http://schemas.openxmlformats.org/drawingml/2006/main">
-              <a:ext uri="{FF2B5EF4-FFF2-40B4-BE49-F238E27FC236}">
-                <a16:creationId xmlns:a16="http://schemas.microsoft.com/office/drawing/2014/main" id="{AE78F7BC-E9EE-450B-AAC0-401DBB4118AD}"/>
-              </a:ext>
-            </a:extLst>
-          </p:cNvPr>
-          <p:cNvSpPr>
-            <a:spLocks xmlns:a="http://schemas.openxmlformats.org/drawingml/2006/main" noGrp="1"/>
-          </p:cNvSpPr>
-          <p:nvPr/>
-        </p:nvSpPr>
-        <p:spPr>
-          <a:xfrm xmlns:a="http://schemas.openxmlformats.org/drawingml/2006/main">
-            <a:off x="762000" y="5676900"/>
-            <a:ext cx="7620000" cy="352425"/>
-          </a:xfrm>
-          <a:prstGeom xmlns:a="http://schemas.openxmlformats.org/drawingml/2006/main" prst="rect">
-            <a:avLst/>
-          </a:prstGeom>
-          <a:noFill xmlns:a="http://schemas.openxmlformats.org/drawingml/2006/main"/>
-          <a:ln xmlns:a="http://schemas.openxmlformats.org/drawingml/2006/main" w="0">
-            <a:noFill/>
-          </a:ln>
-        </p:spPr>
-        <p:txBody>
-          <a:bodyPr xmlns:a="http://schemas.openxmlformats.org/drawingml/2006/main" wrap="square" lIns="0" tIns="0" rIns="0" bIns="0" anchor="t">
-            <a:noAutofit/>
-          </a:bodyPr>
-          <a:lstStyle xmlns:a="http://schemas.openxmlformats.org/drawingml/2006/main"/>
-          <a:p xmlns:a="http://schemas.openxmlformats.org/drawingml/2006/main">
-            <a:pPr algn="l">
-              <a:buNone/>
-              <a:defRPr sz="1800" b="0">
-                <a:solidFill>
-                  <a:srgbClr val="111111"/>
-                </a:solidFill>
-                <a:latin typeface="Calibri"/>
-                <a:ea typeface="Calibri"/>
-                <a:cs typeface="Calibri"/>
-              </a:defRPr>
-            </a:pPr>
-            <a:r>
-              <a:rPr sz="1800" b="0">
-                <a:solidFill>
-                  <a:srgbClr val="111111"/>
-                </a:solidFill>
-                <a:latin typeface="Calibri"/>
-                <a:ea typeface="Calibri"/>
-                <a:cs typeface="Calibri"/>
-              </a:rPr>
-              <a:t>Källor och lärarstöd finns även i bildanteckningarna.</a:t>
-            </a:r>
-          </a:p>
-        </p:txBody>
-      </p:sp>
-      <p:sp>
-        <p:nvSpPr>
           <p:cNvPr id="7" name="22">
             <a:extLst xmlns:a="http://schemas.openxmlformats.org/drawingml/2006/main">
               <a:ext uri="{FF2B5EF4-FFF2-40B4-BE49-F238E27FC236}">
@@ -16348,7 +16943,7 @@
       </p:sp>
       <p:sp>
         <p:nvSpPr>
-          <p:cNvPr id="10" name="Uᴸ mäts mellan två faser och kallas även huvudspänning.">
+          <p:cNvPr id="10" name="UL mäts mellan två faser och kallas även huvudspänning.">
             <a:extLst xmlns:a="http://schemas.openxmlformats.org/drawingml/2006/main">
               <a:ext uri="{FF2B5EF4-FFF2-40B4-BE49-F238E27FC236}">
                 <a16:creationId xmlns:a16="http://schemas.microsoft.com/office/drawing/2014/main" id="{A5005403-33F4-4DA3-8A26-4EDEB8CBF7D0}"/>
@@ -16398,14 +16993,36 @@
                 <a:ea typeface="Calibri"/>
                 <a:cs typeface="Calibri"/>
               </a:rPr>
-              <a:t>Uᴸ mäts mellan två faser och kallas även huvudspänning.</a:t>
-            </a:r>
-          </a:p>
-        </p:txBody>
-      </p:sp>
-      <p:sp>
-        <p:nvSpPr>
-          <p:cNvPr id="11" name="Uꜰ mäts mellan en fas och källans neutralpunkt.">
+              <a:t>U</a:t>
+            </a:r>
+            <a:r>
+              <a:rPr sz="2250" b="0" baseline="-25000">
+                <a:solidFill>
+                  <a:srgbClr val="111111"/>
+                </a:solidFill>
+                <a:latin typeface="Calibri"/>
+                <a:ea typeface="Calibri"/>
+                <a:cs typeface="Calibri"/>
+              </a:rPr>
+              <a:t>L</a:t>
+            </a:r>
+            <a:r>
+              <a:rPr sz="2250" b="0">
+                <a:solidFill>
+                  <a:srgbClr val="111111"/>
+                </a:solidFill>
+                <a:latin typeface="Calibri"/>
+                <a:ea typeface="Calibri"/>
+                <a:cs typeface="Calibri"/>
+              </a:rPr>
+              <a:t> mäts mellan två faser och kallas även huvudspänning.</a:t>
+            </a:r>
+          </a:p>
+        </p:txBody>
+      </p:sp>
+      <p:sp>
+        <p:nvSpPr>
+          <p:cNvPr id="11" name="UF mäts mellan en fas och källans neutralpunkt.">
             <a:extLst xmlns:a="http://schemas.openxmlformats.org/drawingml/2006/main">
               <a:ext uri="{FF2B5EF4-FFF2-40B4-BE49-F238E27FC236}">
                 <a16:creationId xmlns:a16="http://schemas.microsoft.com/office/drawing/2014/main" id="{221797B2-5F83-4BE9-98C2-B19CE9AD2451}"/>
@@ -16455,7 +17072,29 @@
                 <a:ea typeface="Calibri"/>
                 <a:cs typeface="Calibri"/>
               </a:rPr>
-              <a:t>Uꜰ mäts mellan en fas och källans neutralpunkt.</a:t>
+              <a:t>U</a:t>
+            </a:r>
+            <a:r>
+              <a:rPr sz="2250" b="0" baseline="-25000">
+                <a:solidFill>
+                  <a:srgbClr val="111111"/>
+                </a:solidFill>
+                <a:latin typeface="Calibri"/>
+                <a:ea typeface="Calibri"/>
+                <a:cs typeface="Calibri"/>
+              </a:rPr>
+              <a:t>F</a:t>
+            </a:r>
+            <a:r>
+              <a:rPr sz="2250" b="0">
+                <a:solidFill>
+                  <a:srgbClr val="111111"/>
+                </a:solidFill>
+                <a:latin typeface="Calibri"/>
+                <a:ea typeface="Calibri"/>
+                <a:cs typeface="Calibri"/>
+              </a:rPr>
+              <a:t> mäts mellan en fas och källans neutralpunkt.</a:t>
             </a:r>
           </a:p>
         </p:txBody>
@@ -17662,7 +18301,7 @@
       </p:sp>
       <p:sp>
         <p:nvSpPr>
-          <p:cNvPr id="3" name="Fasspänning Uꜰ: mellan fas och källans neutralpunkt.&#10;Linjespännin">
+          <p:cNvPr id="3" name="Fasspänning UF: mellan fas och källans neutralpunkt.&#10;Linjespännin">
             <a:extLst xmlns:a="http://schemas.openxmlformats.org/drawingml/2006/main">
               <a:ext uri="{FF2B5EF4-FFF2-40B4-BE49-F238E27FC236}">
                 <a16:creationId xmlns:a16="http://schemas.microsoft.com/office/drawing/2014/main" id="{371A25E3-E2BE-4FFB-A83B-21D3BD190A89}"/>
@@ -17677,7 +18316,7 @@
         <p:spPr>
           <a:xfrm xmlns:a="http://schemas.openxmlformats.org/drawingml/2006/main">
             <a:off x="762000" y="1619250"/>
-            <a:ext cx="7620000" cy="1466850"/>
+            <a:ext cx="3977639" cy="1466850"/>
           </a:xfrm>
           <a:prstGeom xmlns:a="http://schemas.openxmlformats.org/drawingml/2006/main" prst="rect">
             <a:avLst/>
@@ -17705,15 +18344,37 @@
               </a:defRPr>
             </a:pPr>
             <a:r>
-              <a:rPr sz="2400" b="0">
-                <a:solidFill>
-                  <a:srgbClr val="111111"/>
-                </a:solidFill>
-                <a:latin typeface="Calibri"/>
-                <a:ea typeface="Calibri"/>
-                <a:cs typeface="Calibri"/>
-              </a:rPr>
-              <a:t>Fasspänning Uꜰ: mellan fas och källans neutralpunkt.</a:t>
+              <a:rPr sz="1800" b="0">
+                <a:solidFill>
+                  <a:srgbClr val="111111"/>
+                </a:solidFill>
+                <a:latin typeface="Calibri"/>
+                <a:ea typeface="Calibri"/>
+                <a:cs typeface="Calibri"/>
+              </a:rPr>
+              <a:t>Fasspänning U</a:t>
+            </a:r>
+            <a:r>
+              <a:rPr sz="1800" b="0" baseline="-25000">
+                <a:solidFill>
+                  <a:srgbClr val="111111"/>
+                </a:solidFill>
+                <a:latin typeface="Calibri"/>
+                <a:ea typeface="Calibri"/>
+                <a:cs typeface="Calibri"/>
+              </a:rPr>
+              <a:t>F</a:t>
+            </a:r>
+            <a:r>
+              <a:rPr sz="1800" b="0">
+                <a:solidFill>
+                  <a:srgbClr val="111111"/>
+                </a:solidFill>
+                <a:latin typeface="Calibri"/>
+                <a:ea typeface="Calibri"/>
+                <a:cs typeface="Calibri"/>
+              </a:rPr>
+              <a:t>: mellan fas och källans neutralpunkt.</a:t>
             </a:r>
           </a:p>
           <a:p xmlns:a="http://schemas.openxmlformats.org/drawingml/2006/main">
@@ -17729,22 +18390,44 @@
               </a:defRPr>
             </a:pPr>
             <a:r>
-              <a:rPr sz="2400" b="0">
-                <a:solidFill>
-                  <a:srgbClr val="111111"/>
-                </a:solidFill>
-                <a:latin typeface="Calibri"/>
-                <a:ea typeface="Calibri"/>
-                <a:cs typeface="Calibri"/>
-              </a:rPr>
-              <a:t>Linjespänning Uᴸ: mellan två faser, även kallad huvudspänning.</a:t>
-            </a:r>
-          </a:p>
-        </p:txBody>
-      </p:sp>
-      <p:sp>
-        <p:nvSpPr>
-          <p:cNvPr id="4" name="Uᴸ = √3 · Uꜰ">
+              <a:rPr sz="1800" b="0">
+                <a:solidFill>
+                  <a:srgbClr val="111111"/>
+                </a:solidFill>
+                <a:latin typeface="Calibri"/>
+                <a:ea typeface="Calibri"/>
+                <a:cs typeface="Calibri"/>
+              </a:rPr>
+              <a:t>Linjespänning U</a:t>
+            </a:r>
+            <a:r>
+              <a:rPr sz="1800" b="0" baseline="-25000">
+                <a:solidFill>
+                  <a:srgbClr val="111111"/>
+                </a:solidFill>
+                <a:latin typeface="Calibri"/>
+                <a:ea typeface="Calibri"/>
+                <a:cs typeface="Calibri"/>
+              </a:rPr>
+              <a:t>L</a:t>
+            </a:r>
+            <a:r>
+              <a:rPr sz="1800" b="0">
+                <a:solidFill>
+                  <a:srgbClr val="111111"/>
+                </a:solidFill>
+                <a:latin typeface="Calibri"/>
+                <a:ea typeface="Calibri"/>
+                <a:cs typeface="Calibri"/>
+              </a:rPr>
+              <a:t>: mellan två faser, även kallad huvudspänning.</a:t>
+            </a:r>
+          </a:p>
+        </p:txBody>
+      </p:sp>
+      <p:sp>
+        <p:nvSpPr>
+          <p:cNvPr id="4" name="UL = √3 · UF">
             <a:extLst xmlns:a="http://schemas.openxmlformats.org/drawingml/2006/main">
               <a:ext uri="{FF2B5EF4-FFF2-40B4-BE49-F238E27FC236}">
                 <a16:creationId xmlns:a16="http://schemas.microsoft.com/office/drawing/2014/main" id="{B86F4B34-4E16-490A-ABFD-A29D3E807BF5}"/>
@@ -17759,7 +18442,7 @@
         <p:spPr>
           <a:xfrm xmlns:a="http://schemas.openxmlformats.org/drawingml/2006/main">
             <a:off x="762000" y="3200400"/>
-            <a:ext cx="7620000" cy="838200"/>
+            <a:ext cx="3977639" cy="838200"/>
           </a:xfrm>
           <a:prstGeom xmlns:a="http://schemas.openxmlformats.org/drawingml/2006/main" prst="rect">
             <a:avLst/>
@@ -17795,14 +18478,47 @@
                 <a:ea typeface="Calibri"/>
                 <a:cs typeface="Calibri"/>
               </a:rPr>
-              <a:t>Uᴸ = √3 · Uꜰ</a:t>
-            </a:r>
-          </a:p>
-        </p:txBody>
-      </p:sp>
-      <p:sp>
-        <p:nvSpPr>
-          <p:cNvPr id="5" name="I ett symmetriskt 400 V-system är Uꜰ ≈ 231 V.&#10;Använd inte 400 V s">
+              <a:t>U</a:t>
+            </a:r>
+            <a:r>
+              <a:rPr sz="2925" b="1" baseline="-25000">
+                <a:solidFill>
+                  <a:srgbClr val="064F91"/>
+                </a:solidFill>
+                <a:latin typeface="Calibri"/>
+                <a:ea typeface="Calibri"/>
+                <a:cs typeface="Calibri"/>
+              </a:rPr>
+              <a:t>L</a:t>
+            </a:r>
+            <a:r>
+              <a:rPr sz="2925" b="1">
+                <a:solidFill>
+                  <a:srgbClr val="064F91"/>
+                </a:solidFill>
+                <a:latin typeface="Calibri"/>
+                <a:ea typeface="Calibri"/>
+                <a:cs typeface="Calibri"/>
+              </a:rPr>
+              <a:t> = √3 · U</a:t>
+            </a:r>
+            <a:r>
+              <a:rPr sz="2925" b="1" baseline="-25000">
+                <a:solidFill>
+                  <a:srgbClr val="064F91"/>
+                </a:solidFill>
+                <a:latin typeface="Calibri"/>
+                <a:ea typeface="Calibri"/>
+                <a:cs typeface="Calibri"/>
+              </a:rPr>
+              <a:t>F</a:t>
+            </a:r>
+          </a:p>
+        </p:txBody>
+      </p:sp>
+      <p:sp>
+        <p:nvSpPr>
+          <p:cNvPr id="5" name="I ett symmetriskt 400 V-system är UF ≈ 231 V.&#10;Använd inte 400 V s">
             <a:extLst xmlns:a="http://schemas.openxmlformats.org/drawingml/2006/main">
               <a:ext uri="{FF2B5EF4-FFF2-40B4-BE49-F238E27FC236}">
                 <a16:creationId xmlns:a16="http://schemas.microsoft.com/office/drawing/2014/main" id="{B39D32FC-6D48-4E43-A113-3FB2AC56690E}"/>
@@ -17817,7 +18533,7 @@
         <p:spPr>
           <a:xfrm xmlns:a="http://schemas.openxmlformats.org/drawingml/2006/main">
             <a:off x="762000" y="4429125"/>
-            <a:ext cx="7620000" cy="1352550"/>
+            <a:ext cx="3977639" cy="1352550"/>
           </a:xfrm>
           <a:prstGeom xmlns:a="http://schemas.openxmlformats.org/drawingml/2006/main" prst="rect">
             <a:avLst/>
@@ -17845,15 +18561,37 @@
               </a:defRPr>
             </a:pPr>
             <a:r>
-              <a:rPr sz="2250" b="0">
-                <a:solidFill>
-                  <a:srgbClr val="111111"/>
-                </a:solidFill>
-                <a:latin typeface="Calibri"/>
-                <a:ea typeface="Calibri"/>
-                <a:cs typeface="Calibri"/>
-              </a:rPr>
-              <a:t>I ett symmetriskt 400 V-system är Uꜰ ≈ 231 V.</a:t>
+              <a:rPr sz="2100" b="0">
+                <a:solidFill>
+                  <a:srgbClr val="111111"/>
+                </a:solidFill>
+                <a:latin typeface="Calibri"/>
+                <a:ea typeface="Calibri"/>
+                <a:cs typeface="Calibri"/>
+              </a:rPr>
+              <a:t>Ombord är 440 V vanligt: då är U</a:t>
+            </a:r>
+            <a:r>
+              <a:rPr sz="2100" b="0" baseline="-25000">
+                <a:solidFill>
+                  <a:srgbClr val="111111"/>
+                </a:solidFill>
+                <a:latin typeface="Calibri"/>
+                <a:ea typeface="Calibri"/>
+                <a:cs typeface="Calibri"/>
+              </a:rPr>
+              <a:t>F</a:t>
+            </a:r>
+            <a:r>
+              <a:rPr sz="2100" b="0">
+                <a:solidFill>
+                  <a:srgbClr val="111111"/>
+                </a:solidFill>
+                <a:latin typeface="Calibri"/>
+                <a:ea typeface="Calibri"/>
+                <a:cs typeface="Calibri"/>
+              </a:rPr>
+              <a:t> ≈ 254 V.</a:t>
             </a:r>
           </a:p>
           <a:p xmlns:a="http://schemas.openxmlformats.org/drawingml/2006/main">
@@ -17869,15 +18607,15 @@
               </a:defRPr>
             </a:pPr>
             <a:r>
-              <a:rPr sz="2250" b="0">
-                <a:solidFill>
-                  <a:srgbClr val="111111"/>
-                </a:solidFill>
-                <a:latin typeface="Calibri"/>
-                <a:ea typeface="Calibri"/>
-                <a:cs typeface="Calibri"/>
-              </a:rPr>
-              <a:t>Använd inte 400 V som fas–neutralspänning.</a:t>
+              <a:rPr sz="2100" b="0">
+                <a:solidFill>
+                  <a:srgbClr val="111111"/>
+                </a:solidFill>
+                <a:latin typeface="Calibri"/>
+                <a:ea typeface="Calibri"/>
+                <a:cs typeface="Calibri"/>
+              </a:rPr>
+              <a:t>Använd inte linjespänningen som fas–neutralspänning.</a:t>
             </a:r>
           </a:p>
         </p:txBody>
@@ -17940,6 +18678,30 @@
           </a:p>
         </p:txBody>
       </p:sp>
+      <p:pic xmlns:a="http://schemas.openxmlformats.org/drawingml/2006/main" xmlns:r="http://schemas.openxmlformats.org/officeDocument/2006/relationships">
+        <p:nvPicPr>
+          <p:cNvPr id="9" name="Figur: Tre fasspänningsvisare 120 grader isär; " descr="Tre fasspänningsvisare 120 grader isär; linjespänningen U12 är sträckan mellan två visarspetsar"/>
+          <p:cNvPicPr>
+            <a:picLocks noChangeAspect="1"/>
+          </p:cNvPicPr>
+          <p:nvPr/>
+        </p:nvPicPr>
+        <p:blipFill>
+          <a:blip r:embed="rId3"/>
+          <a:stretch>
+            <a:fillRect/>
+          </a:stretch>
+        </p:blipFill>
+        <p:spPr>
+          <a:xfrm>
+            <a:off x="4892040" y="1645920"/>
+            <a:ext cx="3886200" cy="3252383"/>
+          </a:xfrm>
+          <a:prstGeom prst="rect">
+            <a:avLst/>
+          </a:prstGeom>
+        </p:spPr>
+      </p:pic>
     </p:spTree>
     <p:extLst>
       <p:ext uri="{BB962C8B-B14F-4D97-AF65-F5344CB8AC3E}">
@@ -18061,7 +18823,7 @@
         <p:spPr>
           <a:xfrm xmlns:a="http://schemas.openxmlformats.org/drawingml/2006/main">
             <a:off x="762000" y="1619250"/>
-            <a:ext cx="7620000" cy="1466850"/>
+            <a:ext cx="3977639" cy="1466850"/>
           </a:xfrm>
           <a:prstGeom xmlns:a="http://schemas.openxmlformats.org/drawingml/2006/main" prst="rect">
             <a:avLst/>
@@ -18089,7 +18851,7 @@
               </a:defRPr>
             </a:pPr>
             <a:r>
-              <a:rPr sz="2400" b="0">
+              <a:rPr sz="2200" b="0">
                 <a:solidFill>
                   <a:srgbClr val="111111"/>
                 </a:solidFill>
@@ -18113,7 +18875,7 @@
               </a:defRPr>
             </a:pPr>
             <a:r>
-              <a:rPr sz="2400" b="0">
+              <a:rPr sz="2200" b="0">
                 <a:solidFill>
                   <a:srgbClr val="111111"/>
                 </a:solidFill>
@@ -18128,7 +18890,7 @@
       </p:sp>
       <p:sp>
         <p:nvSpPr>
-          <p:cNvPr id="4" name="Uᴸ² = Uꜰ² + Uꜰ² − 2Uꜰ² cos 120°">
+          <p:cNvPr id="4" name="UL² = UF² + UF² − 2UF² cos 120°">
             <a:extLst xmlns:a="http://schemas.openxmlformats.org/drawingml/2006/main">
               <a:ext uri="{FF2B5EF4-FFF2-40B4-BE49-F238E27FC236}">
                 <a16:creationId xmlns:a16="http://schemas.microsoft.com/office/drawing/2014/main" id="{FBC03102-DDD6-4D28-9712-FD5015CCE20C}"/>
@@ -18143,7 +18905,7 @@
         <p:spPr>
           <a:xfrm xmlns:a="http://schemas.openxmlformats.org/drawingml/2006/main">
             <a:off x="762000" y="3200400"/>
-            <a:ext cx="7620000" cy="838200"/>
+            <a:ext cx="3977639" cy="838200"/>
           </a:xfrm>
           <a:prstGeom xmlns:a="http://schemas.openxmlformats.org/drawingml/2006/main" prst="rect">
             <a:avLst/>
@@ -18171,7 +18933,7 @@
               </a:defRPr>
             </a:pPr>
             <a:r>
-              <a:rPr sz="2925" b="1">
+              <a:rPr sz="2650" b="1">
                 <a:solidFill>
                   <a:srgbClr val="064F91"/>
                 </a:solidFill>
@@ -18179,14 +18941,102 @@
                 <a:ea typeface="Calibri"/>
                 <a:cs typeface="Calibri"/>
               </a:rPr>
-              <a:t>Uᴸ² = Uꜰ² + Uꜰ² − 2Uꜰ² cos 120°</a:t>
-            </a:r>
-          </a:p>
-        </p:txBody>
-      </p:sp>
-      <p:sp>
-        <p:nvSpPr>
-          <p:cNvPr id="5" name="cos 120° = −0,5 ger Uᴸ² = 3Uꜰ².&#10;Därför blir Uᴸ = √3 Uꜰ.">
+              <a:t>U</a:t>
+            </a:r>
+            <a:r>
+              <a:rPr sz="2650" b="1" baseline="-25000">
+                <a:solidFill>
+                  <a:srgbClr val="064F91"/>
+                </a:solidFill>
+                <a:latin typeface="Calibri"/>
+                <a:ea typeface="Calibri"/>
+                <a:cs typeface="Calibri"/>
+              </a:rPr>
+              <a:t>L</a:t>
+            </a:r>
+            <a:r>
+              <a:rPr sz="2650" b="1">
+                <a:solidFill>
+                  <a:srgbClr val="064F91"/>
+                </a:solidFill>
+                <a:latin typeface="Calibri"/>
+                <a:ea typeface="Calibri"/>
+                <a:cs typeface="Calibri"/>
+              </a:rPr>
+              <a:t>² = U</a:t>
+            </a:r>
+            <a:r>
+              <a:rPr sz="2650" b="1" baseline="-25000">
+                <a:solidFill>
+                  <a:srgbClr val="064F91"/>
+                </a:solidFill>
+                <a:latin typeface="Calibri"/>
+                <a:ea typeface="Calibri"/>
+                <a:cs typeface="Calibri"/>
+              </a:rPr>
+              <a:t>F</a:t>
+            </a:r>
+            <a:r>
+              <a:rPr sz="2650" b="1">
+                <a:solidFill>
+                  <a:srgbClr val="064F91"/>
+                </a:solidFill>
+                <a:latin typeface="Calibri"/>
+                <a:ea typeface="Calibri"/>
+                <a:cs typeface="Calibri"/>
+              </a:rPr>
+              <a:t>² + U</a:t>
+            </a:r>
+            <a:r>
+              <a:rPr sz="2650" b="1" baseline="-25000">
+                <a:solidFill>
+                  <a:srgbClr val="064F91"/>
+                </a:solidFill>
+                <a:latin typeface="Calibri"/>
+                <a:ea typeface="Calibri"/>
+                <a:cs typeface="Calibri"/>
+              </a:rPr>
+              <a:t>F</a:t>
+            </a:r>
+            <a:r>
+              <a:rPr sz="2650" b="1">
+                <a:solidFill>
+                  <a:srgbClr val="064F91"/>
+                </a:solidFill>
+                <a:latin typeface="Calibri"/>
+                <a:ea typeface="Calibri"/>
+                <a:cs typeface="Calibri"/>
+              </a:rPr>
+              <a:t>² − 2U</a:t>
+            </a:r>
+            <a:r>
+              <a:rPr sz="2650" b="1" baseline="-25000">
+                <a:solidFill>
+                  <a:srgbClr val="064F91"/>
+                </a:solidFill>
+                <a:latin typeface="Calibri"/>
+                <a:ea typeface="Calibri"/>
+                <a:cs typeface="Calibri"/>
+              </a:rPr>
+              <a:t>F</a:t>
+            </a:r>
+            <a:r>
+              <a:rPr sz="2650" b="1">
+                <a:solidFill>
+                  <a:srgbClr val="064F91"/>
+                </a:solidFill>
+                <a:latin typeface="Calibri"/>
+                <a:ea typeface="Calibri"/>
+                <a:cs typeface="Calibri"/>
+              </a:rPr>
+              <a:t>² cos 120°</a:t>
+            </a:r>
+          </a:p>
+        </p:txBody>
+      </p:sp>
+      <p:sp>
+        <p:nvSpPr>
+          <p:cNvPr id="5" name="cos 120° = −0,5 ger UL² = 3UF².&#10;Därför blir UL = √3 UF.">
             <a:extLst xmlns:a="http://schemas.openxmlformats.org/drawingml/2006/main">
               <a:ext uri="{FF2B5EF4-FFF2-40B4-BE49-F238E27FC236}">
                 <a16:creationId xmlns:a16="http://schemas.microsoft.com/office/drawing/2014/main" id="{A53BA81C-D003-4770-B757-BF38CDA1B2C2}"/>
@@ -18201,7 +19051,7 @@
         <p:spPr>
           <a:xfrm xmlns:a="http://schemas.openxmlformats.org/drawingml/2006/main">
             <a:off x="762000" y="4429125"/>
-            <a:ext cx="7620000" cy="1352550"/>
+            <a:ext cx="3977639" cy="1352550"/>
           </a:xfrm>
           <a:prstGeom xmlns:a="http://schemas.openxmlformats.org/drawingml/2006/main" prst="rect">
             <a:avLst/>
@@ -18237,7 +19087,51 @@
                 <a:ea typeface="Calibri"/>
                 <a:cs typeface="Calibri"/>
               </a:rPr>
-              <a:t>cos 120° = −0,5 ger Uᴸ² = 3Uꜰ².</a:t>
+              <a:t>cos 120° = −0,5 ger U</a:t>
+            </a:r>
+            <a:r>
+              <a:rPr sz="2250" b="0" baseline="-25000">
+                <a:solidFill>
+                  <a:srgbClr val="111111"/>
+                </a:solidFill>
+                <a:latin typeface="Calibri"/>
+                <a:ea typeface="Calibri"/>
+                <a:cs typeface="Calibri"/>
+              </a:rPr>
+              <a:t>L</a:t>
+            </a:r>
+            <a:r>
+              <a:rPr sz="2250" b="0">
+                <a:solidFill>
+                  <a:srgbClr val="111111"/>
+                </a:solidFill>
+                <a:latin typeface="Calibri"/>
+                <a:ea typeface="Calibri"/>
+                <a:cs typeface="Calibri"/>
+              </a:rPr>
+              <a:t>² = 3U</a:t>
+            </a:r>
+            <a:r>
+              <a:rPr sz="2250" b="0" baseline="-25000">
+                <a:solidFill>
+                  <a:srgbClr val="111111"/>
+                </a:solidFill>
+                <a:latin typeface="Calibri"/>
+                <a:ea typeface="Calibri"/>
+                <a:cs typeface="Calibri"/>
+              </a:rPr>
+              <a:t>F</a:t>
+            </a:r>
+            <a:r>
+              <a:rPr sz="2250" b="0">
+                <a:solidFill>
+                  <a:srgbClr val="111111"/>
+                </a:solidFill>
+                <a:latin typeface="Calibri"/>
+                <a:ea typeface="Calibri"/>
+                <a:cs typeface="Calibri"/>
+              </a:rPr>
+              <a:t>².</a:t>
             </a:r>
           </a:p>
           <a:p xmlns:a="http://schemas.openxmlformats.org/drawingml/2006/main">
@@ -18261,7 +19155,51 @@
                 <a:ea typeface="Calibri"/>
                 <a:cs typeface="Calibri"/>
               </a:rPr>
-              <a:t>Därför blir Uᴸ = √3 Uꜰ.</a:t>
+              <a:t>Därför blir U</a:t>
+            </a:r>
+            <a:r>
+              <a:rPr sz="2250" b="0" baseline="-25000">
+                <a:solidFill>
+                  <a:srgbClr val="111111"/>
+                </a:solidFill>
+                <a:latin typeface="Calibri"/>
+                <a:ea typeface="Calibri"/>
+                <a:cs typeface="Calibri"/>
+              </a:rPr>
+              <a:t>L</a:t>
+            </a:r>
+            <a:r>
+              <a:rPr sz="2250" b="0">
+                <a:solidFill>
+                  <a:srgbClr val="111111"/>
+                </a:solidFill>
+                <a:latin typeface="Calibri"/>
+                <a:ea typeface="Calibri"/>
+                <a:cs typeface="Calibri"/>
+              </a:rPr>
+              <a:t> = √3 U</a:t>
+            </a:r>
+            <a:r>
+              <a:rPr sz="2250" b="0" baseline="-25000">
+                <a:solidFill>
+                  <a:srgbClr val="111111"/>
+                </a:solidFill>
+                <a:latin typeface="Calibri"/>
+                <a:ea typeface="Calibri"/>
+                <a:cs typeface="Calibri"/>
+              </a:rPr>
+              <a:t>F</a:t>
+            </a:r>
+            <a:r>
+              <a:rPr sz="2250" b="0">
+                <a:solidFill>
+                  <a:srgbClr val="111111"/>
+                </a:solidFill>
+                <a:latin typeface="Calibri"/>
+                <a:ea typeface="Calibri"/>
+                <a:cs typeface="Calibri"/>
+              </a:rPr>
+              <a:t>.</a:t>
             </a:r>
           </a:p>
         </p:txBody>
@@ -18324,6 +19262,30 @@
           </a:p>
         </p:txBody>
       </p:sp>
+      <p:pic xmlns:a="http://schemas.openxmlformats.org/drawingml/2006/main" xmlns:r="http://schemas.openxmlformats.org/officeDocument/2006/relationships">
+        <p:nvPicPr>
+          <p:cNvPr id="9" name="Figur: Linjespänningen U12 som skillnaden mella" descr="Linjespänningen U12 som skillnaden mellan fasvisarna U1N och U2N med 120 grader mellan dem"/>
+          <p:cNvPicPr>
+            <a:picLocks noChangeAspect="1"/>
+          </p:cNvPicPr>
+          <p:nvPr/>
+        </p:nvPicPr>
+        <p:blipFill>
+          <a:blip r:embed="rId3"/>
+          <a:stretch>
+            <a:fillRect/>
+          </a:stretch>
+        </p:blipFill>
+        <p:spPr>
+          <a:xfrm>
+            <a:off x="4892040" y="1645920"/>
+            <a:ext cx="3886200" cy="3252383"/>
+          </a:xfrm>
+          <a:prstGeom prst="rect">
+            <a:avLst/>
+          </a:prstGeom>
+        </p:spPr>
+      </p:pic>
     </p:spTree>
     <p:extLst>
       <p:ext uri="{BB962C8B-B14F-4D97-AF65-F5344CB8AC3E}">
@@ -18429,7 +19391,7 @@
       </p:sp>
       <p:sp>
         <p:nvSpPr>
-          <p:cNvPr id="10" name="En symmetrisk trefaskälla ger Uꜰ = 100 V vid f = 60 Hz. Sök Uᴸ oc">
+          <p:cNvPr id="10" name="En symmetrisk trefaskälla ger UF = 100 V vid f = 60 Hz. Sök UL oc">
             <a:extLst xmlns:a="http://schemas.openxmlformats.org/drawingml/2006/main">
               <a:ext uri="{FF2B5EF4-FFF2-40B4-BE49-F238E27FC236}">
                 <a16:creationId xmlns:a16="http://schemas.microsoft.com/office/drawing/2014/main" id="{41F0F78C-990B-433E-BA30-5139AF5AB51C}"/>
@@ -18479,14 +19441,58 @@
                 <a:ea typeface="Calibri"/>
                 <a:cs typeface="Calibri"/>
               </a:rPr>
-              <a:t>En symmetrisk trefaskälla ger Uꜰ = 100 V vid f = 60 Hz. Sök Uᴸ och tidsavståndet 120°.</a:t>
-            </a:r>
-          </a:p>
-        </p:txBody>
-      </p:sp>
-      <p:sp>
-        <p:nvSpPr>
-          <p:cNvPr id="11" name="Uᴸ = √3 Uꜰ     Δt = (1/f)/3">
+              <a:t>En symmetrisk trefaskälla ger U</a:t>
+            </a:r>
+            <a:r>
+              <a:rPr sz="2175" b="0" baseline="-25000">
+                <a:solidFill>
+                  <a:srgbClr val="111111"/>
+                </a:solidFill>
+                <a:latin typeface="Calibri"/>
+                <a:ea typeface="Calibri"/>
+                <a:cs typeface="Calibri"/>
+              </a:rPr>
+              <a:t>F</a:t>
+            </a:r>
+            <a:r>
+              <a:rPr sz="2175" b="0">
+                <a:solidFill>
+                  <a:srgbClr val="111111"/>
+                </a:solidFill>
+                <a:latin typeface="Calibri"/>
+                <a:ea typeface="Calibri"/>
+                <a:cs typeface="Calibri"/>
+              </a:rPr>
+              <a:t> = 100 V vid f = 60 Hz. Sök U</a:t>
+            </a:r>
+            <a:r>
+              <a:rPr sz="2175" b="0" baseline="-25000">
+                <a:solidFill>
+                  <a:srgbClr val="111111"/>
+                </a:solidFill>
+                <a:latin typeface="Calibri"/>
+                <a:ea typeface="Calibri"/>
+                <a:cs typeface="Calibri"/>
+              </a:rPr>
+              <a:t>L</a:t>
+            </a:r>
+            <a:r>
+              <a:rPr sz="2175" b="0">
+                <a:solidFill>
+                  <a:srgbClr val="111111"/>
+                </a:solidFill>
+                <a:latin typeface="Calibri"/>
+                <a:ea typeface="Calibri"/>
+                <a:cs typeface="Calibri"/>
+              </a:rPr>
+              <a:t> och tidsavståndet 120°.</a:t>
+            </a:r>
+          </a:p>
+        </p:txBody>
+      </p:sp>
+      <p:sp>
+        <p:nvSpPr>
+          <p:cNvPr id="11" name="UL = √3 UF     Δt = (1/f)/3">
             <a:extLst xmlns:a="http://schemas.openxmlformats.org/drawingml/2006/main">
               <a:ext uri="{FF2B5EF4-FFF2-40B4-BE49-F238E27FC236}">
                 <a16:creationId xmlns:a16="http://schemas.microsoft.com/office/drawing/2014/main" id="{5A600AFE-7C15-473C-93C8-41E07A947F05}"/>
@@ -18536,14 +19542,58 @@
                 <a:ea typeface="Calibri"/>
                 <a:cs typeface="Calibri"/>
               </a:rPr>
-              <a:t>Uᴸ = √3 Uꜰ     Δt = (1/f)/3</a:t>
-            </a:r>
-          </a:p>
-        </p:txBody>
-      </p:sp>
-      <p:sp>
-        <p:nvSpPr>
-          <p:cNvPr id="12" name="1. Uᴸ = √3 · 100 ≈ 173,2 V.&#10;2. T = 1/60 ≈ 0,01667 s = 16,67 ms.&#10;3">
+              <a:t>U</a:t>
+            </a:r>
+            <a:r>
+              <a:rPr sz="2325" b="1" baseline="-25000">
+                <a:solidFill>
+                  <a:srgbClr val="064F91"/>
+                </a:solidFill>
+                <a:latin typeface="Calibri"/>
+                <a:ea typeface="Calibri"/>
+                <a:cs typeface="Calibri"/>
+              </a:rPr>
+              <a:t>L</a:t>
+            </a:r>
+            <a:r>
+              <a:rPr sz="2325" b="1">
+                <a:solidFill>
+                  <a:srgbClr val="064F91"/>
+                </a:solidFill>
+                <a:latin typeface="Calibri"/>
+                <a:ea typeface="Calibri"/>
+                <a:cs typeface="Calibri"/>
+              </a:rPr>
+              <a:t> = √3 U</a:t>
+            </a:r>
+            <a:r>
+              <a:rPr sz="2325" b="1" baseline="-25000">
+                <a:solidFill>
+                  <a:srgbClr val="064F91"/>
+                </a:solidFill>
+                <a:latin typeface="Calibri"/>
+                <a:ea typeface="Calibri"/>
+                <a:cs typeface="Calibri"/>
+              </a:rPr>
+              <a:t>F</a:t>
+            </a:r>
+            <a:r>
+              <a:rPr sz="2325" b="1">
+                <a:solidFill>
+                  <a:srgbClr val="064F91"/>
+                </a:solidFill>
+                <a:latin typeface="Calibri"/>
+                <a:ea typeface="Calibri"/>
+                <a:cs typeface="Calibri"/>
+              </a:rPr>
+              <a:t>     Δt = (1/f)/3</a:t>
+            </a:r>
+          </a:p>
+        </p:txBody>
+      </p:sp>
+      <p:sp>
+        <p:nvSpPr>
+          <p:cNvPr id="12" name="1. UL = √3 · 100 ≈ 173,2 V.&#10;2. T = 1/60 ≈ 0,01667 s = 16,67 ms.&#10;3">
             <a:extLst xmlns:a="http://schemas.openxmlformats.org/drawingml/2006/main">
               <a:ext uri="{FF2B5EF4-FFF2-40B4-BE49-F238E27FC236}">
                 <a16:creationId xmlns:a16="http://schemas.microsoft.com/office/drawing/2014/main" id="{7F45F91B-0AA8-445B-8C18-E922D76626B7}"/>
@@ -18593,7 +19643,29 @@
                 <a:ea typeface="Calibri"/>
                 <a:cs typeface="Calibri"/>
               </a:rPr>
-              <a:t>1. Uᴸ = √3 · 100 ≈ 173,2 V.</a:t>
+              <a:t>1. U</a:t>
+            </a:r>
+            <a:r>
+              <a:rPr sz="2063" b="0" baseline="-25000">
+                <a:solidFill>
+                  <a:srgbClr val="111111"/>
+                </a:solidFill>
+                <a:latin typeface="Calibri"/>
+                <a:ea typeface="Calibri"/>
+                <a:cs typeface="Calibri"/>
+              </a:rPr>
+              <a:t>L</a:t>
+            </a:r>
+            <a:r>
+              <a:rPr sz="2063" b="0">
+                <a:solidFill>
+                  <a:srgbClr val="111111"/>
+                </a:solidFill>
+                <a:latin typeface="Calibri"/>
+                <a:ea typeface="Calibri"/>
+                <a:cs typeface="Calibri"/>
+              </a:rPr>
+              <a:t> = √3 · 100 ≈ 173,2 V.</a:t>
             </a:r>
           </a:p>
           <a:p xmlns:a="http://schemas.openxmlformats.org/drawingml/2006/main">

--- a/sjoskolan/vecka-41/aktuell/v41_01_Trefassystemets_grunder_elev.pptx
+++ b/sjoskolan/vecka-41/aktuell/v41_01_Trefassystemets_grunder_elev.pptx
@@ -5263,6 +5263,10 @@
             <a:noFill/>
           </a:ln>
         </p:spPr>
+        <p:txBody xmlns:a="http://schemas.openxmlformats.org/drawingml/2006/main">
+          <a:bodyPr/>
+          <a:p/>
+        </p:txBody>
       </p:sp>
       <p:sp>
         <p:nvSpPr>
@@ -6041,7 +6045,7 @@
                 <a:ea typeface="Calibri"/>
                 <a:cs typeface="Calibri"/>
               </a:rPr>
-              <a:t>Tre faser delar en hel period jämnt. Beräkna vinkel mellan faserna.</a:t>
+              <a:t>Tre faser delar en hel period jämnt. Beräkna vinkeln mellan faserna.</a:t>
             </a:r>
           </a:p>
         </p:txBody>
@@ -8974,7 +8978,7 @@
                 <a:ea typeface="Calibri"/>
                 <a:cs typeface="Calibri"/>
               </a:rPr>
-              <a:t>Förutsättningar: Avsedd tränare med U</a:t>
+              <a:t>Förutsättningar: Avsedd övningsrigg med U</a:t>
             </a:r>
             <a:r>
               <a:rPr sz="2025" b="0" baseline="-25000">
@@ -9272,7 +9276,7 @@
                 <a:ea typeface="Calibri"/>
                 <a:cs typeface="Calibri"/>
               </a:rPr>
-              <a:t>Trefastränaren</a:t>
+              <a:t>Trefasriggen</a:t>
             </a:r>
           </a:p>
         </p:txBody>
@@ -9330,7 +9334,7 @@
                 <a:ea typeface="Calibri"/>
                 <a:cs typeface="Calibri"/>
               </a:rPr>
-              <a:t>En avsedd trefastränare ger 12,0 V mellan faserna. Vilken spänning förväntas över varje gren i en symmetrisk Y-last?</a:t>
+              <a:t>En avsedd trefasrigg ger 12,0 V mellan faserna. Vilken spänning förväntas över varje gren i en symmetrisk Y-last?</a:t>
             </a:r>
           </a:p>
         </p:txBody>
@@ -12203,7 +12207,7 @@
                 <a:ea typeface="Calibri"/>
                 <a:cs typeface="Calibri"/>
               </a:rPr>
-              <a:t>Arbetsgång: Föreställ dig tre lika visare jämnt runt ett varv. Deras komponenter tar ut varandra.</a:t>
+              <a:t>Arbetsgång: Rita de tre visarna efter varandra, spets mot fot. Vad blir summan?</a:t>
             </a:r>
           </a:p>
         </p:txBody>
@@ -12780,7 +12784,7 @@
                 <a:ea typeface="Calibri"/>
                 <a:cs typeface="Calibri"/>
               </a:rPr>
-              <a:t>|IN| = |Ifas| vid en enda faslast</a:t>
+              <a:t>Nodlagen: Σ in = Σ ut</a:t>
             </a:r>
           </a:p>
         </p:txBody>
@@ -12837,7 +12841,7 @@
                 <a:ea typeface="Calibri"/>
                 <a:cs typeface="Calibri"/>
               </a:rPr>
-              <a:t>IN är neutralledarens ström. Den återför strömmen från den enda aktiva fas–neutral-lasten.</a:t>
+              <a:t>Iɴ är neutralledarens ström. Den för tillbaka strömmen från fas–neutral-lasterna.</a:t>
             </a:r>
           </a:p>
         </p:txBody>
@@ -18561,37 +18565,15 @@
               </a:defRPr>
             </a:pPr>
             <a:r>
-              <a:rPr sz="2100" b="0">
-                <a:solidFill>
-                  <a:srgbClr val="111111"/>
-                </a:solidFill>
-                <a:latin typeface="Calibri"/>
-                <a:ea typeface="Calibri"/>
-                <a:cs typeface="Calibri"/>
-              </a:rPr>
-              <a:t>Ombord är 440 V vanligt: då är U</a:t>
-            </a:r>
-            <a:r>
-              <a:rPr sz="2100" b="0" baseline="-25000">
-                <a:solidFill>
-                  <a:srgbClr val="111111"/>
-                </a:solidFill>
-                <a:latin typeface="Calibri"/>
-                <a:ea typeface="Calibri"/>
-                <a:cs typeface="Calibri"/>
-              </a:rPr>
-              <a:t>F</a:t>
-            </a:r>
-            <a:r>
-              <a:rPr sz="2100" b="0">
-                <a:solidFill>
-                  <a:srgbClr val="111111"/>
-                </a:solidFill>
-                <a:latin typeface="Calibri"/>
-                <a:ea typeface="Calibri"/>
-                <a:cs typeface="Calibri"/>
-              </a:rPr>
-              <a:t> ≈ 254 V.</a:t>
+              <a:rPr sz="1700" b="0">
+                <a:solidFill>
+                  <a:srgbClr val="111111"/>
+                </a:solidFill>
+                <a:latin typeface="Calibri"/>
+                <a:ea typeface="Calibri"/>
+                <a:cs typeface="Calibri"/>
+              </a:rPr>
+              <a:t>Ombord är 440 V vanligt. Generatorns fasspänning i Y är ≈ 254 V,</a:t>
             </a:r>
           </a:p>
           <a:p xmlns:a="http://schemas.openxmlformats.org/drawingml/2006/main">
@@ -18607,15 +18589,15 @@
               </a:defRPr>
             </a:pPr>
             <a:r>
-              <a:rPr sz="2100" b="0">
-                <a:solidFill>
-                  <a:srgbClr val="111111"/>
-                </a:solidFill>
-                <a:latin typeface="Calibri"/>
-                <a:ea typeface="Calibri"/>
-                <a:cs typeface="Calibri"/>
-              </a:rPr>
-              <a:t>Använd inte linjespänningen som fas–neutralspänning.</a:t>
+              <a:rPr sz="1700" b="0">
+                <a:solidFill>
+                  <a:srgbClr val="111111"/>
+                </a:solidFill>
+                <a:latin typeface="Calibri"/>
+                <a:ea typeface="Calibri"/>
+                <a:cs typeface="Calibri"/>
+              </a:rPr>
+              <a:t>men nätet har oftast ingen neutralledare. Vid ett jordfel kan en fas ha hela 440 V mot skrovet.</a:t>
             </a:r>
           </a:p>
         </p:txBody>

--- a/sjoskolan/vecka-41/aktuell/v41_01_Trefassystemets_grunder_elev.pptx
+++ b/sjoskolan/vecka-41/aktuell/v41_01_Trefassystemets_grunder_elev.pptx
@@ -5654,7 +5654,7 @@
                 <a:ea typeface="Calibri"/>
                 <a:cs typeface="Calibri"/>
               </a:rPr>
-              <a:t>En hel period motsvarar 360°. Fasavstånd beskriver skillnaden i läge längs samma period.</a:t>
+              <a:t>En hel period motsvarar 360°.</a:t>
             </a:r>
           </a:p>
         </p:txBody>
@@ -5711,7 +5711,7 @@
                 <a:ea typeface="Calibri"/>
                 <a:cs typeface="Calibri"/>
               </a:rPr>
-              <a:t>Förutsättningar: Tre lika, jämnt förskjutna faser.</a:t>
+              <a:t>Förutsättningar: Tre lika stora faser, jämnt förskjutna.</a:t>
             </a:r>
           </a:p>
         </p:txBody>
@@ -5768,7 +5768,7 @@
                 <a:ea typeface="Calibri"/>
                 <a:cs typeface="Calibri"/>
               </a:rPr>
-              <a:t>Arbetsgång: Dela den hela periodens vinkel lika mellan de tre faserna.</a:t>
+              <a:t>Arbetsgång: Dela den vinkeln lika mellan de tre faserna.</a:t>
             </a:r>
           </a:p>
         </p:txBody>
@@ -6345,7 +6345,7 @@
                 <a:ea typeface="Calibri"/>
                 <a:cs typeface="Calibri"/>
               </a:rPr>
-              <a:t>T = 1/f     Δt = T · φ/360°</a:t>
+              <a:t>T = 1/f; Δt = T · φ/360°</a:t>
             </a:r>
           </a:p>
         </p:txBody>
@@ -6402,7 +6402,7 @@
                 <a:ea typeface="Calibri"/>
                 <a:cs typeface="Calibri"/>
               </a:rPr>
-              <a:t>T är period, Δt tidsförskjutning och φ fasavstånd i grader. 1 s = 1 000 ms.</a:t>
+              <a:t>T är periodtiden, Δt tidsförskjutningen och φ vinkeln i grader. 1 s = 1 000 ms.</a:t>
             </a:r>
           </a:p>
         </p:txBody>
@@ -6516,7 +6516,7 @@
                 <a:ea typeface="Calibri"/>
                 <a:cs typeface="Calibri"/>
               </a:rPr>
-              <a:t>Arbetsgång: Räkna perioden först. Beräkna sedan hur stor del av perioden som 120° motsvarar.</a:t>
+              <a:t>Arbetsgång: Räkna först ut periodtiden och sedan hur stor del av den som 120° motsvarar.</a:t>
             </a:r>
           </a:p>
         </p:txBody>
@@ -7216,7 +7216,7 @@
                 <a:ea typeface="Calibri"/>
                 <a:cs typeface="Calibri"/>
               </a:rPr>
-              <a:t> är linje- eller huvudspänning mellan två faser. U</a:t>
+              <a:t> är linjespänningen (huvudspänningen) mellan två faser. U</a:t>
             </a:r>
             <a:r>
               <a:rPr sz="2100" b="0" baseline="-25000">
@@ -7227,7 +7227,7 @@
                 <a:ea typeface="Calibri"/>
                 <a:cs typeface="Calibri"/>
               </a:rPr>
-              <a:t>F</a:t>
+              <a:t>fas</a:t>
             </a:r>
             <a:r>
               <a:rPr sz="2100" b="0">
@@ -7238,7 +7238,7 @@
                 <a:ea typeface="Calibri"/>
                 <a:cs typeface="Calibri"/>
               </a:rPr>
-              <a:t> är spänning mellan fas och källans neutralpunkt.</a:t>
+              <a:t> är spänningen mellan en fas och neutralpunkten.</a:t>
             </a:r>
           </a:p>
         </p:txBody>
@@ -7374,7 +7374,7 @@
                 <a:ea typeface="Calibri"/>
                 <a:cs typeface="Calibri"/>
               </a:rPr>
-              <a:t>Arbetsgång: Dividera linjespänningen med √3. Ange tydligt att resultatet gäller fas–neutral.</a:t>
+              <a:t>Arbetsgång: Dela linjespänningen med √3 och skriv tydligt att svaret gäller mellan fas och neutral.</a:t>
             </a:r>
           </a:p>
         </p:txBody>
@@ -7673,7 +7673,7 @@
                 <a:ea typeface="Calibri"/>
                 <a:cs typeface="Calibri"/>
               </a:rPr>
-              <a:t> = 400 V i ett symmetriskt system. Beräkna U</a:t>
+              <a:t> = 400 V i ett symmetriskt system. Beräkna U</a:t>
             </a:r>
             <a:r>
               <a:rPr sz="2400" b="0" baseline="-25000">
@@ -7684,7 +7684,7 @@
                 <a:ea typeface="Calibri"/>
                 <a:cs typeface="Calibri"/>
               </a:rPr>
-              <a:t>F</a:t>
+              <a:t>fas</a:t>
             </a:r>
             <a:r>
               <a:rPr sz="2400" b="0">
@@ -8085,7 +8085,7 @@
                 <a:ea typeface="Calibri"/>
                 <a:cs typeface="Calibri"/>
               </a:rPr>
-              <a:t>Fasvisarna har samma belopp och 120° mellan sig. Deras skillnad ger linjespänningen.</a:t>
+              <a:t>Fasvisarna är lika långa och ligger 120° isär. Skillnaden mellan dem är linjespänningen.</a:t>
             </a:r>
           </a:p>
         </p:txBody>
@@ -8153,7 +8153,7 @@
                 <a:ea typeface="Calibri"/>
                 <a:cs typeface="Calibri"/>
               </a:rPr>
-              <a:t>F</a:t>
+              <a:t>fas</a:t>
             </a:r>
             <a:r>
               <a:rPr sz="2025" b="0">
@@ -8164,7 +8164,7 @@
                 <a:ea typeface="Calibri"/>
                 <a:cs typeface="Calibri"/>
               </a:rPr>
-              <a:t> = 120 V är fas–neutralspänning.</a:t>
+              <a:t> = 120 V mellan fas och neutral.</a:t>
             </a:r>
           </a:p>
         </p:txBody>
@@ -8221,7 +8221,7 @@
                 <a:ea typeface="Calibri"/>
                 <a:cs typeface="Calibri"/>
               </a:rPr>
-              <a:t>Arbetsgång: Multiplicera med √3. Förväxla inte linjespänningen med summan 2U</a:t>
+              <a:t>Arbetsgång: Multiplicera med √3 – linjespänningen är inte 2U</a:t>
             </a:r>
             <a:r>
               <a:rPr sz="2025" b="0" baseline="-25000">
@@ -8232,7 +8232,7 @@
                 <a:ea typeface="Calibri"/>
                 <a:cs typeface="Calibri"/>
               </a:rPr>
-              <a:t>F</a:t>
+              <a:t>fas</a:t>
             </a:r>
             <a:r>
               <a:rPr sz="2025" b="0">
@@ -8531,7 +8531,7 @@
                 <a:ea typeface="Calibri"/>
                 <a:cs typeface="Calibri"/>
               </a:rPr>
-              <a:t>F</a:t>
+              <a:t>fas</a:t>
             </a:r>
             <a:r>
               <a:rPr sz="2400" b="0">
@@ -8542,7 +8542,7 @@
                 <a:ea typeface="Calibri"/>
                 <a:cs typeface="Calibri"/>
               </a:rPr>
-              <a:t> = 120 V. Beräkna linjespänningen i ett symmetriskt system.</a:t>
+              <a:t> = 120 V. Beräkna linjespänningen i ett symmetriskt system.</a:t>
             </a:r>
           </a:p>
         </p:txBody>
@@ -8842,7 +8842,29 @@
                 <a:ea typeface="Calibri"/>
                 <a:cs typeface="Calibri"/>
               </a:rPr>
-              <a:t>Ugren,Y = U</a:t>
+              <a:t>U</a:t>
+            </a:r>
+            <a:r>
+              <a:rPr sz="2400" b="1" baseline="-25000">
+                <a:solidFill>
+                  <a:srgbClr val="064F91"/>
+                </a:solidFill>
+                <a:latin typeface="Calibri"/>
+                <a:ea typeface="Calibri"/>
+                <a:cs typeface="Calibri"/>
+              </a:rPr>
+              <a:t>gren</a:t>
+            </a:r>
+            <a:r>
+              <a:rPr sz="2400" b="1">
+                <a:solidFill>
+                  <a:srgbClr val="064F91"/>
+                </a:solidFill>
+                <a:latin typeface="Calibri"/>
+                <a:ea typeface="Calibri"/>
+                <a:cs typeface="Calibri"/>
+              </a:rPr>
+              <a:t>,Y = U</a:t>
             </a:r>
             <a:r>
               <a:rPr sz="2400" b="1" baseline="-25000">
@@ -8921,7 +8943,29 @@
                 <a:ea typeface="Calibri"/>
                 <a:cs typeface="Calibri"/>
               </a:rPr>
-              <a:t>Ugren,Y är spänningen över en lastgren i symmetrisk Y.</a:t>
+              <a:t>U</a:t>
+            </a:r>
+            <a:r>
+              <a:rPr sz="2100" b="0" baseline="-25000">
+                <a:solidFill>
+                  <a:srgbClr val="111111"/>
+                </a:solidFill>
+                <a:latin typeface="Calibri"/>
+                <a:ea typeface="Calibri"/>
+                <a:cs typeface="Calibri"/>
+              </a:rPr>
+              <a:t>gren</a:t>
+            </a:r>
+            <a:r>
+              <a:rPr sz="2100" b="0">
+                <a:solidFill>
+                  <a:srgbClr val="111111"/>
+                </a:solidFill>
+                <a:latin typeface="Calibri"/>
+                <a:ea typeface="Calibri"/>
+                <a:cs typeface="Calibri"/>
+              </a:rPr>
+              <a:t>,Y är spänningen över en lastgren i Y-koppling.</a:t>
             </a:r>
           </a:p>
         </p:txBody>
@@ -9057,7 +9101,7 @@
                 <a:ea typeface="Calibri"/>
                 <a:cs typeface="Calibri"/>
               </a:rPr>
-              <a:t>Arbetsgång: Identifiera Y-kopplingen och beräkna grenspänningen ur linjespänningen.</a:t>
+              <a:t>Arbetsgång: Räkna ut grenspänningen från linjespänningen.</a:t>
             </a:r>
           </a:p>
         </p:txBody>
@@ -12036,7 +12080,95 @@
                 <a:ea typeface="Calibri"/>
                 <a:cs typeface="Calibri"/>
               </a:rPr>
-              <a:t>I⃗N = −(I⃗₁ + I⃗₂ + I⃗₃)</a:t>
+              <a:t>Visarsumma: I</a:t>
+            </a:r>
+            <a:r>
+              <a:rPr sz="2400" b="1" baseline="-25000">
+                <a:solidFill>
+                  <a:srgbClr val="064F91"/>
+                </a:solidFill>
+                <a:latin typeface="Calibri"/>
+                <a:ea typeface="Calibri"/>
+                <a:cs typeface="Calibri"/>
+              </a:rPr>
+              <a:t>N</a:t>
+            </a:r>
+            <a:r>
+              <a:rPr sz="2400" b="1">
+                <a:solidFill>
+                  <a:srgbClr val="064F91"/>
+                </a:solidFill>
+                <a:latin typeface="Calibri"/>
+                <a:ea typeface="Calibri"/>
+                <a:cs typeface="Calibri"/>
+              </a:rPr>
+              <a:t> = −(I</a:t>
+            </a:r>
+            <a:r>
+              <a:rPr sz="2400" b="1" baseline="-25000">
+                <a:solidFill>
+                  <a:srgbClr val="064F91"/>
+                </a:solidFill>
+                <a:latin typeface="Calibri"/>
+                <a:ea typeface="Calibri"/>
+                <a:cs typeface="Calibri"/>
+              </a:rPr>
+              <a:t>1</a:t>
+            </a:r>
+            <a:r>
+              <a:rPr sz="2400" b="1">
+                <a:solidFill>
+                  <a:srgbClr val="064F91"/>
+                </a:solidFill>
+                <a:latin typeface="Calibri"/>
+                <a:ea typeface="Calibri"/>
+                <a:cs typeface="Calibri"/>
+              </a:rPr>
+              <a:t> + I</a:t>
+            </a:r>
+            <a:r>
+              <a:rPr sz="2400" b="1" baseline="-25000">
+                <a:solidFill>
+                  <a:srgbClr val="064F91"/>
+                </a:solidFill>
+                <a:latin typeface="Calibri"/>
+                <a:ea typeface="Calibri"/>
+                <a:cs typeface="Calibri"/>
+              </a:rPr>
+              <a:t>2</a:t>
+            </a:r>
+            <a:r>
+              <a:rPr sz="2400" b="1">
+                <a:solidFill>
+                  <a:srgbClr val="064F91"/>
+                </a:solidFill>
+                <a:latin typeface="Calibri"/>
+                <a:ea typeface="Calibri"/>
+                <a:cs typeface="Calibri"/>
+              </a:rPr>
+              <a:t> + I</a:t>
+            </a:r>
+            <a:r>
+              <a:rPr sz="2400" b="1" baseline="-25000">
+                <a:solidFill>
+                  <a:srgbClr val="064F91"/>
+                </a:solidFill>
+                <a:latin typeface="Calibri"/>
+                <a:ea typeface="Calibri"/>
+                <a:cs typeface="Calibri"/>
+              </a:rPr>
+              <a:t>3</a:t>
+            </a:r>
+            <a:r>
+              <a:rPr sz="2400" b="1">
+                <a:solidFill>
+                  <a:srgbClr val="064F91"/>
+                </a:solidFill>
+                <a:latin typeface="Calibri"/>
+                <a:ea typeface="Calibri"/>
+                <a:cs typeface="Calibri"/>
+              </a:rPr>
+              <a:t>)</a:t>
             </a:r>
           </a:p>
         </p:txBody>
@@ -12150,7 +12282,7 @@
                 <a:ea typeface="Calibri"/>
                 <a:cs typeface="Calibri"/>
               </a:rPr>
-              <a:t>Förutsättningar: Tre rena sinusströmmar på 8,0 A med exakt 120° mellan dem.</a:t>
+              <a:t>Förutsättningar: Tre rena sinusströmmar på 8,0 A, exakt 120° isär.</a:t>
             </a:r>
           </a:p>
         </p:txBody>
@@ -12484,7 +12616,7 @@
                 <a:ea typeface="Calibri"/>
                 <a:cs typeface="Calibri"/>
               </a:rPr>
-              <a:t>Tre rena sinusströmmar på 8,0 A har 120° mellan faserna. Bestäm neutralströmmens RMS-värde.</a:t>
+              <a:t>Tre rena sinusströmmar på 8,0 A ligger 120° isär. Bestäm strömmen i neutralledaren (effektivvärde).</a:t>
             </a:r>
           </a:p>
         </p:txBody>
@@ -12898,7 +13030,7 @@
                 <a:ea typeface="Calibri"/>
                 <a:cs typeface="Calibri"/>
               </a:rPr>
-              <a:t>Förutsättningar: En fas tar 5,0 A, övriga fasströmmar är noll. Neutralledaren är hel.</a:t>
+              <a:t>Förutsättningar: En fas tar 5,0 A, de andra två ingenting. Neutralledaren är hel.</a:t>
             </a:r>
           </a:p>
         </p:txBody>
@@ -13232,7 +13364,7 @@
                 <a:ea typeface="Calibri"/>
                 <a:cs typeface="Calibri"/>
               </a:rPr>
-              <a:t>En enda fas–neutral-last tar 5,0 A. De två andra fasströmmarna är noll. Bestäm neutralströmmen.</a:t>
+              <a:t>En last mellan en fas och neutral tar 5,0 A. De två andra faserna är obelastade. Bestäm strömmen i neutralledaren.</a:t>
             </a:r>
           </a:p>
         </p:txBody>
@@ -13532,7 +13664,117 @@
                 <a:ea typeface="Calibri"/>
                 <a:cs typeface="Calibri"/>
               </a:rPr>
-              <a:t>IN = √(I₁² + I₂² + 2I₁I₂ cos120°)</a:t>
+              <a:t>I</a:t>
+            </a:r>
+            <a:r>
+              <a:rPr sz="2400" b="1" baseline="-25000">
+                <a:solidFill>
+                  <a:srgbClr val="064F91"/>
+                </a:solidFill>
+                <a:latin typeface="Calibri"/>
+                <a:ea typeface="Calibri"/>
+                <a:cs typeface="Calibri"/>
+              </a:rPr>
+              <a:t>N</a:t>
+            </a:r>
+            <a:r>
+              <a:rPr sz="2400" b="1">
+                <a:solidFill>
+                  <a:srgbClr val="064F91"/>
+                </a:solidFill>
+                <a:latin typeface="Calibri"/>
+                <a:ea typeface="Calibri"/>
+                <a:cs typeface="Calibri"/>
+              </a:rPr>
+              <a:t> = √(I</a:t>
+            </a:r>
+            <a:r>
+              <a:rPr sz="2400" b="1" baseline="-25000">
+                <a:solidFill>
+                  <a:srgbClr val="064F91"/>
+                </a:solidFill>
+                <a:latin typeface="Calibri"/>
+                <a:ea typeface="Calibri"/>
+                <a:cs typeface="Calibri"/>
+              </a:rPr>
+              <a:t>1</a:t>
+            </a:r>
+            <a:r>
+              <a:rPr sz="2400" b="1">
+                <a:solidFill>
+                  <a:srgbClr val="064F91"/>
+                </a:solidFill>
+                <a:latin typeface="Calibri"/>
+                <a:ea typeface="Calibri"/>
+                <a:cs typeface="Calibri"/>
+              </a:rPr>
+              <a:t>² + I</a:t>
+            </a:r>
+            <a:r>
+              <a:rPr sz="2400" b="1" baseline="-25000">
+                <a:solidFill>
+                  <a:srgbClr val="064F91"/>
+                </a:solidFill>
+                <a:latin typeface="Calibri"/>
+                <a:ea typeface="Calibri"/>
+                <a:cs typeface="Calibri"/>
+              </a:rPr>
+              <a:t>2</a:t>
+            </a:r>
+            <a:r>
+              <a:rPr sz="2400" b="1">
+                <a:solidFill>
+                  <a:srgbClr val="064F91"/>
+                </a:solidFill>
+                <a:latin typeface="Calibri"/>
+                <a:ea typeface="Calibri"/>
+                <a:cs typeface="Calibri"/>
+              </a:rPr>
+              <a:t>² + 2 · I</a:t>
+            </a:r>
+            <a:r>
+              <a:rPr sz="2400" b="1" baseline="-25000">
+                <a:solidFill>
+                  <a:srgbClr val="064F91"/>
+                </a:solidFill>
+                <a:latin typeface="Calibri"/>
+                <a:ea typeface="Calibri"/>
+                <a:cs typeface="Calibri"/>
+              </a:rPr>
+              <a:t>1</a:t>
+            </a:r>
+            <a:r>
+              <a:rPr sz="2400" b="1">
+                <a:solidFill>
+                  <a:srgbClr val="064F91"/>
+                </a:solidFill>
+                <a:latin typeface="Calibri"/>
+                <a:ea typeface="Calibri"/>
+                <a:cs typeface="Calibri"/>
+              </a:rPr>
+              <a:t> · I</a:t>
+            </a:r>
+            <a:r>
+              <a:rPr sz="2400" b="1" baseline="-25000">
+                <a:solidFill>
+                  <a:srgbClr val="064F91"/>
+                </a:solidFill>
+                <a:latin typeface="Calibri"/>
+                <a:ea typeface="Calibri"/>
+                <a:cs typeface="Calibri"/>
+              </a:rPr>
+              <a:t>2</a:t>
+            </a:r>
+            <a:r>
+              <a:rPr sz="2400" b="1">
+                <a:solidFill>
+                  <a:srgbClr val="064F91"/>
+                </a:solidFill>
+                <a:latin typeface="Calibri"/>
+                <a:ea typeface="Calibri"/>
+                <a:cs typeface="Calibri"/>
+              </a:rPr>
+              <a:t> cos120°)</a:t>
             </a:r>
           </a:p>
         </p:txBody>
@@ -13589,7 +13831,7 @@
                 <a:ea typeface="Calibri"/>
                 <a:cs typeface="Calibri"/>
               </a:rPr>
-              <a:t>Formeln ger beloppet av summan av två visare. cos120° = −0,5. I anges i A RMS.</a:t>
+              <a:t>Formeln ger storleken på summan av två visare. cos120° = −0,5 – glöm inte minustecknet.</a:t>
             </a:r>
           </a:p>
         </p:txBody>
@@ -13646,7 +13888,73 @@
                 <a:ea typeface="Calibri"/>
                 <a:cs typeface="Calibri"/>
               </a:rPr>
-              <a:t>Förutsättningar: I₁ = I₂ = 10 A, 120° mellan strömmarna och I₃ = 0. Neutralledaren är hel.</a:t>
+              <a:t>Förutsättningar: I</a:t>
+            </a:r>
+            <a:r>
+              <a:rPr sz="2025" b="0" baseline="-25000">
+                <a:solidFill>
+                  <a:srgbClr val="111111"/>
+                </a:solidFill>
+                <a:latin typeface="Calibri"/>
+                <a:ea typeface="Calibri"/>
+                <a:cs typeface="Calibri"/>
+              </a:rPr>
+              <a:t>1</a:t>
+            </a:r>
+            <a:r>
+              <a:rPr sz="2025" b="0">
+                <a:solidFill>
+                  <a:srgbClr val="111111"/>
+                </a:solidFill>
+                <a:latin typeface="Calibri"/>
+                <a:ea typeface="Calibri"/>
+                <a:cs typeface="Calibri"/>
+              </a:rPr>
+              <a:t> = I</a:t>
+            </a:r>
+            <a:r>
+              <a:rPr sz="2025" b="0" baseline="-25000">
+                <a:solidFill>
+                  <a:srgbClr val="111111"/>
+                </a:solidFill>
+                <a:latin typeface="Calibri"/>
+                <a:ea typeface="Calibri"/>
+                <a:cs typeface="Calibri"/>
+              </a:rPr>
+              <a:t>2</a:t>
+            </a:r>
+            <a:r>
+              <a:rPr sz="2025" b="0">
+                <a:solidFill>
+                  <a:srgbClr val="111111"/>
+                </a:solidFill>
+                <a:latin typeface="Calibri"/>
+                <a:ea typeface="Calibri"/>
+                <a:cs typeface="Calibri"/>
+              </a:rPr>
+              <a:t> = 10 A, 120° isär, och I</a:t>
+            </a:r>
+            <a:r>
+              <a:rPr sz="2025" b="0" baseline="-25000">
+                <a:solidFill>
+                  <a:srgbClr val="111111"/>
+                </a:solidFill>
+                <a:latin typeface="Calibri"/>
+                <a:ea typeface="Calibri"/>
+                <a:cs typeface="Calibri"/>
+              </a:rPr>
+              <a:t>3</a:t>
+            </a:r>
+            <a:r>
+              <a:rPr sz="2025" b="0">
+                <a:solidFill>
+                  <a:srgbClr val="111111"/>
+                </a:solidFill>
+                <a:latin typeface="Calibri"/>
+                <a:ea typeface="Calibri"/>
+                <a:cs typeface="Calibri"/>
+              </a:rPr>
+              <a:t> = 0. Neutralledaren är hel.</a:t>
             </a:r>
           </a:p>
         </p:txBody>
@@ -13703,7 +14011,7 @@
                 <a:ea typeface="Calibri"/>
                 <a:cs typeface="Calibri"/>
               </a:rPr>
-              <a:t>Arbetsgång: Sätt in cos120° med minustecknet. Räkna uttrycket under roten och ta sedan kvadratroten.</a:t>
+              <a:t>Arbetsgång: Räkna ut uttrycket under roten och dra sedan roten ur.</a:t>
             </a:r>
           </a:p>
         </p:txBody>
@@ -14494,7 +14802,7 @@
                 <a:ea typeface="Calibri"/>
                 <a:cs typeface="Calibri"/>
               </a:rPr>
-              <a:t>Två fasströmmar är 10 A med 120° emellan. Den tredje är noll. Bestäm neutralströmmens belopp.</a:t>
+              <a:t>Två fasströmmar på 10 A ligger 120° isär. Den tredje fasen är obelastad. Bestäm strömmen i neutralledaren.</a:t>
             </a:r>
           </a:p>
         </p:txBody>
@@ -14874,7 +15182,7 @@
                 <a:ea typeface="Calibri"/>
                 <a:cs typeface="Calibri"/>
               </a:rPr>
-              <a:t>max betyder den största avvikelsens belopp. Ui är ett av de tre mätvärdena.</a:t>
+              <a:t>max betyder den största avvikelsen, oavsett tecken. Ui är ett av de tre mätvärdena.</a:t>
             </a:r>
           </a:p>
         </p:txBody>
@@ -14931,7 +15239,7 @@
                 <a:ea typeface="Calibri"/>
                 <a:cs typeface="Calibri"/>
               </a:rPr>
-              <a:t>Förutsättningar: Mätvärden 400, 402 och 398 V. Uppgiften använder ett enkelt spridningsmått.</a:t>
+              <a:t>Förutsättningar: Mätvärdena 400, 402 och 398 V. Uppgiften använder ett enkelt mått på spridning.</a:t>
             </a:r>
           </a:p>
         </p:txBody>
@@ -14988,7 +15296,7 @@
                 <a:ea typeface="Calibri"/>
                 <a:cs typeface="Calibri"/>
               </a:rPr>
-              <a:t>Arbetsgång: Beräkna medlet och jämför varje värde med medlet. Välj största skillnaden för procenttalet.</a:t>
+              <a:t>Arbetsgång: Räkna ut medelvärdet, jämför varje mätvärde med det och använd den största skillnaden.</a:t>
             </a:r>
           </a:p>
         </p:txBody>
@@ -15265,7 +15573,73 @@
                 <a:ea typeface="Calibri"/>
                 <a:cs typeface="Calibri"/>
               </a:rPr>
-              <a:t>U₁₂ = 400 V, U₂₃ = 402 V och U₃₁ = 398 V. Beräkna medelvärdet och största avvikelsen i procent av medlet.</a:t>
+              <a:t>U</a:t>
+            </a:r>
+            <a:r>
+              <a:rPr sz="2400" b="0" baseline="-25000">
+                <a:solidFill>
+                  <a:srgbClr val="111111"/>
+                </a:solidFill>
+                <a:latin typeface="Calibri"/>
+                <a:ea typeface="Calibri"/>
+                <a:cs typeface="Calibri"/>
+              </a:rPr>
+              <a:t>12</a:t>
+            </a:r>
+            <a:r>
+              <a:rPr sz="2400" b="0">
+                <a:solidFill>
+                  <a:srgbClr val="111111"/>
+                </a:solidFill>
+                <a:latin typeface="Calibri"/>
+                <a:ea typeface="Calibri"/>
+                <a:cs typeface="Calibri"/>
+              </a:rPr>
+              <a:t> = 400 V, U</a:t>
+            </a:r>
+            <a:r>
+              <a:rPr sz="2400" b="0" baseline="-25000">
+                <a:solidFill>
+                  <a:srgbClr val="111111"/>
+                </a:solidFill>
+                <a:latin typeface="Calibri"/>
+                <a:ea typeface="Calibri"/>
+                <a:cs typeface="Calibri"/>
+              </a:rPr>
+              <a:t>23</a:t>
+            </a:r>
+            <a:r>
+              <a:rPr sz="2400" b="0">
+                <a:solidFill>
+                  <a:srgbClr val="111111"/>
+                </a:solidFill>
+                <a:latin typeface="Calibri"/>
+                <a:ea typeface="Calibri"/>
+                <a:cs typeface="Calibri"/>
+              </a:rPr>
+              <a:t> = 402 V och U</a:t>
+            </a:r>
+            <a:r>
+              <a:rPr sz="2400" b="0" baseline="-25000">
+                <a:solidFill>
+                  <a:srgbClr val="111111"/>
+                </a:solidFill>
+                <a:latin typeface="Calibri"/>
+                <a:ea typeface="Calibri"/>
+                <a:cs typeface="Calibri"/>
+              </a:rPr>
+              <a:t>31</a:t>
+            </a:r>
+            <a:r>
+              <a:rPr sz="2400" b="0">
+                <a:solidFill>
+                  <a:srgbClr val="111111"/>
+                </a:solidFill>
+                <a:latin typeface="Calibri"/>
+                <a:ea typeface="Calibri"/>
+                <a:cs typeface="Calibri"/>
+              </a:rPr>
+              <a:t> = 398 V. Beräkna medelvärdet och den största avvikelsen i procent av medelvärdet.</a:t>
             </a:r>
           </a:p>
         </p:txBody>
@@ -15622,7 +15996,7 @@
                 <a:ea typeface="Calibri"/>
                 <a:cs typeface="Calibri"/>
               </a:rPr>
-              <a:t>När den gemensamma neutralen bryts kan två laster bilda en serieväg mellan faserna.</a:t>
+              <a:t>När neutralledaren går av hamnar de två lasterna i serie mellan två faser.</a:t>
             </a:r>
           </a:p>
         </p:txBody>
@@ -15679,7 +16053,7 @@
                 <a:ea typeface="Calibri"/>
                 <a:cs typeface="Calibri"/>
               </a:rPr>
-              <a:t>Förutsättningar: Två olika fas–neutral-laster. Båda fasledningarna är hela, men den gemensamma neutralledaren är bruten.</a:t>
+              <a:t>Förutsättningar: Två olika laster mellan fas och neutral. Fasledarna är hela, men den gemensamma neutralledaren är av.</a:t>
             </a:r>
           </a:p>
         </p:txBody>
@@ -15736,7 +16110,7 @@
                 <a:ea typeface="Calibri"/>
                 <a:cs typeface="Calibri"/>
               </a:rPr>
-              <a:t>Arbetsgång: Följ strömvägen mellan faserna. Förklara varför olika impedanser då kan få olika spänningsandelar.</a:t>
+              <a:t>Arbetsgång: Följ strömvägen och förklara varför laster med olika impedans då får olika stor del av spänningen.</a:t>
             </a:r>
           </a:p>
         </p:txBody>
@@ -16013,7 +16387,7 @@
                 <a:ea typeface="Calibri"/>
                 <a:cs typeface="Calibri"/>
               </a:rPr>
-              <a:t>Två olika fas–neutral-laster har gemensam neutralpunkt. Neutralledaren bryts. Varför kan spänningarna ändras trots oförändrad linjespänning?</a:t>
+              <a:t>Två olika laster, var och en mellan en fas och neutral, har en gemensam neutralledare. Neutralledaren går av. Varför kan spänningarna över lasterna ändras fast linjespänningen är densamma?</a:t>
             </a:r>
           </a:p>
         </p:txBody>

--- a/sjoskolan/vecka-41/aktuell/v41_01_Trefassystemets_grunder_elev.pptx
+++ b/sjoskolan/vecka-41/aktuell/v41_01_Trefassystemets_grunder_elev.pptx
@@ -7227,7 +7227,7 @@
                 <a:ea typeface="Calibri"/>
                 <a:cs typeface="Calibri"/>
               </a:rPr>
-              <a:t>fas</a:t>
+              <a:t>F</a:t>
             </a:r>
             <a:r>
               <a:rPr sz="2100" b="0">
@@ -7684,7 +7684,7 @@
                 <a:ea typeface="Calibri"/>
                 <a:cs typeface="Calibri"/>
               </a:rPr>
-              <a:t>fas</a:t>
+              <a:t>F</a:t>
             </a:r>
             <a:r>
               <a:rPr sz="2400" b="0">
@@ -8153,7 +8153,7 @@
                 <a:ea typeface="Calibri"/>
                 <a:cs typeface="Calibri"/>
               </a:rPr>
-              <a:t>fas</a:t>
+              <a:t>F</a:t>
             </a:r>
             <a:r>
               <a:rPr sz="2025" b="0">
@@ -8531,7 +8531,7 @@
                 <a:ea typeface="Calibri"/>
                 <a:cs typeface="Calibri"/>
               </a:rPr>
-              <a:t>fas</a:t>
+              <a:t>F</a:t>
             </a:r>
             <a:r>
               <a:rPr sz="2400" b="0">
@@ -11703,7 +11703,29 @@
                 <a:ea typeface="Calibri"/>
                 <a:cs typeface="Calibri"/>
               </a:rPr>
-              <a:t>IN = √(I₁² + I₂² + 2I₁I₂ cos120°)</a:t>
+              <a:t>I</a:t>
+            </a:r>
+            <a:r>
+              <a:rPr sz="2325" b="1" baseline="-25000">
+                <a:solidFill>
+                  <a:srgbClr val="064F91"/>
+                </a:solidFill>
+                <a:latin typeface="Calibri"/>
+                <a:ea typeface="Calibri"/>
+                <a:cs typeface="Calibri"/>
+              </a:rPr>
+              <a:t>N</a:t>
+            </a:r>
+            <a:r>
+              <a:rPr sz="2325" b="1">
+                <a:solidFill>
+                  <a:srgbClr val="064F91"/>
+                </a:solidFill>
+                <a:latin typeface="Calibri"/>
+                <a:ea typeface="Calibri"/>
+                <a:cs typeface="Calibri"/>
+              </a:rPr>
+              <a:t> = √(I₁² + I₂² + 2I₁I₂ cos120°)</a:t>
             </a:r>
           </a:p>
         </p:txBody>
@@ -11806,7 +11828,29 @@
                 <a:ea typeface="Calibri"/>
                 <a:cs typeface="Calibri"/>
               </a:rPr>
-              <a:t>3. IN = √36 = 6 A.</a:t>
+              <a:t>3. I</a:t>
+            </a:r>
+            <a:r>
+              <a:rPr sz="2063" b="0" baseline="-25000">
+                <a:solidFill>
+                  <a:srgbClr val="111111"/>
+                </a:solidFill>
+                <a:latin typeface="Calibri"/>
+                <a:ea typeface="Calibri"/>
+                <a:cs typeface="Calibri"/>
+              </a:rPr>
+              <a:t>N</a:t>
+            </a:r>
+            <a:r>
+              <a:rPr sz="2063" b="0">
+                <a:solidFill>
+                  <a:srgbClr val="111111"/>
+                </a:solidFill>
+                <a:latin typeface="Calibri"/>
+                <a:ea typeface="Calibri"/>
+                <a:cs typeface="Calibri"/>
+              </a:rPr>
+              <a:t> = √36 = 6 A.</a:t>
             </a:r>
           </a:p>
         </p:txBody>
@@ -12973,7 +13017,29 @@
                 <a:ea typeface="Calibri"/>
                 <a:cs typeface="Calibri"/>
               </a:rPr>
-              <a:t>Iɴ är neutralledarens ström. Den för tillbaka strömmen från fas–neutral-lasterna.</a:t>
+              <a:t>I</a:t>
+            </a:r>
+            <a:r>
+              <a:rPr sz="2100" b="0" baseline="-25000">
+                <a:solidFill>
+                  <a:srgbClr val="111111"/>
+                </a:solidFill>
+                <a:latin typeface="Calibri"/>
+                <a:ea typeface="Calibri"/>
+                <a:cs typeface="Calibri"/>
+              </a:rPr>
+              <a:t>N</a:t>
+            </a:r>
+            <a:r>
+              <a:rPr sz="2100" b="0">
+                <a:solidFill>
+                  <a:srgbClr val="111111"/>
+                </a:solidFill>
+                <a:latin typeface="Calibri"/>
+                <a:ea typeface="Calibri"/>
+                <a:cs typeface="Calibri"/>
+              </a:rPr>
+              <a:t> är neutralledarens ström. Den för tillbaka strömmen från fas–neutral-lasterna.</a:t>
             </a:r>
           </a:p>
         </p:txBody>
@@ -15102,7 +15168,95 @@
                 <a:ea typeface="Calibri"/>
                 <a:cs typeface="Calibri"/>
               </a:rPr>
-              <a:t>Umedel = (U₁₂ + U₂₃ + U₃₁)/3</a:t>
+              <a:t>U</a:t>
+            </a:r>
+            <a:r>
+              <a:rPr sz="2400" b="1" baseline="-25000">
+                <a:solidFill>
+                  <a:srgbClr val="064F91"/>
+                </a:solidFill>
+                <a:latin typeface="Calibri"/>
+                <a:ea typeface="Calibri"/>
+                <a:cs typeface="Calibri"/>
+              </a:rPr>
+              <a:t>medel</a:t>
+            </a:r>
+            <a:r>
+              <a:rPr sz="2400" b="1">
+                <a:solidFill>
+                  <a:srgbClr val="064F91"/>
+                </a:solidFill>
+                <a:latin typeface="Calibri"/>
+                <a:ea typeface="Calibri"/>
+                <a:cs typeface="Calibri"/>
+              </a:rPr>
+              <a:t> = (U</a:t>
+            </a:r>
+            <a:r>
+              <a:rPr sz="2400" b="1" baseline="-25000">
+                <a:solidFill>
+                  <a:srgbClr val="064F91"/>
+                </a:solidFill>
+                <a:latin typeface="Calibri"/>
+                <a:ea typeface="Calibri"/>
+                <a:cs typeface="Calibri"/>
+              </a:rPr>
+              <a:t>12</a:t>
+            </a:r>
+            <a:r>
+              <a:rPr sz="2400" b="1">
+                <a:solidFill>
+                  <a:srgbClr val="064F91"/>
+                </a:solidFill>
+                <a:latin typeface="Calibri"/>
+                <a:ea typeface="Calibri"/>
+                <a:cs typeface="Calibri"/>
+              </a:rPr>
+              <a:t> + U</a:t>
+            </a:r>
+            <a:r>
+              <a:rPr sz="2400" b="1" baseline="-25000">
+                <a:solidFill>
+                  <a:srgbClr val="064F91"/>
+                </a:solidFill>
+                <a:latin typeface="Calibri"/>
+                <a:ea typeface="Calibri"/>
+                <a:cs typeface="Calibri"/>
+              </a:rPr>
+              <a:t>23</a:t>
+            </a:r>
+            <a:r>
+              <a:rPr sz="2400" b="1">
+                <a:solidFill>
+                  <a:srgbClr val="064F91"/>
+                </a:solidFill>
+                <a:latin typeface="Calibri"/>
+                <a:ea typeface="Calibri"/>
+                <a:cs typeface="Calibri"/>
+              </a:rPr>
+              <a:t> + U</a:t>
+            </a:r>
+            <a:r>
+              <a:rPr sz="2400" b="1" baseline="-25000">
+                <a:solidFill>
+                  <a:srgbClr val="064F91"/>
+                </a:solidFill>
+                <a:latin typeface="Calibri"/>
+                <a:ea typeface="Calibri"/>
+                <a:cs typeface="Calibri"/>
+              </a:rPr>
+              <a:t>31</a:t>
+            </a:r>
+            <a:r>
+              <a:rPr sz="2400" b="1">
+                <a:solidFill>
+                  <a:srgbClr val="064F91"/>
+                </a:solidFill>
+                <a:latin typeface="Calibri"/>
+                <a:ea typeface="Calibri"/>
+                <a:cs typeface="Calibri"/>
+              </a:rPr>
+              <a:t>)/3</a:t>
             </a:r>
           </a:p>
           <a:p xmlns:a="http://schemas.openxmlformats.org/drawingml/2006/main">
@@ -15125,7 +15279,62 @@
                 <a:ea typeface="Calibri"/>
                 <a:cs typeface="Calibri"/>
               </a:rPr>
-              <a:t>Avvikelse i % = 100 · max|Ui − Umedel|/Umedel</a:t>
+              <a:t>Avvikelse i % = 100 · max|U</a:t>
+            </a:r>
+            <a:r>
+              <a:rPr sz="2400" b="1" baseline="-25000">
+                <a:solidFill>
+                  <a:srgbClr val="064F91"/>
+                </a:solidFill>
+                <a:latin typeface="Calibri"/>
+                <a:ea typeface="Calibri"/>
+                <a:cs typeface="Calibri"/>
+              </a:rPr>
+              <a:t>i</a:t>
+            </a:r>
+            <a:r>
+              <a:rPr sz="2400" b="1">
+                <a:solidFill>
+                  <a:srgbClr val="064F91"/>
+                </a:solidFill>
+                <a:latin typeface="Calibri"/>
+                <a:ea typeface="Calibri"/>
+                <a:cs typeface="Calibri"/>
+              </a:rPr>
+              <a:t> − U</a:t>
+            </a:r>
+            <a:r>
+              <a:rPr sz="2400" b="1" baseline="-25000">
+                <a:solidFill>
+                  <a:srgbClr val="064F91"/>
+                </a:solidFill>
+                <a:latin typeface="Calibri"/>
+                <a:ea typeface="Calibri"/>
+                <a:cs typeface="Calibri"/>
+              </a:rPr>
+              <a:t>medel</a:t>
+            </a:r>
+            <a:r>
+              <a:rPr sz="2400" b="1">
+                <a:solidFill>
+                  <a:srgbClr val="064F91"/>
+                </a:solidFill>
+                <a:latin typeface="Calibri"/>
+                <a:ea typeface="Calibri"/>
+                <a:cs typeface="Calibri"/>
+              </a:rPr>
+              <a:t>|/U</a:t>
+            </a:r>
+            <a:r>
+              <a:rPr sz="2400" b="1" baseline="-25000">
+                <a:solidFill>
+                  <a:srgbClr val="064F91"/>
+                </a:solidFill>
+                <a:latin typeface="Calibri"/>
+                <a:ea typeface="Calibri"/>
+                <a:cs typeface="Calibri"/>
+              </a:rPr>
+              <a:t>medel</a:t>
             </a:r>
           </a:p>
         </p:txBody>

--- a/sjoskolan/vecka-41/aktuell/v41_01_Trefassystemets_grunder_elev.pptx
+++ b/sjoskolan/vecka-41/aktuell/v41_01_Trefassystemets_grunder_elev.pptx
@@ -11805,7 +11805,29 @@
                 <a:ea typeface="Calibri"/>
                 <a:cs typeface="Calibri"/>
               </a:rPr>
-              <a:t>2. IN² = 6² + 6² + 2 · 6 · 6 · (−0,5) = 36.</a:t>
+              <a:t>2. I</a:t>
+            </a:r>
+            <a:r>
+              <a:rPr sz="2063" b="0" baseline="-25000">
+                <a:solidFill>
+                  <a:srgbClr val="111111"/>
+                </a:solidFill>
+                <a:latin typeface="Calibri"/>
+                <a:ea typeface="Calibri"/>
+                <a:cs typeface="Calibri"/>
+              </a:rPr>
+              <a:t>N</a:t>
+            </a:r>
+            <a:r>
+              <a:rPr sz="2063" b="0">
+                <a:solidFill>
+                  <a:srgbClr val="111111"/>
+                </a:solidFill>
+                <a:latin typeface="Calibri"/>
+                <a:ea typeface="Calibri"/>
+                <a:cs typeface="Calibri"/>
+              </a:rPr>
+              <a:t>² = 6² + 6² + 2 · 6 · 6 · (−0,5) = 36.</a:t>
             </a:r>
           </a:p>
           <a:p xmlns:a="http://schemas.openxmlformats.org/drawingml/2006/main">

--- a/sjoskolan/vecka-41/aktuell/v41_01_Trefassystemets_grunder_elev.pptx
+++ b/sjoskolan/vecka-41/aktuell/v41_01_Trefassystemets_grunder_elev.pptx
@@ -20028,7 +20028,7 @@
                 <a:ea typeface="Calibri"/>
                 <a:cs typeface="Calibri"/>
               </a:rPr>
-              <a:t>En symmetrisk trefaskälla ger U</a:t>
+              <a:t>En symmetrisk trefaskälla ombord ger U</a:t>
             </a:r>
             <a:r>
               <a:rPr sz="2175" b="0" baseline="-25000">
@@ -20050,7 +20050,7 @@
                 <a:ea typeface="Calibri"/>
                 <a:cs typeface="Calibri"/>
               </a:rPr>
-              <a:t> = 100 V vid f = 60 Hz. Sök U</a:t>
+              <a:t> = 254 V vid f = 60 Hz. Sök U</a:t>
             </a:r>
             <a:r>
               <a:rPr sz="2175" b="0" baseline="-25000">
@@ -20252,7 +20252,7 @@
                 <a:ea typeface="Calibri"/>
                 <a:cs typeface="Calibri"/>
               </a:rPr>
-              <a:t> = √3 · 100 ≈ 173,2 V.</a:t>
+              <a:t> = √3 · 254 ≈ 440 V, fartygets vanliga huvudspänning.</a:t>
             </a:r>
           </a:p>
           <a:p xmlns:a="http://schemas.openxmlformats.org/drawingml/2006/main">

--- a/sjoskolan/vecka-41/aktuell/v41_01_Trefassystemets_grunder_elev.pptx
+++ b/sjoskolan/vecka-41/aktuell/v41_01_Trefassystemets_grunder_elev.pptx
@@ -8164,7 +8164,7 @@
                 <a:ea typeface="Calibri"/>
                 <a:cs typeface="Calibri"/>
               </a:rPr>
-              <a:t> = 120 V mellan fas och neutral.</a:t>
+              <a:t> = 230 V mellan fas och neutral.</a:t>
             </a:r>
           </a:p>
         </p:txBody>
@@ -8232,7 +8232,7 @@
                 <a:ea typeface="Calibri"/>
                 <a:cs typeface="Calibri"/>
               </a:rPr>
-              <a:t>fas</a:t>
+              <a:t>F</a:t>
             </a:r>
             <a:r>
               <a:rPr sz="2025" b="0">
@@ -8542,7 +8542,7 @@
                 <a:ea typeface="Calibri"/>
                 <a:cs typeface="Calibri"/>
               </a:rPr>
-              <a:t> = 120 V. Beräkna linjespänningen i ett symmetriskt system.</a:t>
+              <a:t> = 230 V. Beräkna linjespänningen i ett symmetriskt system.</a:t>
             </a:r>
           </a:p>
         </p:txBody>

--- a/sjoskolan/vecka-41/aktuell/v41_01_Trefassystemets_grunder_elev.pptx
+++ b/sjoskolan/vecka-41/aktuell/v41_01_Trefassystemets_grunder_elev.pptx
@@ -5540,7 +5540,7 @@
                 <a:ea typeface="Calibri"/>
                 <a:cs typeface="Calibri"/>
               </a:rPr>
-              <a:t>Stöd till övning 1</a:t>
+              <a:t>Stöd till övning 1.1</a:t>
             </a:r>
           </a:p>
         </p:txBody>
@@ -5929,7 +5929,7 @@
                 <a:ea typeface="Calibri"/>
                 <a:cs typeface="Calibri"/>
               </a:rPr>
-              <a:t>Övning 1</a:t>
+              <a:t>Övning 1.1</a:t>
             </a:r>
           </a:p>
         </p:txBody>
@@ -6288,7 +6288,7 @@
                 <a:ea typeface="Calibri"/>
                 <a:cs typeface="Calibri"/>
               </a:rPr>
-              <a:t>Stöd till övning 2</a:t>
+              <a:t>Stöd till övning 1.2</a:t>
             </a:r>
           </a:p>
         </p:txBody>
@@ -6677,7 +6677,7 @@
                 <a:ea typeface="Calibri"/>
                 <a:cs typeface="Calibri"/>
               </a:rPr>
-              <a:t>Övning 2</a:t>
+              <a:t>Övning 1.2</a:t>
             </a:r>
           </a:p>
         </p:txBody>
@@ -7036,7 +7036,7 @@
                 <a:ea typeface="Calibri"/>
                 <a:cs typeface="Calibri"/>
               </a:rPr>
-              <a:t>Stöd till övning 3</a:t>
+              <a:t>Stöd till övning 1.3</a:t>
             </a:r>
           </a:p>
         </p:txBody>
@@ -7535,7 +7535,7 @@
                 <a:ea typeface="Calibri"/>
                 <a:cs typeface="Calibri"/>
               </a:rPr>
-              <a:t>Övning 3</a:t>
+              <a:t>Övning 1.3</a:t>
             </a:r>
           </a:p>
         </p:txBody>
@@ -7938,7 +7938,7 @@
                 <a:ea typeface="Calibri"/>
                 <a:cs typeface="Calibri"/>
               </a:rPr>
-              <a:t>Stöd till övning 4</a:t>
+              <a:t>Stöd till övning 1.4</a:t>
             </a:r>
           </a:p>
         </p:txBody>
@@ -8404,7 +8404,7 @@
                 <a:ea typeface="Calibri"/>
                 <a:cs typeface="Calibri"/>
               </a:rPr>
-              <a:t>Övning 4</a:t>
+              <a:t>Övning 1.4</a:t>
             </a:r>
           </a:p>
         </p:txBody>
@@ -8785,7 +8785,7 @@
                 <a:ea typeface="Calibri"/>
                 <a:cs typeface="Calibri"/>
               </a:rPr>
-              <a:t>Stöd till övning 5</a:t>
+              <a:t>Stöd till övning 1.5</a:t>
             </a:r>
           </a:p>
         </p:txBody>
@@ -9262,7 +9262,7 @@
                 <a:ea typeface="Calibri"/>
                 <a:cs typeface="Calibri"/>
               </a:rPr>
-              <a:t>Övning 5</a:t>
+              <a:t>Övning 1.5</a:t>
             </a:r>
           </a:p>
         </p:txBody>
@@ -12089,7 +12089,7 @@
                 <a:ea typeface="Calibri"/>
                 <a:cs typeface="Calibri"/>
               </a:rPr>
-              <a:t>Stöd till övning 6</a:t>
+              <a:t>Stöd till övning 1.6</a:t>
             </a:r>
           </a:p>
         </p:txBody>
@@ -12566,7 +12566,7 @@
                 <a:ea typeface="Calibri"/>
                 <a:cs typeface="Calibri"/>
               </a:rPr>
-              <a:t>Övning 6</a:t>
+              <a:t>Övning 1.6</a:t>
             </a:r>
           </a:p>
         </p:txBody>
@@ -12925,7 +12925,7 @@
                 <a:ea typeface="Calibri"/>
                 <a:cs typeface="Calibri"/>
               </a:rPr>
-              <a:t>Stöd till övning 7</a:t>
+              <a:t>Stöd till övning 1.7</a:t>
             </a:r>
           </a:p>
         </p:txBody>
@@ -13336,7 +13336,7 @@
                 <a:ea typeface="Calibri"/>
                 <a:cs typeface="Calibri"/>
               </a:rPr>
-              <a:t>Övning 7</a:t>
+              <a:t>Övning 1.7</a:t>
             </a:r>
           </a:p>
         </p:txBody>
@@ -13695,7 +13695,7 @@
                 <a:ea typeface="Calibri"/>
                 <a:cs typeface="Calibri"/>
               </a:rPr>
-              <a:t>Stöd till övning 8</a:t>
+              <a:t>Stöd till övning 1.8</a:t>
             </a:r>
           </a:p>
         </p:txBody>
@@ -14774,7 +14774,7 @@
                 <a:ea typeface="Calibri"/>
                 <a:cs typeface="Calibri"/>
               </a:rPr>
-              <a:t>Övning 8</a:t>
+              <a:t>Övning 1.8</a:t>
             </a:r>
           </a:p>
         </p:txBody>
@@ -15133,7 +15133,7 @@
                 <a:ea typeface="Calibri"/>
                 <a:cs typeface="Calibri"/>
               </a:rPr>
-              <a:t>Stöd till övning 9</a:t>
+              <a:t>Stöd till övning 1.9</a:t>
             </a:r>
           </a:p>
         </p:txBody>
@@ -15688,7 +15688,7 @@
                 <a:ea typeface="Calibri"/>
                 <a:cs typeface="Calibri"/>
               </a:rPr>
-              <a:t>Övning 9</a:t>
+              <a:t>Övning 1.9</a:t>
             </a:r>
           </a:p>
         </p:txBody>
@@ -16113,7 +16113,7 @@
                 <a:ea typeface="Calibri"/>
                 <a:cs typeface="Calibri"/>
               </a:rPr>
-              <a:t>Stöd till övning 10</a:t>
+              <a:t>Stöd till övning 1.10</a:t>
             </a:r>
           </a:p>
         </p:txBody>
@@ -16502,7 +16502,7 @@
                 <a:ea typeface="Calibri"/>
                 <a:cs typeface="Calibri"/>
               </a:rPr>
-              <a:t>Övning 10</a:t>
+              <a:t>Övning 1.10</a:t>
             </a:r>
           </a:p>
         </p:txBody>

--- a/sjoskolan/vecka-41/aktuell/v41_01_Trefassystemets_grunder_elev.pptx
+++ b/sjoskolan/vecka-41/aktuell/v41_01_Trefassystemets_grunder_elev.pptx
@@ -3400,1757 +3400,6 @@
 </a:theme>
 </file>
 
-<file path=ppt/slides/charts/chart1.xml><?xml version="1.0" encoding="utf-8"?>
-<c:chartSpace xmlns:c="http://schemas.openxmlformats.org/drawingml/2006/chart" xmlns:r="http://schemas.openxmlformats.org/officeDocument/2006/relationships">
-  <c:lang val="en-US"/>
-  <c:chart>
-    <c:plotArea>
-      <c:scatterChart>
-        <c:scatterStyle val="line"/>
-        <c:ser>
-          <c:idx val="0"/>
-          <c:order val="0"/>
-          <c:tx>
-            <c:v>L1</c:v>
-          </c:tx>
-          <c:spPr>
-            <a:ln xmlns:a="http://schemas.openxmlformats.org/drawingml/2006/main" w="23813">
-              <a:solidFill>
-                <a:srgbClr val="064F91"/>
-              </a:solidFill>
-            </a:ln>
-          </c:spPr>
-          <c:marker>
-            <c:symbol val="none"/>
-          </c:marker>
-          <c:xVal>
-            <c:numRef>
-              <c:f>'Chart Data'!$A$2:$A$82</c:f>
-              <c:numCache>
-                <c:formatCode>General</c:formatCode>
-                <c:ptCount val="81"/>
-                <c:pt idx="0">
-                  <c:v>0</c:v>
-                </c:pt>
-                <c:pt idx="1">
-                  <c:v>0.25</c:v>
-                </c:pt>
-                <c:pt idx="2">
-                  <c:v>0.5</c:v>
-                </c:pt>
-                <c:pt idx="3">
-                  <c:v>0.75</c:v>
-                </c:pt>
-                <c:pt idx="4">
-                  <c:v>1</c:v>
-                </c:pt>
-                <c:pt idx="5">
-                  <c:v>1.25</c:v>
-                </c:pt>
-                <c:pt idx="6">
-                  <c:v>1.5</c:v>
-                </c:pt>
-                <c:pt idx="7">
-                  <c:v>1.75</c:v>
-                </c:pt>
-                <c:pt idx="8">
-                  <c:v>2</c:v>
-                </c:pt>
-                <c:pt idx="9">
-                  <c:v>2.25</c:v>
-                </c:pt>
-                <c:pt idx="10">
-                  <c:v>2.5</c:v>
-                </c:pt>
-                <c:pt idx="11">
-                  <c:v>2.75</c:v>
-                </c:pt>
-                <c:pt idx="12">
-                  <c:v>3</c:v>
-                </c:pt>
-                <c:pt idx="13">
-                  <c:v>3.25</c:v>
-                </c:pt>
-                <c:pt idx="14">
-                  <c:v>3.5</c:v>
-                </c:pt>
-                <c:pt idx="15">
-                  <c:v>3.75</c:v>
-                </c:pt>
-                <c:pt idx="16">
-                  <c:v>4</c:v>
-                </c:pt>
-                <c:pt idx="17">
-                  <c:v>4.25</c:v>
-                </c:pt>
-                <c:pt idx="18">
-                  <c:v>4.5</c:v>
-                </c:pt>
-                <c:pt idx="19">
-                  <c:v>4.75</c:v>
-                </c:pt>
-                <c:pt idx="20">
-                  <c:v>5</c:v>
-                </c:pt>
-                <c:pt idx="21">
-                  <c:v>5.25</c:v>
-                </c:pt>
-                <c:pt idx="22">
-                  <c:v>5.5</c:v>
-                </c:pt>
-                <c:pt idx="23">
-                  <c:v>5.75</c:v>
-                </c:pt>
-                <c:pt idx="24">
-                  <c:v>6</c:v>
-                </c:pt>
-                <c:pt idx="25">
-                  <c:v>6.25</c:v>
-                </c:pt>
-                <c:pt idx="26">
-                  <c:v>6.5</c:v>
-                </c:pt>
-                <c:pt idx="27">
-                  <c:v>6.75</c:v>
-                </c:pt>
-                <c:pt idx="28">
-                  <c:v>7</c:v>
-                </c:pt>
-                <c:pt idx="29">
-                  <c:v>7.25</c:v>
-                </c:pt>
-                <c:pt idx="30">
-                  <c:v>7.5</c:v>
-                </c:pt>
-                <c:pt idx="31">
-                  <c:v>7.75</c:v>
-                </c:pt>
-                <c:pt idx="32">
-                  <c:v>8</c:v>
-                </c:pt>
-                <c:pt idx="33">
-                  <c:v>8.25</c:v>
-                </c:pt>
-                <c:pt idx="34">
-                  <c:v>8.5</c:v>
-                </c:pt>
-                <c:pt idx="35">
-                  <c:v>8.75</c:v>
-                </c:pt>
-                <c:pt idx="36">
-                  <c:v>9</c:v>
-                </c:pt>
-                <c:pt idx="37">
-                  <c:v>9.25</c:v>
-                </c:pt>
-                <c:pt idx="38">
-                  <c:v>9.5</c:v>
-                </c:pt>
-                <c:pt idx="39">
-                  <c:v>9.75</c:v>
-                </c:pt>
-                <c:pt idx="40">
-                  <c:v>10</c:v>
-                </c:pt>
-                <c:pt idx="41">
-                  <c:v>10.25</c:v>
-                </c:pt>
-                <c:pt idx="42">
-                  <c:v>10.5</c:v>
-                </c:pt>
-                <c:pt idx="43">
-                  <c:v>10.75</c:v>
-                </c:pt>
-                <c:pt idx="44">
-                  <c:v>11</c:v>
-                </c:pt>
-                <c:pt idx="45">
-                  <c:v>11.25</c:v>
-                </c:pt>
-                <c:pt idx="46">
-                  <c:v>11.5</c:v>
-                </c:pt>
-                <c:pt idx="47">
-                  <c:v>11.75</c:v>
-                </c:pt>
-                <c:pt idx="48">
-                  <c:v>12</c:v>
-                </c:pt>
-                <c:pt idx="49">
-                  <c:v>12.25</c:v>
-                </c:pt>
-                <c:pt idx="50">
-                  <c:v>12.5</c:v>
-                </c:pt>
-                <c:pt idx="51">
-                  <c:v>12.75</c:v>
-                </c:pt>
-                <c:pt idx="52">
-                  <c:v>13</c:v>
-                </c:pt>
-                <c:pt idx="53">
-                  <c:v>13.25</c:v>
-                </c:pt>
-                <c:pt idx="54">
-                  <c:v>13.5</c:v>
-                </c:pt>
-                <c:pt idx="55">
-                  <c:v>13.75</c:v>
-                </c:pt>
-                <c:pt idx="56">
-                  <c:v>14</c:v>
-                </c:pt>
-                <c:pt idx="57">
-                  <c:v>14.25</c:v>
-                </c:pt>
-                <c:pt idx="58">
-                  <c:v>14.5</c:v>
-                </c:pt>
-                <c:pt idx="59">
-                  <c:v>14.75</c:v>
-                </c:pt>
-                <c:pt idx="60">
-                  <c:v>15</c:v>
-                </c:pt>
-                <c:pt idx="61">
-                  <c:v>15.25</c:v>
-                </c:pt>
-                <c:pt idx="62">
-                  <c:v>15.5</c:v>
-                </c:pt>
-                <c:pt idx="63">
-                  <c:v>15.75</c:v>
-                </c:pt>
-                <c:pt idx="64">
-                  <c:v>16</c:v>
-                </c:pt>
-                <c:pt idx="65">
-                  <c:v>16.25</c:v>
-                </c:pt>
-                <c:pt idx="66">
-                  <c:v>16.5</c:v>
-                </c:pt>
-                <c:pt idx="67">
-                  <c:v>16.75</c:v>
-                </c:pt>
-                <c:pt idx="68">
-                  <c:v>17</c:v>
-                </c:pt>
-                <c:pt idx="69">
-                  <c:v>17.25</c:v>
-                </c:pt>
-                <c:pt idx="70">
-                  <c:v>17.5</c:v>
-                </c:pt>
-                <c:pt idx="71">
-                  <c:v>17.75</c:v>
-                </c:pt>
-                <c:pt idx="72">
-                  <c:v>18</c:v>
-                </c:pt>
-                <c:pt idx="73">
-                  <c:v>18.25</c:v>
-                </c:pt>
-                <c:pt idx="74">
-                  <c:v>18.5</c:v>
-                </c:pt>
-                <c:pt idx="75">
-                  <c:v>18.75</c:v>
-                </c:pt>
-                <c:pt idx="76">
-                  <c:v>19</c:v>
-                </c:pt>
-                <c:pt idx="77">
-                  <c:v>19.25</c:v>
-                </c:pt>
-                <c:pt idx="78">
-                  <c:v>19.5</c:v>
-                </c:pt>
-                <c:pt idx="79">
-                  <c:v>19.75</c:v>
-                </c:pt>
-                <c:pt idx="80">
-                  <c:v>20</c:v>
-                </c:pt>
-              </c:numCache>
-            </c:numRef>
-          </c:xVal>
-          <c:yVal>
-            <c:numRef>
-              <c:f>'Chart Data'!$B$2:$B$82</c:f>
-              <c:numCache>
-                <c:formatCode>0</c:formatCode>
-                <c:ptCount val="81"/>
-                <c:pt idx="0">
-                  <c:v>0</c:v>
-                </c:pt>
-                <c:pt idx="1">
-                  <c:v>0.0784590957278449</c:v>
-                </c:pt>
-                <c:pt idx="2">
-                  <c:v>0.156434465040231</c:v>
-                </c:pt>
-                <c:pt idx="3">
-                  <c:v>0.233445363855905</c:v>
-                </c:pt>
-                <c:pt idx="4">
-                  <c:v>0.309016994374947</c:v>
-                </c:pt>
-                <c:pt idx="5">
-                  <c:v>0.38268343236509</c:v>
-                </c:pt>
-                <c:pt idx="6">
-                  <c:v>0.453990499739547</c:v>
-                </c:pt>
-                <c:pt idx="7">
-                  <c:v>0.522498564715949</c:v>
-                </c:pt>
-                <c:pt idx="8">
-                  <c:v>0.587785252292473</c:v>
-                </c:pt>
-                <c:pt idx="9">
-                  <c:v>0.649448048330184</c:v>
-                </c:pt>
-                <c:pt idx="10">
-                  <c:v>0.707106781186547</c:v>
-                </c:pt>
-                <c:pt idx="11">
-                  <c:v>0.760405965600031</c:v>
-                </c:pt>
-                <c:pt idx="12">
-                  <c:v>0.809016994374947</c:v>
-                </c:pt>
-                <c:pt idx="13">
-                  <c:v>0.852640164354092</c:v>
-                </c:pt>
-                <c:pt idx="14">
-                  <c:v>0.891006524188368</c:v>
-                </c:pt>
-                <c:pt idx="15">
-                  <c:v>0.923879532511287</c:v>
-                </c:pt>
-                <c:pt idx="16">
-                  <c:v>0.951056516295154</c:v>
-                </c:pt>
-                <c:pt idx="17">
-                  <c:v>0.972369920397677</c:v>
-                </c:pt>
-                <c:pt idx="18">
-                  <c:v>0.987688340595138</c:v>
-                </c:pt>
-                <c:pt idx="19">
-                  <c:v>0.996917333733128</c:v>
-                </c:pt>
-                <c:pt idx="20">
-                  <c:v>1</c:v>
-                </c:pt>
-                <c:pt idx="21">
-                  <c:v>0.996917333733128</c:v>
-                </c:pt>
-                <c:pt idx="22">
-                  <c:v>0.987688340595138</c:v>
-                </c:pt>
-                <c:pt idx="23">
-                  <c:v>0.972369920397677</c:v>
-                </c:pt>
-                <c:pt idx="24">
-                  <c:v>0.951056516295154</c:v>
-                </c:pt>
-                <c:pt idx="25">
-                  <c:v>0.923879532511287</c:v>
-                </c:pt>
-                <c:pt idx="26">
-                  <c:v>0.891006524188368</c:v>
-                </c:pt>
-                <c:pt idx="27">
-                  <c:v>0.852640164354092</c:v>
-                </c:pt>
-                <c:pt idx="28">
-                  <c:v>0.809016994374947</c:v>
-                </c:pt>
-                <c:pt idx="29">
-                  <c:v>0.760405965600031</c:v>
-                </c:pt>
-                <c:pt idx="30">
-                  <c:v>0.707106781186548</c:v>
-                </c:pt>
-                <c:pt idx="31">
-                  <c:v>0.649448048330184</c:v>
-                </c:pt>
-                <c:pt idx="32">
-                  <c:v>0.587785252292473</c:v>
-                </c:pt>
-                <c:pt idx="33">
-                  <c:v>0.522498564715949</c:v>
-                </c:pt>
-                <c:pt idx="34">
-                  <c:v>0.453990499739547</c:v>
-                </c:pt>
-                <c:pt idx="35">
-                  <c:v>0.38268343236509</c:v>
-                </c:pt>
-                <c:pt idx="36">
-                  <c:v>0.309016994374948</c:v>
-                </c:pt>
-                <c:pt idx="37">
-                  <c:v>0.233445363855906</c:v>
-                </c:pt>
-                <c:pt idx="38">
-                  <c:v>0.156434465040231</c:v>
-                </c:pt>
-                <c:pt idx="39">
-                  <c:v>0.0784590957278451</c:v>
-                </c:pt>
-                <c:pt idx="40">
-                  <c:v>1.22464679914735e-16</c:v>
-                </c:pt>
-                <c:pt idx="41">
-                  <c:v>-0.0784590957278444</c:v>
-                </c:pt>
-                <c:pt idx="42">
-                  <c:v>-0.156434465040231</c:v>
-                </c:pt>
-                <c:pt idx="43">
-                  <c:v>-0.233445363855905</c:v>
-                </c:pt>
-                <c:pt idx="44">
-                  <c:v>-0.309016994374947</c:v>
-                </c:pt>
-                <c:pt idx="45">
-                  <c:v>-0.38268343236509</c:v>
-                </c:pt>
-                <c:pt idx="46">
-                  <c:v>-0.453990499739547</c:v>
-                </c:pt>
-                <c:pt idx="47">
-                  <c:v>-0.522498564715949</c:v>
-                </c:pt>
-                <c:pt idx="48">
-                  <c:v>-0.587785252292473</c:v>
-                </c:pt>
-                <c:pt idx="49">
-                  <c:v>-0.649448048330183</c:v>
-                </c:pt>
-                <c:pt idx="50">
-                  <c:v>-0.707106781186547</c:v>
-                </c:pt>
-                <c:pt idx="51">
-                  <c:v>-0.760405965600031</c:v>
-                </c:pt>
-                <c:pt idx="52">
-                  <c:v>-0.809016994374947</c:v>
-                </c:pt>
-                <c:pt idx="53">
-                  <c:v>-0.852640164354092</c:v>
-                </c:pt>
-                <c:pt idx="54">
-                  <c:v>-0.891006524188368</c:v>
-                </c:pt>
-                <c:pt idx="55">
-                  <c:v>-0.923879532511287</c:v>
-                </c:pt>
-                <c:pt idx="56">
-                  <c:v>-0.951056516295154</c:v>
-                </c:pt>
-                <c:pt idx="57">
-                  <c:v>-0.972369920397676</c:v>
-                </c:pt>
-                <c:pt idx="58">
-                  <c:v>-0.987688340595138</c:v>
-                </c:pt>
-                <c:pt idx="59">
-                  <c:v>-0.996917333733128</c:v>
-                </c:pt>
-                <c:pt idx="60">
-                  <c:v>-1</c:v>
-                </c:pt>
-                <c:pt idx="61">
-                  <c:v>-0.996917333733128</c:v>
-                </c:pt>
-                <c:pt idx="62">
-                  <c:v>-0.987688340595138</c:v>
-                </c:pt>
-                <c:pt idx="63">
-                  <c:v>-0.972369920397677</c:v>
-                </c:pt>
-                <c:pt idx="64">
-                  <c:v>-0.951056516295154</c:v>
-                </c:pt>
-                <c:pt idx="65">
-                  <c:v>-0.923879532511287</c:v>
-                </c:pt>
-                <c:pt idx="66">
-                  <c:v>-0.891006524188368</c:v>
-                </c:pt>
-                <c:pt idx="67">
-                  <c:v>-0.852640164354093</c:v>
-                </c:pt>
-                <c:pt idx="68">
-                  <c:v>-0.809016994374948</c:v>
-                </c:pt>
-                <c:pt idx="69">
-                  <c:v>-0.760405965600031</c:v>
-                </c:pt>
-                <c:pt idx="70">
-                  <c:v>-0.707106781186548</c:v>
-                </c:pt>
-                <c:pt idx="71">
-                  <c:v>-0.649448048330183</c:v>
-                </c:pt>
-                <c:pt idx="72">
-                  <c:v>-0.587785252292473</c:v>
-                </c:pt>
-                <c:pt idx="73">
-                  <c:v>-0.522498564715949</c:v>
-                </c:pt>
-                <c:pt idx="74">
-                  <c:v>-0.453990499739547</c:v>
-                </c:pt>
-                <c:pt idx="75">
-                  <c:v>-0.38268343236509</c:v>
-                </c:pt>
-                <c:pt idx="76">
-                  <c:v>-0.309016994374948</c:v>
-                </c:pt>
-                <c:pt idx="77">
-                  <c:v>-0.233445363855905</c:v>
-                </c:pt>
-                <c:pt idx="78">
-                  <c:v>-0.156434465040231</c:v>
-                </c:pt>
-                <c:pt idx="79">
-                  <c:v>-0.0784590957278447</c:v>
-                </c:pt>
-                <c:pt idx="80">
-                  <c:v>-2.44929359829471e-16</c:v>
-                </c:pt>
-              </c:numCache>
-            </c:numRef>
-          </c:yVal>
-        </c:ser>
-        <c:ser>
-          <c:idx val="1"/>
-          <c:order val="1"/>
-          <c:tx>
-            <c:v>L2</c:v>
-          </c:tx>
-          <c:spPr>
-            <a:ln xmlns:a="http://schemas.openxmlformats.org/drawingml/2006/main" w="23813">
-              <a:solidFill>
-                <a:srgbClr val="B44C21"/>
-              </a:solidFill>
-            </a:ln>
-          </c:spPr>
-          <c:marker>
-            <c:symbol val="none"/>
-          </c:marker>
-          <c:xVal>
-            <c:numRef>
-              <c:f>'Chart Data'!$C$2:$C$82</c:f>
-              <c:numCache>
-                <c:formatCode>General</c:formatCode>
-                <c:ptCount val="81"/>
-                <c:pt idx="0">
-                  <c:v>0</c:v>
-                </c:pt>
-                <c:pt idx="1">
-                  <c:v>0.25</c:v>
-                </c:pt>
-                <c:pt idx="2">
-                  <c:v>0.5</c:v>
-                </c:pt>
-                <c:pt idx="3">
-                  <c:v>0.75</c:v>
-                </c:pt>
-                <c:pt idx="4">
-                  <c:v>1</c:v>
-                </c:pt>
-                <c:pt idx="5">
-                  <c:v>1.25</c:v>
-                </c:pt>
-                <c:pt idx="6">
-                  <c:v>1.5</c:v>
-                </c:pt>
-                <c:pt idx="7">
-                  <c:v>1.75</c:v>
-                </c:pt>
-                <c:pt idx="8">
-                  <c:v>2</c:v>
-                </c:pt>
-                <c:pt idx="9">
-                  <c:v>2.25</c:v>
-                </c:pt>
-                <c:pt idx="10">
-                  <c:v>2.5</c:v>
-                </c:pt>
-                <c:pt idx="11">
-                  <c:v>2.75</c:v>
-                </c:pt>
-                <c:pt idx="12">
-                  <c:v>3</c:v>
-                </c:pt>
-                <c:pt idx="13">
-                  <c:v>3.25</c:v>
-                </c:pt>
-                <c:pt idx="14">
-                  <c:v>3.5</c:v>
-                </c:pt>
-                <c:pt idx="15">
-                  <c:v>3.75</c:v>
-                </c:pt>
-                <c:pt idx="16">
-                  <c:v>4</c:v>
-                </c:pt>
-                <c:pt idx="17">
-                  <c:v>4.25</c:v>
-                </c:pt>
-                <c:pt idx="18">
-                  <c:v>4.5</c:v>
-                </c:pt>
-                <c:pt idx="19">
-                  <c:v>4.75</c:v>
-                </c:pt>
-                <c:pt idx="20">
-                  <c:v>5</c:v>
-                </c:pt>
-                <c:pt idx="21">
-                  <c:v>5.25</c:v>
-                </c:pt>
-                <c:pt idx="22">
-                  <c:v>5.5</c:v>
-                </c:pt>
-                <c:pt idx="23">
-                  <c:v>5.75</c:v>
-                </c:pt>
-                <c:pt idx="24">
-                  <c:v>6</c:v>
-                </c:pt>
-                <c:pt idx="25">
-                  <c:v>6.25</c:v>
-                </c:pt>
-                <c:pt idx="26">
-                  <c:v>6.5</c:v>
-                </c:pt>
-                <c:pt idx="27">
-                  <c:v>6.75</c:v>
-                </c:pt>
-                <c:pt idx="28">
-                  <c:v>7</c:v>
-                </c:pt>
-                <c:pt idx="29">
-                  <c:v>7.25</c:v>
-                </c:pt>
-                <c:pt idx="30">
-                  <c:v>7.5</c:v>
-                </c:pt>
-                <c:pt idx="31">
-                  <c:v>7.75</c:v>
-                </c:pt>
-                <c:pt idx="32">
-                  <c:v>8</c:v>
-                </c:pt>
-                <c:pt idx="33">
-                  <c:v>8.25</c:v>
-                </c:pt>
-                <c:pt idx="34">
-                  <c:v>8.5</c:v>
-                </c:pt>
-                <c:pt idx="35">
-                  <c:v>8.75</c:v>
-                </c:pt>
-                <c:pt idx="36">
-                  <c:v>9</c:v>
-                </c:pt>
-                <c:pt idx="37">
-                  <c:v>9.25</c:v>
-                </c:pt>
-                <c:pt idx="38">
-                  <c:v>9.5</c:v>
-                </c:pt>
-                <c:pt idx="39">
-                  <c:v>9.75</c:v>
-                </c:pt>
-                <c:pt idx="40">
-                  <c:v>10</c:v>
-                </c:pt>
-                <c:pt idx="41">
-                  <c:v>10.25</c:v>
-                </c:pt>
-                <c:pt idx="42">
-                  <c:v>10.5</c:v>
-                </c:pt>
-                <c:pt idx="43">
-                  <c:v>10.75</c:v>
-                </c:pt>
-                <c:pt idx="44">
-                  <c:v>11</c:v>
-                </c:pt>
-                <c:pt idx="45">
-                  <c:v>11.25</c:v>
-                </c:pt>
-                <c:pt idx="46">
-                  <c:v>11.5</c:v>
-                </c:pt>
-                <c:pt idx="47">
-                  <c:v>11.75</c:v>
-                </c:pt>
-                <c:pt idx="48">
-                  <c:v>12</c:v>
-                </c:pt>
-                <c:pt idx="49">
-                  <c:v>12.25</c:v>
-                </c:pt>
-                <c:pt idx="50">
-                  <c:v>12.5</c:v>
-                </c:pt>
-                <c:pt idx="51">
-                  <c:v>12.75</c:v>
-                </c:pt>
-                <c:pt idx="52">
-                  <c:v>13</c:v>
-                </c:pt>
-                <c:pt idx="53">
-                  <c:v>13.25</c:v>
-                </c:pt>
-                <c:pt idx="54">
-                  <c:v>13.5</c:v>
-                </c:pt>
-                <c:pt idx="55">
-                  <c:v>13.75</c:v>
-                </c:pt>
-                <c:pt idx="56">
-                  <c:v>14</c:v>
-                </c:pt>
-                <c:pt idx="57">
-                  <c:v>14.25</c:v>
-                </c:pt>
-                <c:pt idx="58">
-                  <c:v>14.5</c:v>
-                </c:pt>
-                <c:pt idx="59">
-                  <c:v>14.75</c:v>
-                </c:pt>
-                <c:pt idx="60">
-                  <c:v>15</c:v>
-                </c:pt>
-                <c:pt idx="61">
-                  <c:v>15.25</c:v>
-                </c:pt>
-                <c:pt idx="62">
-                  <c:v>15.5</c:v>
-                </c:pt>
-                <c:pt idx="63">
-                  <c:v>15.75</c:v>
-                </c:pt>
-                <c:pt idx="64">
-                  <c:v>16</c:v>
-                </c:pt>
-                <c:pt idx="65">
-                  <c:v>16.25</c:v>
-                </c:pt>
-                <c:pt idx="66">
-                  <c:v>16.5</c:v>
-                </c:pt>
-                <c:pt idx="67">
-                  <c:v>16.75</c:v>
-                </c:pt>
-                <c:pt idx="68">
-                  <c:v>17</c:v>
-                </c:pt>
-                <c:pt idx="69">
-                  <c:v>17.25</c:v>
-                </c:pt>
-                <c:pt idx="70">
-                  <c:v>17.5</c:v>
-                </c:pt>
-                <c:pt idx="71">
-                  <c:v>17.75</c:v>
-                </c:pt>
-                <c:pt idx="72">
-                  <c:v>18</c:v>
-                </c:pt>
-                <c:pt idx="73">
-                  <c:v>18.25</c:v>
-                </c:pt>
-                <c:pt idx="74">
-                  <c:v>18.5</c:v>
-                </c:pt>
-                <c:pt idx="75">
-                  <c:v>18.75</c:v>
-                </c:pt>
-                <c:pt idx="76">
-                  <c:v>19</c:v>
-                </c:pt>
-                <c:pt idx="77">
-                  <c:v>19.25</c:v>
-                </c:pt>
-                <c:pt idx="78">
-                  <c:v>19.5</c:v>
-                </c:pt>
-                <c:pt idx="79">
-                  <c:v>19.75</c:v>
-                </c:pt>
-                <c:pt idx="80">
-                  <c:v>20</c:v>
-                </c:pt>
-              </c:numCache>
-            </c:numRef>
-          </c:xVal>
-          <c:yVal>
-            <c:numRef>
-              <c:f>'Chart Data'!$D$2:$D$82</c:f>
-              <c:numCache>
-                <c:formatCode>0</c:formatCode>
-                <c:ptCount val="81"/>
-                <c:pt idx="0">
-                  <c:v>-0.866025403784439</c:v>
-                </c:pt>
-                <c:pt idx="1">
-                  <c:v>-0.902585284349861</c:v>
-                </c:pt>
-                <c:pt idx="2">
-                  <c:v>-0.933580426497202</c:v>
-                </c:pt>
-                <c:pt idx="3">
-                  <c:v>-0.958819734868193</c:v>
-                </c:pt>
-                <c:pt idx="4">
-                  <c:v>-0.978147600733806</c:v>
-                </c:pt>
-                <c:pt idx="5">
-                  <c:v>-0.99144486137381</c:v>
-                </c:pt>
-                <c:pt idx="6">
-                  <c:v>-0.998629534754574</c:v>
-                </c:pt>
-                <c:pt idx="7">
-                  <c:v>-0.999657324975557</c:v>
-                </c:pt>
-                <c:pt idx="8">
-                  <c:v>-0.994521895368273</c:v>
-                </c:pt>
-                <c:pt idx="9">
-                  <c:v>-0.983254907563955</c:v>
-                </c:pt>
-                <c:pt idx="10">
-                  <c:v>-0.965925826289068</c:v>
-                </c:pt>
-                <c:pt idx="11">
-                  <c:v>-0.942641491092178</c:v>
-                </c:pt>
-                <c:pt idx="12">
-                  <c:v>-0.913545457642601</c:v>
-                </c:pt>
-                <c:pt idx="13">
-                  <c:v>-0.878817112661965</c:v>
-                </c:pt>
-                <c:pt idx="14">
-                  <c:v>-0.838670567945424</c:v>
-                </c:pt>
-                <c:pt idx="15">
-                  <c:v>-0.793353340291235</c:v>
-                </c:pt>
-                <c:pt idx="16">
-                  <c:v>-0.743144825477394</c:v>
-                </c:pt>
-                <c:pt idx="17">
-                  <c:v>-0.688354575693754</c:v>
-                </c:pt>
-                <c:pt idx="18">
-                  <c:v>-0.629320391049837</c:v>
-                </c:pt>
-                <c:pt idx="19">
-                  <c:v>-0.566406236924833</c:v>
-                </c:pt>
-                <c:pt idx="20">
-                  <c:v>-0.5</c:v>
-                </c:pt>
-                <c:pt idx="21">
-                  <c:v>-0.430511096808295</c:v>
-                </c:pt>
-                <c:pt idx="22">
-                  <c:v>-0.3583679495453</c:v>
-                </c:pt>
-                <c:pt idx="23">
-                  <c:v>-0.284015344703922</c:v>
-                </c:pt>
-                <c:pt idx="24">
-                  <c:v>-0.207911690817759</c:v>
-                </c:pt>
-                <c:pt idx="25">
-                  <c:v>-0.130526192220051</c:v>
-                </c:pt>
-                <c:pt idx="26">
-                  <c:v>-0.0523359562429437</c:v>
-                </c:pt>
-                <c:pt idx="27">
-                  <c:v>0.0261769483078733</c:v>
-                </c:pt>
-                <c:pt idx="28">
-                  <c:v>0.104528463267654</c:v>
-                </c:pt>
-                <c:pt idx="29">
-                  <c:v>0.182235525492148</c:v>
-                </c:pt>
-                <c:pt idx="30">
-                  <c:v>0.258819045102521</c:v>
-                </c:pt>
-                <c:pt idx="31">
-                  <c:v>0.333806859233771</c:v>
-                </c:pt>
-                <c:pt idx="32">
-                  <c:v>0.4067366430758</c:v>
-                </c:pt>
-                <c:pt idx="33">
-                  <c:v>0.477158760259609</c:v>
-                </c:pt>
-                <c:pt idx="34">
-                  <c:v>0.544639035015027</c:v>
-                </c:pt>
-                <c:pt idx="35">
-                  <c:v>0.608761429008721</c:v>
-                </c:pt>
-                <c:pt idx="36">
-                  <c:v>0.669130606358858</c:v>
-                </c:pt>
-                <c:pt idx="37">
-                  <c:v>0.725374371012288</c:v>
-                </c:pt>
-                <c:pt idx="38">
-                  <c:v>0.777145961456971</c:v>
-                </c:pt>
-                <c:pt idx="39">
-                  <c:v>0.824126188622016</c:v>
-                </c:pt>
-                <c:pt idx="40">
-                  <c:v>0.866025403784439</c:v>
-                </c:pt>
-                <c:pt idx="41">
-                  <c:v>0.902585284349861</c:v>
-                </c:pt>
-                <c:pt idx="42">
-                  <c:v>0.933580426497202</c:v>
-                </c:pt>
-                <c:pt idx="43">
-                  <c:v>0.958819734868193</c:v>
-                </c:pt>
-                <c:pt idx="44">
-                  <c:v>0.978147600733806</c:v>
-                </c:pt>
-                <c:pt idx="45">
-                  <c:v>0.99144486137381</c:v>
-                </c:pt>
-                <c:pt idx="46">
-                  <c:v>0.998629534754574</c:v>
-                </c:pt>
-                <c:pt idx="47">
-                  <c:v>0.999657324975557</c:v>
-                </c:pt>
-                <c:pt idx="48">
-                  <c:v>0.994521895368273</c:v>
-                </c:pt>
-                <c:pt idx="49">
-                  <c:v>0.983254907563955</c:v>
-                </c:pt>
-                <c:pt idx="50">
-                  <c:v>0.965925826289068</c:v>
-                </c:pt>
-                <c:pt idx="51">
-                  <c:v>0.942641491092179</c:v>
-                </c:pt>
-                <c:pt idx="52">
-                  <c:v>0.913545457642601</c:v>
-                </c:pt>
-                <c:pt idx="53">
-                  <c:v>0.878817112661965</c:v>
-                </c:pt>
-                <c:pt idx="54">
-                  <c:v>0.838670567945424</c:v>
-                </c:pt>
-                <c:pt idx="55">
-                  <c:v>0.793353340291235</c:v>
-                </c:pt>
-                <c:pt idx="56">
-                  <c:v>0.743144825477394</c:v>
-                </c:pt>
-                <c:pt idx="57">
-                  <c:v>0.688354575693754</c:v>
-                </c:pt>
-                <c:pt idx="58">
-                  <c:v>0.629320391049837</c:v>
-                </c:pt>
-                <c:pt idx="59">
-                  <c:v>0.566406236924833</c:v>
-                </c:pt>
-                <c:pt idx="60">
-                  <c:v>0.5</c:v>
-                </c:pt>
-                <c:pt idx="61">
-                  <c:v>0.430511096808295</c:v>
-                </c:pt>
-                <c:pt idx="62">
-                  <c:v>0.3583679495453</c:v>
-                </c:pt>
-                <c:pt idx="63">
-                  <c:v>0.284015344703922</c:v>
-                </c:pt>
-                <c:pt idx="64">
-                  <c:v>0.207911690817759</c:v>
-                </c:pt>
-                <c:pt idx="65">
-                  <c:v>0.130526192220052</c:v>
-                </c:pt>
-                <c:pt idx="66">
-                  <c:v>0.0523359562429438</c:v>
-                </c:pt>
-                <c:pt idx="67">
-                  <c:v>-0.0261769483078727</c:v>
-                </c:pt>
-                <c:pt idx="68">
-                  <c:v>-0.104528463267653</c:v>
-                </c:pt>
-                <c:pt idx="69">
-                  <c:v>-0.182235525492148</c:v>
-                </c:pt>
-                <c:pt idx="70">
-                  <c:v>-0.258819045102521</c:v>
-                </c:pt>
-                <c:pt idx="71">
-                  <c:v>-0.333806859233771</c:v>
-                </c:pt>
-                <c:pt idx="72">
-                  <c:v>-0.4067366430758</c:v>
-                </c:pt>
-                <c:pt idx="73">
-                  <c:v>-0.477158760259608</c:v>
-                </c:pt>
-                <c:pt idx="74">
-                  <c:v>-0.544639035015027</c:v>
-                </c:pt>
-                <c:pt idx="75">
-                  <c:v>-0.60876142900872</c:v>
-                </c:pt>
-                <c:pt idx="76">
-                  <c:v>-0.669130606358858</c:v>
-                </c:pt>
-                <c:pt idx="77">
-                  <c:v>-0.725374371012288</c:v>
-                </c:pt>
-                <c:pt idx="78">
-                  <c:v>-0.777145961456971</c:v>
-                </c:pt>
-                <c:pt idx="79">
-                  <c:v>-0.824126188622016</c:v>
-                </c:pt>
-                <c:pt idx="80">
-                  <c:v>-0.866025403784439</c:v>
-                </c:pt>
-              </c:numCache>
-            </c:numRef>
-          </c:yVal>
-        </c:ser>
-        <c:ser>
-          <c:idx val="2"/>
-          <c:order val="2"/>
-          <c:tx>
-            <c:v>L3</c:v>
-          </c:tx>
-          <c:spPr>
-            <a:ln xmlns:a="http://schemas.openxmlformats.org/drawingml/2006/main" w="23813">
-              <a:solidFill>
-                <a:srgbClr val="267044"/>
-              </a:solidFill>
-            </a:ln>
-          </c:spPr>
-          <c:marker>
-            <c:symbol val="none"/>
-          </c:marker>
-          <c:xVal>
-            <c:numRef>
-              <c:f>'Chart Data'!$E$2:$E$82</c:f>
-              <c:numCache>
-                <c:formatCode>General</c:formatCode>
-                <c:ptCount val="81"/>
-                <c:pt idx="0">
-                  <c:v>0</c:v>
-                </c:pt>
-                <c:pt idx="1">
-                  <c:v>0.25</c:v>
-                </c:pt>
-                <c:pt idx="2">
-                  <c:v>0.5</c:v>
-                </c:pt>
-                <c:pt idx="3">
-                  <c:v>0.75</c:v>
-                </c:pt>
-                <c:pt idx="4">
-                  <c:v>1</c:v>
-                </c:pt>
-                <c:pt idx="5">
-                  <c:v>1.25</c:v>
-                </c:pt>
-                <c:pt idx="6">
-                  <c:v>1.5</c:v>
-                </c:pt>
-                <c:pt idx="7">
-                  <c:v>1.75</c:v>
-                </c:pt>
-                <c:pt idx="8">
-                  <c:v>2</c:v>
-                </c:pt>
-                <c:pt idx="9">
-                  <c:v>2.25</c:v>
-                </c:pt>
-                <c:pt idx="10">
-                  <c:v>2.5</c:v>
-                </c:pt>
-                <c:pt idx="11">
-                  <c:v>2.75</c:v>
-                </c:pt>
-                <c:pt idx="12">
-                  <c:v>3</c:v>
-                </c:pt>
-                <c:pt idx="13">
-                  <c:v>3.25</c:v>
-                </c:pt>
-                <c:pt idx="14">
-                  <c:v>3.5</c:v>
-                </c:pt>
-                <c:pt idx="15">
-                  <c:v>3.75</c:v>
-                </c:pt>
-                <c:pt idx="16">
-                  <c:v>4</c:v>
-                </c:pt>
-                <c:pt idx="17">
-                  <c:v>4.25</c:v>
-                </c:pt>
-                <c:pt idx="18">
-                  <c:v>4.5</c:v>
-                </c:pt>
-                <c:pt idx="19">
-                  <c:v>4.75</c:v>
-                </c:pt>
-                <c:pt idx="20">
-                  <c:v>5</c:v>
-                </c:pt>
-                <c:pt idx="21">
-                  <c:v>5.25</c:v>
-                </c:pt>
-                <c:pt idx="22">
-                  <c:v>5.5</c:v>
-                </c:pt>
-                <c:pt idx="23">
-                  <c:v>5.75</c:v>
-                </c:pt>
-                <c:pt idx="24">
-                  <c:v>6</c:v>
-                </c:pt>
-                <c:pt idx="25">
-                  <c:v>6.25</c:v>
-                </c:pt>
-                <c:pt idx="26">
-                  <c:v>6.5</c:v>
-                </c:pt>
-                <c:pt idx="27">
-                  <c:v>6.75</c:v>
-                </c:pt>
-                <c:pt idx="28">
-                  <c:v>7</c:v>
-                </c:pt>
-                <c:pt idx="29">
-                  <c:v>7.25</c:v>
-                </c:pt>
-                <c:pt idx="30">
-                  <c:v>7.5</c:v>
-                </c:pt>
-                <c:pt idx="31">
-                  <c:v>7.75</c:v>
-                </c:pt>
-                <c:pt idx="32">
-                  <c:v>8</c:v>
-                </c:pt>
-                <c:pt idx="33">
-                  <c:v>8.25</c:v>
-                </c:pt>
-                <c:pt idx="34">
-                  <c:v>8.5</c:v>
-                </c:pt>
-                <c:pt idx="35">
-                  <c:v>8.75</c:v>
-                </c:pt>
-                <c:pt idx="36">
-                  <c:v>9</c:v>
-                </c:pt>
-                <c:pt idx="37">
-                  <c:v>9.25</c:v>
-                </c:pt>
-                <c:pt idx="38">
-                  <c:v>9.5</c:v>
-                </c:pt>
-                <c:pt idx="39">
-                  <c:v>9.75</c:v>
-                </c:pt>
-                <c:pt idx="40">
-                  <c:v>10</c:v>
-                </c:pt>
-                <c:pt idx="41">
-                  <c:v>10.25</c:v>
-                </c:pt>
-                <c:pt idx="42">
-                  <c:v>10.5</c:v>
-                </c:pt>
-                <c:pt idx="43">
-                  <c:v>10.75</c:v>
-                </c:pt>
-                <c:pt idx="44">
-                  <c:v>11</c:v>
-                </c:pt>
-                <c:pt idx="45">
-                  <c:v>11.25</c:v>
-                </c:pt>
-                <c:pt idx="46">
-                  <c:v>11.5</c:v>
-                </c:pt>
-                <c:pt idx="47">
-                  <c:v>11.75</c:v>
-                </c:pt>
-                <c:pt idx="48">
-                  <c:v>12</c:v>
-                </c:pt>
-                <c:pt idx="49">
-                  <c:v>12.25</c:v>
-                </c:pt>
-                <c:pt idx="50">
-                  <c:v>12.5</c:v>
-                </c:pt>
-                <c:pt idx="51">
-                  <c:v>12.75</c:v>
-                </c:pt>
-                <c:pt idx="52">
-                  <c:v>13</c:v>
-                </c:pt>
-                <c:pt idx="53">
-                  <c:v>13.25</c:v>
-                </c:pt>
-                <c:pt idx="54">
-                  <c:v>13.5</c:v>
-                </c:pt>
-                <c:pt idx="55">
-                  <c:v>13.75</c:v>
-                </c:pt>
-                <c:pt idx="56">
-                  <c:v>14</c:v>
-                </c:pt>
-                <c:pt idx="57">
-                  <c:v>14.25</c:v>
-                </c:pt>
-                <c:pt idx="58">
-                  <c:v>14.5</c:v>
-                </c:pt>
-                <c:pt idx="59">
-                  <c:v>14.75</c:v>
-                </c:pt>
-                <c:pt idx="60">
-                  <c:v>15</c:v>
-                </c:pt>
-                <c:pt idx="61">
-                  <c:v>15.25</c:v>
-                </c:pt>
-                <c:pt idx="62">
-                  <c:v>15.5</c:v>
-                </c:pt>
-                <c:pt idx="63">
-                  <c:v>15.75</c:v>
-                </c:pt>
-                <c:pt idx="64">
-                  <c:v>16</c:v>
-                </c:pt>
-                <c:pt idx="65">
-                  <c:v>16.25</c:v>
-                </c:pt>
-                <c:pt idx="66">
-                  <c:v>16.5</c:v>
-                </c:pt>
-                <c:pt idx="67">
-                  <c:v>16.75</c:v>
-                </c:pt>
-                <c:pt idx="68">
-                  <c:v>17</c:v>
-                </c:pt>
-                <c:pt idx="69">
-                  <c:v>17.25</c:v>
-                </c:pt>
-                <c:pt idx="70">
-                  <c:v>17.5</c:v>
-                </c:pt>
-                <c:pt idx="71">
-                  <c:v>17.75</c:v>
-                </c:pt>
-                <c:pt idx="72">
-                  <c:v>18</c:v>
-                </c:pt>
-                <c:pt idx="73">
-                  <c:v>18.25</c:v>
-                </c:pt>
-                <c:pt idx="74">
-                  <c:v>18.5</c:v>
-                </c:pt>
-                <c:pt idx="75">
-                  <c:v>18.75</c:v>
-                </c:pt>
-                <c:pt idx="76">
-                  <c:v>19</c:v>
-                </c:pt>
-                <c:pt idx="77">
-                  <c:v>19.25</c:v>
-                </c:pt>
-                <c:pt idx="78">
-                  <c:v>19.5</c:v>
-                </c:pt>
-                <c:pt idx="79">
-                  <c:v>19.75</c:v>
-                </c:pt>
-                <c:pt idx="80">
-                  <c:v>20</c:v>
-                </c:pt>
-              </c:numCache>
-            </c:numRef>
-          </c:xVal>
-          <c:yVal>
-            <c:numRef>
-              <c:f>'Chart Data'!$F$2:$F$82</c:f>
-              <c:numCache>
-                <c:formatCode>0</c:formatCode>
-                <c:ptCount val="81"/>
-                <c:pt idx="0">
-                  <c:v>0.866025403784439</c:v>
-                </c:pt>
-                <c:pt idx="1">
-                  <c:v>0.824126188622016</c:v>
-                </c:pt>
-                <c:pt idx="2">
-                  <c:v>0.777145961456971</c:v>
-                </c:pt>
-                <c:pt idx="3">
-                  <c:v>0.725374371012288</c:v>
-                </c:pt>
-                <c:pt idx="4">
-                  <c:v>0.669130606358858</c:v>
-                </c:pt>
-                <c:pt idx="5">
-                  <c:v>0.608761429008721</c:v>
-                </c:pt>
-                <c:pt idx="6">
-                  <c:v>0.544639035015027</c:v>
-                </c:pt>
-                <c:pt idx="7">
-                  <c:v>0.477158760259609</c:v>
-                </c:pt>
-                <c:pt idx="8">
-                  <c:v>0.4067366430758</c:v>
-                </c:pt>
-                <c:pt idx="9">
-                  <c:v>0.333806859233771</c:v>
-                </c:pt>
-                <c:pt idx="10">
-                  <c:v>0.258819045102521</c:v>
-                </c:pt>
-                <c:pt idx="11">
-                  <c:v>0.182235525492148</c:v>
-                </c:pt>
-                <c:pt idx="12">
-                  <c:v>0.104528463267654</c:v>
-                </c:pt>
-                <c:pt idx="13">
-                  <c:v>0.0261769483078734</c:v>
-                </c:pt>
-                <c:pt idx="14">
-                  <c:v>-0.0523359562429436</c:v>
-                </c:pt>
-                <c:pt idx="15">
-                  <c:v>-0.130526192220051</c:v>
-                </c:pt>
-                <c:pt idx="16">
-                  <c:v>-0.207911690817759</c:v>
-                </c:pt>
-                <c:pt idx="17">
-                  <c:v>-0.284015344703922</c:v>
-                </c:pt>
-                <c:pt idx="18">
-                  <c:v>-0.3583679495453</c:v>
-                </c:pt>
-                <c:pt idx="19">
-                  <c:v>-0.430511096808295</c:v>
-                </c:pt>
-                <c:pt idx="20">
-                  <c:v>-0.5</c:v>
-                </c:pt>
-                <c:pt idx="21">
-                  <c:v>-0.566406236924833</c:v>
-                </c:pt>
-                <c:pt idx="22">
-                  <c:v>-0.629320391049837</c:v>
-                </c:pt>
-                <c:pt idx="23">
-                  <c:v>-0.688354575693754</c:v>
-                </c:pt>
-                <c:pt idx="24">
-                  <c:v>-0.743144825477394</c:v>
-                </c:pt>
-                <c:pt idx="25">
-                  <c:v>-0.793353340291235</c:v>
-                </c:pt>
-                <c:pt idx="26">
-                  <c:v>-0.838670567945424</c:v>
-                </c:pt>
-                <c:pt idx="27">
-                  <c:v>-0.878817112661965</c:v>
-                </c:pt>
-                <c:pt idx="28">
-                  <c:v>-0.913545457642601</c:v>
-                </c:pt>
-                <c:pt idx="29">
-                  <c:v>-0.942641491092178</c:v>
-                </c:pt>
-                <c:pt idx="30">
-                  <c:v>-0.965925826289068</c:v>
-                </c:pt>
-                <c:pt idx="31">
-                  <c:v>-0.983254907563955</c:v>
-                </c:pt>
-                <c:pt idx="32">
-                  <c:v>-0.994521895368273</c:v>
-                </c:pt>
-                <c:pt idx="33">
-                  <c:v>-0.999657324975557</c:v>
-                </c:pt>
-                <c:pt idx="34">
-                  <c:v>-0.998629534754574</c:v>
-                </c:pt>
-                <c:pt idx="35">
-                  <c:v>-0.99144486137381</c:v>
-                </c:pt>
-                <c:pt idx="36">
-                  <c:v>-0.978147600733806</c:v>
-                </c:pt>
-                <c:pt idx="37">
-                  <c:v>-0.958819734868193</c:v>
-                </c:pt>
-                <c:pt idx="38">
-                  <c:v>-0.933580426497202</c:v>
-                </c:pt>
-                <c:pt idx="39">
-                  <c:v>-0.902585284349861</c:v>
-                </c:pt>
-                <c:pt idx="40">
-                  <c:v>-0.866025403784439</c:v>
-                </c:pt>
-                <c:pt idx="41">
-                  <c:v>-0.824126188622016</c:v>
-                </c:pt>
-                <c:pt idx="42">
-                  <c:v>-0.777145961456971</c:v>
-                </c:pt>
-                <c:pt idx="43">
-                  <c:v>-0.725374371012288</c:v>
-                </c:pt>
-                <c:pt idx="44">
-                  <c:v>-0.669130606358859</c:v>
-                </c:pt>
-                <c:pt idx="45">
-                  <c:v>-0.608761429008721</c:v>
-                </c:pt>
-                <c:pt idx="46">
-                  <c:v>-0.544639035015027</c:v>
-                </c:pt>
-                <c:pt idx="47">
-                  <c:v>-0.477158760259608</c:v>
-                </c:pt>
-                <c:pt idx="48">
-                  <c:v>-0.406736643075801</c:v>
-                </c:pt>
-                <c:pt idx="49">
-                  <c:v>-0.333806859233771</c:v>
-                </c:pt>
-                <c:pt idx="50">
-                  <c:v>-0.258819045102521</c:v>
-                </c:pt>
-                <c:pt idx="51">
-                  <c:v>-0.182235525492149</c:v>
-                </c:pt>
-                <c:pt idx="52">
-                  <c:v>-0.104528463267654</c:v>
-                </c:pt>
-                <c:pt idx="53">
-                  <c:v>-0.0261769483078735</c:v>
-                </c:pt>
-                <c:pt idx="54">
-                  <c:v>0.0523359562429439</c:v>
-                </c:pt>
-                <c:pt idx="55">
-                  <c:v>0.130526192220052</c:v>
-                </c:pt>
-                <c:pt idx="56">
-                  <c:v>0.207911690817759</c:v>
-                </c:pt>
-                <c:pt idx="57">
-                  <c:v>0.284015344703922</c:v>
-                </c:pt>
-                <c:pt idx="58">
-                  <c:v>0.3583679495453</c:v>
-                </c:pt>
-                <c:pt idx="59">
-                  <c:v>0.430511096808294</c:v>
-                </c:pt>
-                <c:pt idx="60">
-                  <c:v>0.499999999999999</c:v>
-                </c:pt>
-                <c:pt idx="61">
-                  <c:v>0.566406236924832</c:v>
-                </c:pt>
-                <c:pt idx="62">
-                  <c:v>0.629320391049838</c:v>
-                </c:pt>
-                <c:pt idx="63">
-                  <c:v>0.688354575693754</c:v>
-                </c:pt>
-                <c:pt idx="64">
-                  <c:v>0.743144825477394</c:v>
-                </c:pt>
-                <c:pt idx="65">
-                  <c:v>0.793353340291235</c:v>
-                </c:pt>
-                <c:pt idx="66">
-                  <c:v>0.838670567945424</c:v>
-                </c:pt>
-                <c:pt idx="67">
-                  <c:v>0.878817112661965</c:v>
-                </c:pt>
-                <c:pt idx="68">
-                  <c:v>0.913545457642601</c:v>
-                </c:pt>
-                <c:pt idx="69">
-                  <c:v>0.942641491092178</c:v>
-                </c:pt>
-                <c:pt idx="70">
-                  <c:v>0.965925826289068</c:v>
-                </c:pt>
-                <c:pt idx="71">
-                  <c:v>0.983254907563955</c:v>
-                </c:pt>
-                <c:pt idx="72">
-                  <c:v>0.994521895368273</c:v>
-                </c:pt>
-                <c:pt idx="73">
-                  <c:v>0.999657324975557</c:v>
-                </c:pt>
-                <c:pt idx="74">
-                  <c:v>0.998629534754574</c:v>
-                </c:pt>
-                <c:pt idx="75">
-                  <c:v>0.991444861373811</c:v>
-                </c:pt>
-                <c:pt idx="76">
-                  <c:v>0.978147600733806</c:v>
-                </c:pt>
-                <c:pt idx="77">
-                  <c:v>0.958819734868193</c:v>
-                </c:pt>
-                <c:pt idx="78">
-                  <c:v>0.933580426497202</c:v>
-                </c:pt>
-                <c:pt idx="79">
-                  <c:v>0.90258528434986</c:v>
-                </c:pt>
-                <c:pt idx="80">
-                  <c:v>0.866025403784439</c:v>
-                </c:pt>
-              </c:numCache>
-            </c:numRef>
-          </c:yVal>
-        </c:ser>
-        <c:axId val="48650112"/>
-        <c:axId val="48672768"/>
-      </c:scatterChart>
-      <c:valAx>
-        <c:axId val="48672768"/>
-        <c:scaling>
-          <c:orientation val="minMax"/>
-          <c:max val="1"/>
-          <c:min val="-1"/>
-        </c:scaling>
-        <c:delete val="0"/>
-        <c:axPos val="l"/>
-        <c:title>
-          <c:tx>
-            <c:rich>
-              <a:bodyPr xmlns:a="http://schemas.openxmlformats.org/drawingml/2006/main"/>
-              <a:lstStyle xmlns:a="http://schemas.openxmlformats.org/drawingml/2006/main"/>
-              <a:p xmlns:a="http://schemas.openxmlformats.org/drawingml/2006/main">
-                <a:r>
-                  <a:rPr sz="1500">
-                    <a:latin typeface="Calibri"/>
-                    <a:ea typeface="Calibri"/>
-                    <a:cs typeface="Calibri"/>
-                  </a:rPr>
-                  <a:t>u/û</a:t>
-                </a:r>
-              </a:p>
-            </c:rich>
-          </c:tx>
-          <c:overlay val="0"/>
-          <c:txPr>
-            <a:bodyPr xmlns:a="http://schemas.openxmlformats.org/drawingml/2006/main" anchorCtr="1"/>
-            <a:lstStyle xmlns:a="http://schemas.openxmlformats.org/drawingml/2006/main"/>
-            <a:p xmlns:a="http://schemas.openxmlformats.org/drawingml/2006/main">
-              <a:pPr>
-                <a:defRPr sz="1500">
-                  <a:latin typeface="Calibri"/>
-                  <a:ea typeface="Calibri"/>
-                  <a:cs typeface="Calibri"/>
-                </a:defRPr>
-              </a:pPr>
-            </a:p>
-          </c:txPr>
-        </c:title>
-        <c:numFmt formatCode="0"/>
-        <c:majorTickMark val="none"/>
-        <c:minorTickMark val="none"/>
-        <c:spPr>
-          <a:ln xmlns:a="http://schemas.openxmlformats.org/drawingml/2006/main" w="9525">
-            <a:solidFill>
-              <a:srgbClr val="D4D4D4"/>
-            </a:solidFill>
-            <a:prstDash val="solid"/>
-          </a:ln>
-        </c:spPr>
-        <c:txPr>
-          <a:bodyPr xmlns:a="http://schemas.openxmlformats.org/drawingml/2006/main" anchorCtr="1"/>
-          <a:lstStyle xmlns:a="http://schemas.openxmlformats.org/drawingml/2006/main"/>
-          <a:p xmlns:a="http://schemas.openxmlformats.org/drawingml/2006/main">
-            <a:pPr>
-              <a:defRPr sz="1350">
-                <a:solidFill>
-                  <a:srgbClr val="666666"/>
-                </a:solidFill>
-                <a:latin typeface="Calibri"/>
-                <a:ea typeface="Calibri"/>
-                <a:cs typeface="Calibri"/>
-              </a:defRPr>
-            </a:pPr>
-          </a:p>
-        </c:txPr>
-        <c:crossAx val="48650112"/>
-        <c:majorUnit val="1"/>
-      </c:valAx>
-      <c:valAx>
-        <c:axId val="48650112"/>
-        <c:scaling>
-          <c:orientation val="minMax"/>
-          <c:max val="20"/>
-          <c:min val="0"/>
-        </c:scaling>
-        <c:delete val="0"/>
-        <c:axPos val="b"/>
-        <c:title>
-          <c:tx>
-            <c:rich>
-              <a:bodyPr xmlns:a="http://schemas.openxmlformats.org/drawingml/2006/main"/>
-              <a:lstStyle xmlns:a="http://schemas.openxmlformats.org/drawingml/2006/main"/>
-              <a:p xmlns:a="http://schemas.openxmlformats.org/drawingml/2006/main">
-                <a:r>
-                  <a:rPr sz="1500">
-                    <a:latin typeface="Calibri"/>
-                    <a:ea typeface="Calibri"/>
-                    <a:cs typeface="Calibri"/>
-                  </a:rPr>
-                  <a:t>Tid (ms)</a:t>
-                </a:r>
-              </a:p>
-            </c:rich>
-          </c:tx>
-          <c:overlay val="0"/>
-          <c:txPr>
-            <a:bodyPr xmlns:a="http://schemas.openxmlformats.org/drawingml/2006/main" anchorCtr="1"/>
-            <a:lstStyle xmlns:a="http://schemas.openxmlformats.org/drawingml/2006/main"/>
-            <a:p xmlns:a="http://schemas.openxmlformats.org/drawingml/2006/main">
-              <a:pPr>
-                <a:defRPr sz="1500">
-                  <a:latin typeface="Calibri"/>
-                  <a:ea typeface="Calibri"/>
-                  <a:cs typeface="Calibri"/>
-                </a:defRPr>
-              </a:pPr>
-            </a:p>
-          </c:txPr>
-        </c:title>
-        <c:numFmt formatCode="0"/>
-        <c:majorTickMark val="none"/>
-        <c:minorTickMark val="none"/>
-        <c:spPr>
-          <a:ln xmlns:a="http://schemas.openxmlformats.org/drawingml/2006/main" w="9525">
-            <a:solidFill>
-              <a:srgbClr val="D4D4D4"/>
-            </a:solidFill>
-            <a:prstDash val="solid"/>
-          </a:ln>
-        </c:spPr>
-        <c:txPr>
-          <a:bodyPr xmlns:a="http://schemas.openxmlformats.org/drawingml/2006/main" anchorCtr="1"/>
-          <a:lstStyle xmlns:a="http://schemas.openxmlformats.org/drawingml/2006/main"/>
-          <a:p xmlns:a="http://schemas.openxmlformats.org/drawingml/2006/main">
-            <a:pPr>
-              <a:defRPr sz="1350">
-                <a:solidFill>
-                  <a:srgbClr val="666666"/>
-                </a:solidFill>
-                <a:latin typeface="Calibri"/>
-                <a:ea typeface="Calibri"/>
-                <a:cs typeface="Calibri"/>
-              </a:defRPr>
-            </a:pPr>
-          </a:p>
-        </c:txPr>
-        <c:crossAx val="48672768"/>
-        <c:majorUnit val="5"/>
-      </c:valAx>
-      <c:spPr>
-        <a:solidFill xmlns:a="http://schemas.openxmlformats.org/drawingml/2006/main">
-          <a:srgbClr val="FFFFFF"/>
-        </a:solidFill>
-      </c:spPr>
-    </c:plotArea>
-    <c:legend>
-      <c:legendPos val="r"/>
-      <c:overlay val="0"/>
-      <c:txPr>
-        <a:bodyPr xmlns:a="http://schemas.openxmlformats.org/drawingml/2006/main" anchorCtr="1"/>
-        <a:lstStyle xmlns:a="http://schemas.openxmlformats.org/drawingml/2006/main"/>
-        <a:p xmlns:a="http://schemas.openxmlformats.org/drawingml/2006/main">
-          <a:pPr>
-            <a:defRPr sz="1500">
-              <a:latin typeface="Calibri"/>
-              <a:ea typeface="Calibri"/>
-              <a:cs typeface="Calibri"/>
-            </a:defRPr>
-          </a:pPr>
-        </a:p>
-      </c:txPr>
-    </c:legend>
-    <c:plotVisOnly val="1"/>
-  </c:chart>
-  <c:spPr>
-    <a:solidFill xmlns:a="http://schemas.openxmlformats.org/drawingml/2006/main">
-      <a:srgbClr val="FFFFFF"/>
-    </a:solidFill>
-  </c:spPr>
-  <c:externalData r:id="rIdChartSnapshot1">
-    <c:autoUpdate val="0"/>
-  </c:externalData>
-</c:chartSpace>
-</file>
-
 <file path=ppt/slides/slide1.xml><?xml version="1.0" encoding="utf-8"?>
 <p:sld xmlns:p="http://schemas.openxmlformats.org/presentationml/2006/main">
   <p:cSld>
@@ -10180,7 +8429,7 @@
                 <a:ea typeface="Calibri"/>
                 <a:cs typeface="Calibri"/>
               </a:rPr>
-              <a:t>Teori och exempel följs av övning 6–10.</a:t>
+              <a:t>Teori och exempel följs av övning 1.6–1.10.</a:t>
             </a:r>
           </a:p>
           <a:p xmlns:a="http://schemas.openxmlformats.org/drawingml/2006/main">
@@ -14396,7 +12645,7 @@
                 <a:ea typeface="Calibri"/>
                 <a:cs typeface="Calibri"/>
               </a:rPr>
-              <a:t>15 min övning 1, 2, 4, 5 min återkoppling</a:t>
+              <a:t>15 min övning 1.1, 1.2 och 1.4, 5 min återkoppling</a:t>
             </a:r>
           </a:p>
         </p:txBody>
@@ -14510,7 +12759,7 @@
                 <a:ea typeface="Calibri"/>
                 <a:cs typeface="Calibri"/>
               </a:rPr>
-              <a:t>20 min teori och exempel, 15 min övning 6, 7, 8</a:t>
+              <a:t>20 min teori och exempel, 15 min övning 1.6, 1.7 och 1.8</a:t>
             </a:r>
           </a:p>
           <a:p xmlns:a="http://schemas.openxmlformats.org/drawingml/2006/main">
@@ -18590,22 +16839,6 @@
           </a:p>
         </p:txBody>
       </p:sp>
-      <p:graphicFrame>
-        <p:nvGraphicFramePr>
-          <p:cNvPr id="13" name="Chart"/>
-          <p:cNvGraphicFramePr/>
-          <p:nvPr/>
-        </p:nvGraphicFramePr>
-        <p:xfrm>
-          <a:off xmlns:a="http://schemas.openxmlformats.org/drawingml/2006/main" x="1095375" y="2343150"/>
-          <a:ext xmlns:a="http://schemas.openxmlformats.org/drawingml/2006/main" cx="7048500" cy="2371725"/>
-        </p:xfrm>
-        <a:graphic xmlns:a="http://schemas.openxmlformats.org/drawingml/2006/main">
-          <a:graphicData uri="http://schemas.openxmlformats.org/drawingml/2006/chart">
-            <c:chart xmlns:r="http://schemas.openxmlformats.org/officeDocument/2006/relationships" xmlns:c="http://schemas.openxmlformats.org/drawingml/2006/chart" r:id="Rb3f478e257984d20"/>
-          </a:graphicData>
-        </a:graphic>
-      </p:graphicFrame>
       <p:sp>
         <p:nvSpPr>
           <p:cNvPr id="5" name="360°/3 = 120°">
@@ -18804,6 +17037,30 @@
           </a:p>
         </p:txBody>
       </p:sp>
+      <p:pic xmlns:a="http://schemas.openxmlformats.org/drawingml/2006/main" xmlns:r="http://schemas.openxmlformats.org/officeDocument/2006/relationships">
+        <p:nvPicPr>
+          <p:cNvPr id="11" name="schema-sinus" descr="L1, L2 och L3 över 20 ms (50 Hz), normaliserade, 120° isär."/>
+          <p:cNvPicPr>
+            <a:picLocks noChangeAspect="1"/>
+          </p:cNvPicPr>
+          <p:nvPr/>
+        </p:nvPicPr>
+        <p:blipFill>
+          <a:blip r:embed="rId3"/>
+          <a:stretch>
+            <a:fillRect/>
+          </a:stretch>
+        </p:blipFill>
+        <p:spPr>
+          <a:xfrm>
+            <a:off x="1450848" y="2395728"/>
+            <a:ext cx="6242304" cy="2340864"/>
+          </a:xfrm>
+          <a:prstGeom prst="rect">
+            <a:avLst/>
+          </a:prstGeom>
+        </p:spPr>
+      </p:pic>
     </p:spTree>
     <p:extLst>
       <p:ext uri="{BB962C8B-B14F-4D97-AF65-F5344CB8AC3E}">

--- a/sjoskolan/vecka-41/aktuell/v41_01_Trefassystemets_grunder_elev.pptx
+++ b/sjoskolan/vecka-41/aktuell/v41_01_Trefassystemets_grunder_elev.pptx
@@ -4708,7 +4708,7 @@
                 <a:ea typeface="Calibri"/>
                 <a:cs typeface="Calibri"/>
               </a:rPr>
-              <a:t>Förutsättningar: f = 50 Hz och φ = 120°.</a:t>
+              <a:t>Förutsättningar: Landnätet vid kaj. f = 50 Hz och φ = 120°.</a:t>
             </a:r>
           </a:p>
         </p:txBody>
@@ -5544,7 +5544,7 @@
                 <a:ea typeface="Calibri"/>
                 <a:cs typeface="Calibri"/>
               </a:rPr>
-              <a:t>Förutsättningar: Symmetrisk trefaskälla med U</a:t>
+              <a:t>Förutsättningar: Landström vid kaj, 50 Hz. Symmetrisk trefaskälla med U</a:t>
             </a:r>
             <a:r>
               <a:rPr sz="2025" b="0" baseline="-25000">
@@ -6391,7 +6391,7 @@
                 <a:ea typeface="Calibri"/>
                 <a:cs typeface="Calibri"/>
               </a:rPr>
-              <a:t>Förutsättningar: Symmetrisk källa. U</a:t>
+              <a:t>Förutsättningar: Landnät 230/400 V. Symmetrisk källa. U</a:t>
             </a:r>
             <a:r>
               <a:rPr sz="2025" b="0" baseline="-25000">

--- a/sjoskolan/vecka-41/aktuell/v41_01_Trefassystemets_grunder_elev.pptx
+++ b/sjoskolan/vecka-41/aktuell/v41_01_Trefassystemets_grunder_elev.pptx
@@ -17459,7 +17459,7 @@
                 <a:ea typeface="Calibri"/>
                 <a:cs typeface="Calibri"/>
               </a:rPr>
-              <a:t>men nätet har oftast ingen neutralledare. Vid ett jordfel kan en fas ha hela 440 V mot skrovet.</a:t>
+              <a:t>men nätet har oftast ingen neutralledare. Vid ett jordfel får de två friska faserna hela 440 V mot skrovet.</a:t>
             </a:r>
           </a:p>
         </p:txBody>

--- a/sjoskolan/vecka-41/aktuell/v41_01_Trefassystemets_grunder_elev.pptx
+++ b/sjoskolan/vecka-41/aktuell/v41_01_Trefassystemets_grunder_elev.pptx
@@ -9629,7 +9629,7 @@
                 <a:ea typeface="Calibri"/>
                 <a:cs typeface="Calibri"/>
               </a:rPr>
-              <a:t>Skriv alltid ut båda mätpunkterna i protokollet.</a:t>
+              <a:t>Skriv alltid ut båda mätpunkterna.</a:t>
             </a:r>
           </a:p>
           <a:p xmlns:a="http://schemas.openxmlformats.org/drawingml/2006/main">
@@ -9653,7 +9653,53 @@
                 <a:ea typeface="Calibri"/>
                 <a:cs typeface="Calibri"/>
               </a:rPr>
-              <a:t>400 V mellan faser visar inte att varje fas–jordvärde är 230 V.</a:t>
+              <a:t>400 V mellan faser visar inte att fas–jord är 230 V.</a:t>
+            </a:r>
+          </a:p>
+          <a:p xmlns:a="http://schemas.openxmlformats.org/drawingml/2006/main">
+            <a:pPr algn="l">
+              <a:buNone/>
+              <a:defRPr sz="2250" b="0">
+                <a:solidFill>
+                  <a:srgbClr val="111111"/>
+                </a:solidFill>
+                <a:latin typeface="Calibri"/>
+                <a:ea typeface="Calibri"/>
+                <a:cs typeface="Calibri"/>
+              </a:defRPr>
+            </a:pPr>
+            <a:r>
+              <a:rPr sz="1800" b="0">
+                <a:solidFill>
+                  <a:srgbClr val="111111"/>
+                </a:solidFill>
+                <a:latin typeface="Calibri"/>
+                <a:ea typeface="Calibri"/>
+                <a:cs typeface="Calibri"/>
+              </a:rPr>
+              <a:t>Vid nollavbrott eller jordfel kan fas–jord visa 0 V till hela U</a:t>
+            </a:r>
+            <a:r>
+              <a:rPr sz="1800" b="0" baseline="-25000">
+                <a:solidFill>
+                  <a:srgbClr val="111111"/>
+                </a:solidFill>
+                <a:latin typeface="Calibri"/>
+                <a:ea typeface="Calibri"/>
+                <a:cs typeface="Calibri"/>
+              </a:rPr>
+              <a:t>L</a:t>
+            </a:r>
+            <a:r>
+              <a:rPr sz="1800" b="0">
+                <a:solidFill>
+                  <a:srgbClr val="111111"/>
+                </a:solidFill>
+                <a:latin typeface="Calibri"/>
+                <a:ea typeface="Calibri"/>
+                <a:cs typeface="Calibri"/>
+              </a:rPr>
+              <a:t>.</a:t>
             </a:r>
           </a:p>
         </p:txBody>
@@ -9718,7 +9764,7 @@
       </p:sp>
       <p:pic xmlns:a="http://schemas.openxmlformats.org/drawingml/2006/main" xmlns:r="http://schemas.openxmlformats.org/officeDocument/2006/relationships">
         <p:nvPicPr>
-          <p:cNvPr id="9" name="Figur: Mätpunkter för linjespänningarna U12, U2" descr="Mätpunkter för linjespänningarna U12, U23, U31 och fasspänningen U1N"/>
+          <p:cNvPr id="9" name="Figur: Mätpunkter för linjespänningarna U12, U2" descr="Mätpunkter: linjespänningarna U12, U23 och U31 mellan två faser, fasspänningen U1N mellan fas och N"/>
           <p:cNvPicPr>
             <a:picLocks noChangeAspect="1"/>
           </p:cNvPicPr>
@@ -16950,7 +16996,7 @@
                 <a:ea typeface="Calibri"/>
                 <a:cs typeface="Calibri"/>
               </a:rPr>
-              <a:t>Vid 50 Hz motsvarar 120° ett tidsavstånd på 6,67 ms.</a:t>
+              <a:t>Vid 50 Hz motsvarar 120° ett tidsavstånd på 6,67 ms.</a:t>
             </a:r>
           </a:p>
           <a:p xmlns:a="http://schemas.openxmlformats.org/drawingml/2006/main">
@@ -16974,7 +17020,29 @@
                 <a:ea typeface="Calibri"/>
                 <a:cs typeface="Calibri"/>
               </a:rPr>
-              <a:t>Kurvorna är normaliserade till samma toppvärde.</a:t>
+              <a:t>Faserna har toppvärdet 1. Streckad: U</a:t>
+            </a:r>
+            <a:r>
+              <a:rPr sz="2000" b="0" baseline="-25000">
+                <a:solidFill>
+                  <a:srgbClr val="111111"/>
+                </a:solidFill>
+                <a:latin typeface="Calibri"/>
+                <a:ea typeface="Calibri"/>
+                <a:cs typeface="Calibri"/>
+              </a:rPr>
+              <a:t>12</a:t>
+            </a:r>
+            <a:r>
+              <a:rPr sz="2000" b="0">
+                <a:solidFill>
+                  <a:srgbClr val="111111"/>
+                </a:solidFill>
+                <a:latin typeface="Calibri"/>
+                <a:ea typeface="Calibri"/>
+                <a:cs typeface="Calibri"/>
+              </a:rPr>
+              <a:t> = L1 − L2 med toppvärdet √3.</a:t>
             </a:r>
           </a:p>
         </p:txBody>
@@ -17039,22 +17107,22 @@
       </p:sp>
       <p:pic xmlns:a="http://schemas.openxmlformats.org/drawingml/2006/main" xmlns:r="http://schemas.openxmlformats.org/officeDocument/2006/relationships">
         <p:nvPicPr>
-          <p:cNvPr id="11" name="schema-sinus" descr="L1, L2 och L3 över 20 ms (50 Hz), normaliserade, 120° isär."/>
+          <p:cNvPr id="11" name="schema-sinus" descr="L1, L2 och L3 över 20 ms (50 Hz) med toppvärdet 1, 120° isär. Streckad: linjespänningen U12 = L1 − L2 med toppvärdet √3 ≈ 1,73."/>
           <p:cNvPicPr>
             <a:picLocks noChangeAspect="1"/>
           </p:cNvPicPr>
           <p:nvPr/>
         </p:nvPicPr>
         <p:blipFill>
-          <a:blip r:embed="rId3"/>
+          <a:blip r:embed="rId5"/>
           <a:stretch>
             <a:fillRect/>
           </a:stretch>
         </p:blipFill>
         <p:spPr>
           <a:xfrm>
-            <a:off x="1450848" y="2395728"/>
-            <a:ext cx="6242304" cy="2340864"/>
+            <a:off x="1710944" y="2395728"/>
+            <a:ext cx="5722112" cy="2340864"/>
           </a:xfrm>
           <a:prstGeom prst="rect">
             <a:avLst/>
@@ -17240,7 +17308,73 @@
                 <a:ea typeface="Calibri"/>
                 <a:cs typeface="Calibri"/>
               </a:rPr>
-              <a:t>: mellan fas och källans neutralpunkt.</a:t>
+              <a:t> (U</a:t>
+            </a:r>
+            <a:r>
+              <a:rPr sz="1800" b="0" baseline="-25000">
+                <a:solidFill>
+                  <a:srgbClr val="111111"/>
+                </a:solidFill>
+                <a:latin typeface="Calibri"/>
+                <a:ea typeface="Calibri"/>
+                <a:cs typeface="Calibri"/>
+              </a:rPr>
+              <a:t>1N</a:t>
+            </a:r>
+            <a:r>
+              <a:rPr sz="1800" b="0">
+                <a:solidFill>
+                  <a:srgbClr val="111111"/>
+                </a:solidFill>
+                <a:latin typeface="Calibri"/>
+                <a:ea typeface="Calibri"/>
+                <a:cs typeface="Calibri"/>
+              </a:rPr>
+              <a:t>, U</a:t>
+            </a:r>
+            <a:r>
+              <a:rPr sz="1800" b="0" baseline="-25000">
+                <a:solidFill>
+                  <a:srgbClr val="111111"/>
+                </a:solidFill>
+                <a:latin typeface="Calibri"/>
+                <a:ea typeface="Calibri"/>
+                <a:cs typeface="Calibri"/>
+              </a:rPr>
+              <a:t>2N</a:t>
+            </a:r>
+            <a:r>
+              <a:rPr sz="1800" b="0">
+                <a:solidFill>
+                  <a:srgbClr val="111111"/>
+                </a:solidFill>
+                <a:latin typeface="Calibri"/>
+                <a:ea typeface="Calibri"/>
+                <a:cs typeface="Calibri"/>
+              </a:rPr>
+              <a:t>, U</a:t>
+            </a:r>
+            <a:r>
+              <a:rPr sz="1800" b="0" baseline="-25000">
+                <a:solidFill>
+                  <a:srgbClr val="111111"/>
+                </a:solidFill>
+                <a:latin typeface="Calibri"/>
+                <a:ea typeface="Calibri"/>
+                <a:cs typeface="Calibri"/>
+              </a:rPr>
+              <a:t>3N</a:t>
+            </a:r>
+            <a:r>
+              <a:rPr sz="1800" b="0">
+                <a:solidFill>
+                  <a:srgbClr val="111111"/>
+                </a:solidFill>
+                <a:latin typeface="Calibri"/>
+                <a:ea typeface="Calibri"/>
+                <a:cs typeface="Calibri"/>
+              </a:rPr>
+              <a:t>): mellan en fas och nollpunkten.</a:t>
             </a:r>
           </a:p>
           <a:p xmlns:a="http://schemas.openxmlformats.org/drawingml/2006/main">
@@ -17286,7 +17420,73 @@
                 <a:ea typeface="Calibri"/>
                 <a:cs typeface="Calibri"/>
               </a:rPr>
-              <a:t>: mellan två faser, även kallad huvudspänning.</a:t>
+              <a:t> (U</a:t>
+            </a:r>
+            <a:r>
+              <a:rPr sz="1800" b="0" baseline="-25000">
+                <a:solidFill>
+                  <a:srgbClr val="111111"/>
+                </a:solidFill>
+                <a:latin typeface="Calibri"/>
+                <a:ea typeface="Calibri"/>
+                <a:cs typeface="Calibri"/>
+              </a:rPr>
+              <a:t>12</a:t>
+            </a:r>
+            <a:r>
+              <a:rPr sz="1800" b="0">
+                <a:solidFill>
+                  <a:srgbClr val="111111"/>
+                </a:solidFill>
+                <a:latin typeface="Calibri"/>
+                <a:ea typeface="Calibri"/>
+                <a:cs typeface="Calibri"/>
+              </a:rPr>
+              <a:t>, U</a:t>
+            </a:r>
+            <a:r>
+              <a:rPr sz="1800" b="0" baseline="-25000">
+                <a:solidFill>
+                  <a:srgbClr val="111111"/>
+                </a:solidFill>
+                <a:latin typeface="Calibri"/>
+                <a:ea typeface="Calibri"/>
+                <a:cs typeface="Calibri"/>
+              </a:rPr>
+              <a:t>23</a:t>
+            </a:r>
+            <a:r>
+              <a:rPr sz="1800" b="0">
+                <a:solidFill>
+                  <a:srgbClr val="111111"/>
+                </a:solidFill>
+                <a:latin typeface="Calibri"/>
+                <a:ea typeface="Calibri"/>
+                <a:cs typeface="Calibri"/>
+              </a:rPr>
+              <a:t>, U</a:t>
+            </a:r>
+            <a:r>
+              <a:rPr sz="1800" b="0" baseline="-25000">
+                <a:solidFill>
+                  <a:srgbClr val="111111"/>
+                </a:solidFill>
+                <a:latin typeface="Calibri"/>
+                <a:ea typeface="Calibri"/>
+                <a:cs typeface="Calibri"/>
+              </a:rPr>
+              <a:t>31</a:t>
+            </a:r>
+            <a:r>
+              <a:rPr sz="1800" b="0">
+                <a:solidFill>
+                  <a:srgbClr val="111111"/>
+                </a:solidFill>
+                <a:latin typeface="Calibri"/>
+                <a:ea typeface="Calibri"/>
+                <a:cs typeface="Calibri"/>
+              </a:rPr>
+              <a:t>): mellan två faser, även kallad huvudspänning.</a:t>
             </a:r>
           </a:p>
         </p:txBody>
@@ -17524,7 +17724,7 @@
       </p:sp>
       <p:pic xmlns:a="http://schemas.openxmlformats.org/drawingml/2006/main" xmlns:r="http://schemas.openxmlformats.org/officeDocument/2006/relationships">
         <p:nvPicPr>
-          <p:cNvPr id="9" name="Figur: Tre fasspänningsvisare 120 grader isär; " descr="Tre fasspänningsvisare 120 grader isär; linjespänningen U12 är sträckan mellan två visarspetsar"/>
+          <p:cNvPr id="9" name="Figur: Tre fasspänningsvisare 120 grader isär; " descr="Fasspänningarna U1N, U2N och U3N (fas–nollpunkt) 120 grader isär; linjespänningen U12 (fas–fas, huvudspänning) är sträckan mellan två visarspetsar"/>
           <p:cNvPicPr>
             <a:picLocks noChangeAspect="1"/>
           </p:cNvPicPr>
@@ -17703,7 +17903,73 @@
                 <a:ea typeface="Calibri"/>
                 <a:cs typeface="Calibri"/>
               </a:rPr>
-              <a:t>Linjespänningen är skillnaden mellan två fasvisare.</a:t>
+              <a:t>U</a:t>
+            </a:r>
+            <a:r>
+              <a:rPr sz="2200" b="0" baseline="-25000">
+                <a:solidFill>
+                  <a:srgbClr val="111111"/>
+                </a:solidFill>
+                <a:latin typeface="Calibri"/>
+                <a:ea typeface="Calibri"/>
+                <a:cs typeface="Calibri"/>
+              </a:rPr>
+              <a:t>12</a:t>
+            </a:r>
+            <a:r>
+              <a:rPr sz="2200" b="0">
+                <a:solidFill>
+                  <a:srgbClr val="111111"/>
+                </a:solidFill>
+                <a:latin typeface="Calibri"/>
+                <a:ea typeface="Calibri"/>
+                <a:cs typeface="Calibri"/>
+              </a:rPr>
+              <a:t> = U</a:t>
+            </a:r>
+            <a:r>
+              <a:rPr sz="2200" b="0" baseline="-25000">
+                <a:solidFill>
+                  <a:srgbClr val="111111"/>
+                </a:solidFill>
+                <a:latin typeface="Calibri"/>
+                <a:ea typeface="Calibri"/>
+                <a:cs typeface="Calibri"/>
+              </a:rPr>
+              <a:t>1N</a:t>
+            </a:r>
+            <a:r>
+              <a:rPr sz="2200" b="0">
+                <a:solidFill>
+                  <a:srgbClr val="111111"/>
+                </a:solidFill>
+                <a:latin typeface="Calibri"/>
+                <a:ea typeface="Calibri"/>
+                <a:cs typeface="Calibri"/>
+              </a:rPr>
+              <a:t> − U</a:t>
+            </a:r>
+            <a:r>
+              <a:rPr sz="2200" b="0" baseline="-25000">
+                <a:solidFill>
+                  <a:srgbClr val="111111"/>
+                </a:solidFill>
+                <a:latin typeface="Calibri"/>
+                <a:ea typeface="Calibri"/>
+                <a:cs typeface="Calibri"/>
+              </a:rPr>
+              <a:t>2N</a:t>
+            </a:r>
+            <a:r>
+              <a:rPr sz="2200" b="0">
+                <a:solidFill>
+                  <a:srgbClr val="111111"/>
+                </a:solidFill>
+                <a:latin typeface="Calibri"/>
+                <a:ea typeface="Calibri"/>
+                <a:cs typeface="Calibri"/>
+              </a:rPr>
+              <a:t> är en vektoriell skillnad.</a:t>
             </a:r>
           </a:p>
           <a:p xmlns:a="http://schemas.openxmlformats.org/drawingml/2006/main">
@@ -17727,7 +17993,7 @@
                 <a:ea typeface="Calibri"/>
                 <a:cs typeface="Calibri"/>
               </a:rPr>
-              <a:t>Visarna har samma längd och ligger 120° isär.</a:t>
+              <a:t>Lika långa visare, 120° isär.</a:t>
             </a:r>
           </a:p>
         </p:txBody>
@@ -17999,7 +18265,7 @@
                 <a:ea typeface="Calibri"/>
                 <a:cs typeface="Calibri"/>
               </a:rPr>
-              <a:t>Därför blir U</a:t>
+              <a:t>Därför är U</a:t>
             </a:r>
             <a:r>
               <a:rPr sz="2250" b="0" baseline="-25000">
@@ -18021,7 +18287,29 @@
                 <a:ea typeface="Calibri"/>
                 <a:cs typeface="Calibri"/>
               </a:rPr>
-              <a:t> = √3 U</a:t>
+              <a:t> = √3 · U</a:t>
+            </a:r>
+            <a:r>
+              <a:rPr sz="2250" b="0" baseline="-25000">
+                <a:solidFill>
+                  <a:srgbClr val="111111"/>
+                </a:solidFill>
+                <a:latin typeface="Calibri"/>
+                <a:ea typeface="Calibri"/>
+                <a:cs typeface="Calibri"/>
+              </a:rPr>
+              <a:t>F</a:t>
+            </a:r>
+            <a:r>
+              <a:rPr sz="2250" b="0">
+                <a:solidFill>
+                  <a:srgbClr val="111111"/>
+                </a:solidFill>
+                <a:latin typeface="Calibri"/>
+                <a:ea typeface="Calibri"/>
+                <a:cs typeface="Calibri"/>
+              </a:rPr>
+              <a:t> i ett symmetriskt system, aldrig 2 · U</a:t>
             </a:r>
             <a:r>
               <a:rPr sz="2250" b="0" baseline="-25000">
@@ -18108,7 +18396,7 @@
       </p:sp>
       <p:pic xmlns:a="http://schemas.openxmlformats.org/drawingml/2006/main" xmlns:r="http://schemas.openxmlformats.org/officeDocument/2006/relationships">
         <p:nvPicPr>
-          <p:cNvPr id="9" name="Figur: Linjespänningen U12 som skillnaden mella" descr="Linjespänningen U12 som skillnaden mellan fasvisarna U1N och U2N med 120 grader mellan dem"/>
+          <p:cNvPr id="9" name="Figur: Linjespänningen U12 som skillnaden mella" descr="Linjespänningen U12 är den vektoriella skillnaden mellan fasspänningarna U1N och U2N, sträckan mellan visarspetsarna; i ett symmetriskt system √3 gånger fasspänningen"/>
           <p:cNvPicPr>
             <a:picLocks noChangeAspect="1"/>
           </p:cNvPicPr>

--- a/sjoskolan/vecka-41/aktuell/v41_01_Trefassystemets_grunder_elev.pptx
+++ b/sjoskolan/vecka-41/aktuell/v41_01_Trefassystemets_grunder_elev.pptx
@@ -15862,7 +15862,7 @@
         <p:spPr>
           <a:xfrm xmlns:a="http://schemas.openxmlformats.org/drawingml/2006/main">
             <a:off x="762000" y="1666875"/>
-            <a:ext cx="7620000" cy="942975"/>
+            <a:ext cx="3977639" cy="942975"/>
           </a:xfrm>
           <a:prstGeom xmlns:a="http://schemas.openxmlformats.org/drawingml/2006/main" prst="rect">
             <a:avLst/>
@@ -15889,7 +15889,7 @@
               </a:defRPr>
             </a:pPr>
             <a:r>
-              <a:rPr sz="2250" b="0">
+              <a:rPr sz="2050" b="0">
                 <a:solidFill>
                   <a:srgbClr val="111111"/>
                 </a:solidFill>
@@ -15900,7 +15900,7 @@
               <a:t>U</a:t>
             </a:r>
             <a:r>
-              <a:rPr sz="2250" b="0" baseline="-25000">
+              <a:rPr sz="2050" b="0" baseline="-25000">
                 <a:solidFill>
                   <a:srgbClr val="111111"/>
                 </a:solidFill>
@@ -15911,7 +15911,7 @@
               <a:t>L</a:t>
             </a:r>
             <a:r>
-              <a:rPr sz="2250" b="0">
+              <a:rPr sz="2050" b="0">
                 <a:solidFill>
                   <a:srgbClr val="111111"/>
                 </a:solidFill>
@@ -15941,7 +15941,7 @@
         <p:spPr>
           <a:xfrm xmlns:a="http://schemas.openxmlformats.org/drawingml/2006/main">
             <a:off x="762000" y="2714625"/>
-            <a:ext cx="7620000" cy="942975"/>
+            <a:ext cx="3977639" cy="942975"/>
           </a:xfrm>
           <a:prstGeom xmlns:a="http://schemas.openxmlformats.org/drawingml/2006/main" prst="rect">
             <a:avLst/>
@@ -16020,7 +16020,7 @@
         <p:spPr>
           <a:xfrm xmlns:a="http://schemas.openxmlformats.org/drawingml/2006/main">
             <a:off x="762000" y="3762375"/>
-            <a:ext cx="7620000" cy="942975"/>
+            <a:ext cx="3977639" cy="942975"/>
           </a:xfrm>
           <a:prstGeom xmlns:a="http://schemas.openxmlformats.org/drawingml/2006/main" prst="rect">
             <a:avLst/>
@@ -16077,7 +16077,7 @@
         <p:spPr>
           <a:xfrm xmlns:a="http://schemas.openxmlformats.org/drawingml/2006/main">
             <a:off x="762000" y="4810125"/>
-            <a:ext cx="7620000" cy="942975"/>
+            <a:ext cx="3977639" cy="942975"/>
           </a:xfrm>
           <a:prstGeom xmlns:a="http://schemas.openxmlformats.org/drawingml/2006/main" prst="rect">
             <a:avLst/>
@@ -16104,7 +16104,7 @@
               </a:defRPr>
             </a:pPr>
             <a:r>
-              <a:rPr sz="2250" b="0">
+              <a:rPr sz="2000" b="0">
                 <a:solidFill>
                   <a:srgbClr val="111111"/>
                 </a:solidFill>
@@ -16174,6 +16174,30 @@
           </a:p>
         </p:txBody>
       </p:sp>
+      <p:pic xmlns:a="http://schemas.openxmlformats.org/drawingml/2006/main" xmlns:r="http://schemas.openxmlformats.org/officeDocument/2006/relationships">
+        <p:nvPicPr>
+          <p:cNvPr id="16" name="Figur: Generatorn kopplad i Y med kabeln L1, L2" descr="Generatorn kopplad i Y med kabeln L1, L2, L3 och N: linjespänningen UL mäts mellan två fasledare, fasspänningen UF mellan en fasledare och N; stjärnpunkten blir N"/>
+          <p:cNvPicPr>
+            <a:picLocks noChangeAspect="1"/>
+          </p:cNvPicPr>
+          <p:nvPr/>
+        </p:nvPicPr>
+        <p:blipFill>
+          <a:blip r:embed="rId4"/>
+          <a:stretch>
+            <a:fillRect/>
+          </a:stretch>
+        </p:blipFill>
+        <p:spPr>
+          <a:xfrm>
+            <a:off x="4892040" y="1645920"/>
+            <a:ext cx="3886200" cy="2173417"/>
+          </a:xfrm>
+          <a:prstGeom prst="rect">
+            <a:avLst/>
+          </a:prstGeom>
+        </p:spPr>
+      </p:pic>
     </p:spTree>
     <p:extLst>
       <p:ext uri="{BB962C8B-B14F-4D97-AF65-F5344CB8AC3E}">
@@ -17107,22 +17131,22 @@
       </p:sp>
       <p:pic xmlns:a="http://schemas.openxmlformats.org/drawingml/2006/main" xmlns:r="http://schemas.openxmlformats.org/officeDocument/2006/relationships">
         <p:nvPicPr>
-          <p:cNvPr id="11" name="schema-sinus" descr="L1, L2 och L3 över 20 ms (50 Hz) med toppvärdet 1, 120° isär. Streckad: linjespänningen U12 = L1 − L2 med toppvärdet √3 ≈ 1,73."/>
+          <p:cNvPr id="11" name="Figur: Generatorn i 3D: tre spolar 120° isär oc" descr="Generatorn i 3D: tre spolar 120° isär och en roterande magnet; bredvid kurvorna L1, L2 och L3 över 20 ms (50 Hz), 120° isär, med linjespänningen U12 = L1 − L2 streckad med toppvärdet √3 gånger fasens"/>
           <p:cNvPicPr>
             <a:picLocks noChangeAspect="1"/>
           </p:cNvPicPr>
           <p:nvPr/>
         </p:nvPicPr>
         <p:blipFill>
-          <a:blip r:embed="rId5"/>
+          <a:blip r:embed="rId6"/>
           <a:stretch>
             <a:fillRect/>
           </a:stretch>
         </p:blipFill>
         <p:spPr>
           <a:xfrm>
-            <a:off x="1710944" y="2395728"/>
-            <a:ext cx="5722112" cy="2340864"/>
+            <a:off x="914400" y="2395728"/>
+            <a:ext cx="7315200" cy="2333549"/>
           </a:xfrm>
           <a:prstGeom prst="rect">
             <a:avLst/>

--- a/sjoskolan/vecka-41/aktuell/v41_01_Trefassystemets_grunder_elev.pptx
+++ b/sjoskolan/vecka-41/aktuell/v41_01_Trefassystemets_grunder_elev.pptx
@@ -6914,14 +6914,14 @@
       </p:sp>
       <p:pic xmlns:a="http://schemas.openxmlformats.org/drawingml/2006/main" xmlns:r="http://schemas.openxmlformats.org/officeDocument/2006/relationships">
         <p:nvPicPr>
-          <p:cNvPr id="9" name="Figur: Ledarna L1, L2, L3 och N; fasspänningen " descr="Ledarna L1, L2, L3 och N; fasspänningen 120 V mellan L1 och N, linjespänningen okänd"/>
+          <p:cNvPr id="9" name="Figur: Ledarna L1, L2, L3 och N; fasspänningen " descr="Ledarna L1, L2, L3 och N; fasspänningen 230 V mellan L1 och N, linjespänningen okänd"/>
           <p:cNvPicPr>
             <a:picLocks noChangeAspect="1"/>
           </p:cNvPicPr>
           <p:nvPr/>
         </p:nvPicPr>
         <p:blipFill>
-          <a:blip r:embed="rId3"/>
+          <a:blip r:embed="rId4"/>
           <a:stretch>
             <a:fillRect/>
           </a:stretch>
@@ -15043,7 +15043,7 @@
           <p:nvPr/>
         </p:nvPicPr>
         <p:blipFill>
-          <a:blip r:embed="rId3"/>
+          <a:blip r:embed="rId5"/>
           <a:stretch>
             <a:fillRect/>
           </a:stretch>
@@ -17131,14 +17131,14 @@
       </p:sp>
       <p:pic xmlns:a="http://schemas.openxmlformats.org/drawingml/2006/main" xmlns:r="http://schemas.openxmlformats.org/officeDocument/2006/relationships">
         <p:nvPicPr>
-          <p:cNvPr id="11" name="Figur: Generatorn i 3D: tre spolar 120° isär oc" descr="Generatorn i 3D: tre spolar 120° isär och en roterande magnet; bredvid kurvorna L1, L2 och L3 över 20 ms (50 Hz), 120° isär, med linjespänningen U12 = L1 − L2 streckad med toppvärdet √3 gånger fasens"/>
+          <p:cNvPr id="11" name="Figur: Generatorn i 3D: tre spolar 120° isär oc" descr="Generatorn i 3D: tre spolar 120° isär och en roterande magnet som vrids medurs; bredvid kurvorna L1, L2 och L3 över 20 ms (50 Hz), 120° isär, med linjespänningen U12 = L1 − L2 streckad (toppvärde √3). Rotorns läge i bilden motsvarar 5 ms, då L1 har sitt toppvärde"/>
           <p:cNvPicPr>
             <a:picLocks noChangeAspect="1"/>
           </p:cNvPicPr>
           <p:nvPr/>
         </p:nvPicPr>
         <p:blipFill>
-          <a:blip r:embed="rId6"/>
+          <a:blip r:embed="rId7"/>
           <a:stretch>
             <a:fillRect/>
           </a:stretch>
@@ -17146,7 +17146,7 @@
         <p:spPr>
           <a:xfrm>
             <a:off x="914400" y="2395728"/>
-            <a:ext cx="7315200" cy="2333549"/>
+            <a:ext cx="7315200" cy="2332653"/>
           </a:xfrm>
           <a:prstGeom prst="rect">
             <a:avLst/>
